--- a/docs/presentation/customer-service.pptx
+++ b/docs/presentation/customer-service.pptx
@@ -2,20 +2,22 @@
 <file path=ppt/presentation.xml><?xml version="1.0" encoding="utf-8"?>
 <p:presentation xmlns:p="http://schemas.openxmlformats.org/presentationml/2006/main">
   <p:sldMasterIdLst>
-    <p:sldMasterId xmlns:r="http://schemas.openxmlformats.org/officeDocument/2006/relationships" id="2147483648" r:id="Rf0cb51e66aaf42ff"/>
+    <p:sldMasterId xmlns:r="http://schemas.openxmlformats.org/officeDocument/2006/relationships" id="2147483648" r:id="R24b5f64830a9485f"/>
   </p:sldMasterIdLst>
   <p:notesMasterIdLst>
-    <p:notesMasterId xmlns:r="http://schemas.openxmlformats.org/officeDocument/2006/relationships" r:id="R0f79344e5b0e4c5e"/>
+    <p:notesMasterId xmlns:r="http://schemas.openxmlformats.org/officeDocument/2006/relationships" r:id="R138368ccb86a4ca5"/>
   </p:notesMasterIdLst>
   <p:sldIdLst>
-    <p:sldId xmlns:r="http://schemas.openxmlformats.org/officeDocument/2006/relationships" id="256" r:id="Re0ab4108a7a945dd"/>
-    <p:sldId xmlns:r="http://schemas.openxmlformats.org/officeDocument/2006/relationships" id="257" r:id="Rc481d6c98b1d4015"/>
-    <p:sldId xmlns:r="http://schemas.openxmlformats.org/officeDocument/2006/relationships" id="258" r:id="R865ff1498f774626"/>
-    <p:sldId xmlns:r="http://schemas.openxmlformats.org/officeDocument/2006/relationships" id="259" r:id="R12bf39170b68471c"/>
-    <p:sldId xmlns:r="http://schemas.openxmlformats.org/officeDocument/2006/relationships" id="260" r:id="R5436a0c72a8c4ac4"/>
-    <p:sldId xmlns:r="http://schemas.openxmlformats.org/officeDocument/2006/relationships" id="261" r:id="R3ed1e1ad780542cc"/>
-    <p:sldId xmlns:r="http://schemas.openxmlformats.org/officeDocument/2006/relationships" id="262" r:id="Rdd61488bd7b14919"/>
-    <p:sldId xmlns:r="http://schemas.openxmlformats.org/officeDocument/2006/relationships" id="263" r:id="R3ab0018abbb84ed4"/>
+    <p:sldId xmlns:r="http://schemas.openxmlformats.org/officeDocument/2006/relationships" id="256" r:id="R0f46735f62b54b7b"/>
+    <p:sldId xmlns:r="http://schemas.openxmlformats.org/officeDocument/2006/relationships" id="257" r:id="R25a100b6b9814197"/>
+    <p:sldId xmlns:r="http://schemas.openxmlformats.org/officeDocument/2006/relationships" id="258" r:id="R29155b46a0774ee6"/>
+    <p:sldId xmlns:r="http://schemas.openxmlformats.org/officeDocument/2006/relationships" id="259" r:id="R31beccceb95e4217"/>
+    <p:sldId xmlns:r="http://schemas.openxmlformats.org/officeDocument/2006/relationships" id="260" r:id="R2a04d814a1c945ea"/>
+    <p:sldId xmlns:r="http://schemas.openxmlformats.org/officeDocument/2006/relationships" id="261" r:id="R84b23f551ad14ef0"/>
+    <p:sldId xmlns:r="http://schemas.openxmlformats.org/officeDocument/2006/relationships" id="262" r:id="R24cf9a84a2f54df6"/>
+    <p:sldId xmlns:r="http://schemas.openxmlformats.org/officeDocument/2006/relationships" id="263" r:id="Rc5718bc3fc6f4459"/>
+    <p:sldId xmlns:r="http://schemas.openxmlformats.org/officeDocument/2006/relationships" id="264" r:id="R1746bba4ccef4d86"/>
+    <p:sldId xmlns:r="http://schemas.openxmlformats.org/officeDocument/2006/relationships" id="265" r:id="R530d5b2b668341e6"/>
   </p:sldIdLst>
   <p:sldSz cx="12192000" cy="6858000"/>
   <p:notesSz cx="6858000" cy="9144000"/>
@@ -494,6 +496,91 @@
 </p:notes>
 </file>
 
+<file path=ppt/notesSlides/notesSlide10.xml><?xml version="1.0" encoding="utf-8"?>
+<p:notes xmlns:p="http://schemas.openxmlformats.org/presentationml/2006/main">
+  <p:cSld>
+    <p:spTree>
+      <p:nvGrpSpPr>
+        <p:cNvPr id="1" name=""/>
+        <p:cNvGrpSpPr/>
+        <p:nvPr/>
+      </p:nvGrpSpPr>
+      <p:grpSpPr>
+        <a:xfrm xmlns:a="http://schemas.openxmlformats.org/drawingml/2006/main"/>
+      </p:grpSpPr>
+      <p:sp>
+        <p:nvSpPr>
+          <p:cNvPr id="2" name="Slide Image Placeholder 1"/>
+          <p:cNvSpPr>
+            <a:spLocks xmlns:a="http://schemas.openxmlformats.org/drawingml/2006/main" noGrp="1"/>
+          </p:cNvSpPr>
+          <p:nvPr>
+            <p:ph type="sldImg" idx="0"/>
+          </p:nvPr>
+        </p:nvSpPr>
+        <p:spPr/>
+      </p:sp>
+      <p:sp>
+        <p:nvSpPr>
+          <p:cNvPr id="3" name="Notes Placeholder 2"/>
+          <p:cNvSpPr>
+            <a:spLocks xmlns:a="http://schemas.openxmlformats.org/drawingml/2006/main" noGrp="1"/>
+          </p:cNvSpPr>
+          <p:nvPr>
+            <p:ph type="body" idx="1"/>
+          </p:nvPr>
+        </p:nvSpPr>
+        <p:spPr/>
+        <p:txBody>
+          <a:bodyPr xmlns:a="http://schemas.openxmlformats.org/drawingml/2006/main"/>
+          <a:lstStyle xmlns:a="http://schemas.openxmlformats.org/drawingml/2006/main"/>
+          <a:p xmlns:a="http://schemas.openxmlformats.org/drawingml/2006/main">
+            <a:r>
+              <a:t>구현 범위는 정적인 고객센터 화면과 CSS 상호작용, 링크 연결입니다. 로그인 인증과 문의 접수 같은 서버 기능은 포함하지 않았습니다. 메뉴와 전체 서비스 보기 버튼도 화면 요소만 있고 별도 동작은 연결하지 않았습니다. CSS에는 이 페이지 전용 미디어쿼리가 없습니다. 마지막으로 전체 화면을 보여 준 뒤 아래로 스크롤해 왼쪽 메뉴를 확인하고, 로그인 버튼과 게임 카드의 선택 상태, 내부 페이지 링크를 차례로 시연합니다.</a:t>
+            </a:r>
+          </a:p>
+          <a:p xmlns:a="http://schemas.openxmlformats.org/drawingml/2006/main">
+            <a:r>
+              <a:t/>
+            </a:r>
+          </a:p>
+          <a:p xmlns:a="http://schemas.openxmlformats.org/drawingml/2006/main">
+            <a:r>
+              <a:t>근거: AX-web-clone main, 79003e6. html/04_customer_service.html, css/04_customer_service.css</a:t>
+            </a:r>
+          </a:p>
+          <a:p xmlns:a="http://schemas.openxmlformats.org/drawingml/2006/main">
+            <a:r>
+              <a:t>화면 캡처: 해당 커밋의 HTML/CSS와 로컬 원본 이미지. NEXON 및 각 게임 이미지의 권리는 원 권리자에게 있습니다.</a:t>
+            </a:r>
+          </a:p>
+        </p:txBody>
+      </p:sp>
+      <p:sp>
+        <p:nvSpPr>
+          <p:cNvPr id="4" name="Slide Number Placeholder 3"/>
+          <p:cNvSpPr>
+            <a:spLocks xmlns:a="http://schemas.openxmlformats.org/drawingml/2006/main" noGrp="1"/>
+          </p:cNvSpPr>
+          <p:nvPr>
+            <p:ph type="sldNum" idx="5"/>
+          </p:nvPr>
+        </p:nvSpPr>
+        <p:spPr/>
+        <p:txBody>
+          <a:bodyPr xmlns:a="http://schemas.openxmlformats.org/drawingml/2006/main"/>
+          <a:lstStyle xmlns:a="http://schemas.openxmlformats.org/drawingml/2006/main"/>
+          <a:p xmlns:a="http://schemas.openxmlformats.org/drawingml/2006/main"/>
+        </p:txBody>
+      </p:sp>
+    </p:spTree>
+  </p:cSld>
+  <p:clrMapOvr>
+    <a:masterClrMapping xmlns:a="http://schemas.openxmlformats.org/drawingml/2006/main"/>
+  </p:clrMapOvr>
+</p:notes>
+</file>
+
 <file path=ppt/notesSlides/notesSlide2.xml><?xml version="1.0" encoding="utf-8"?>
 <p:notes xmlns:p="http://schemas.openxmlformats.org/presentationml/2006/main">
   <p:cSld>
@@ -619,7 +706,7 @@
           <a:lstStyle xmlns:a="http://schemas.openxmlformats.org/drawingml/2006/main"/>
           <a:p xmlns:a="http://schemas.openxmlformats.org/drawingml/2006/main">
             <a:r>
-              <a:t>HTML은 header, aside, main, footer로 역할을 나눴습니다. CSS에서는 service-layout을 Flex 컨테이너로 만들고, 왼쪽 메뉴는 flex: 0 0 80px로 너비를 고정했습니다. 오른쪽 콘텐츠에는 flex: 1을 적용해 남은 공간을 사용하게 했습니다. min-width: 0은 Flex 항목의 기본 최소 너비 때문에 콘텐츠 영역이 불필요하게 커지는 것을 막는 역할입니다.</a:t>
+              <a:t>HTML에서는 header가 상단 서비스 메뉴를, aside가 고객센터 보조 메뉴를, main이 실제 본문을 담당합니다. aside와 main은 service-layout이라는 같은 부모의 자식이므로 부모에 display: flex를 지정하면 나란히 놓입니다. sidebar의 flex: 0 0 80px는 늘어나는 비율 0, 줄어드는 비율 0, 기준 너비 80픽셀을 의미합니다. 따라서 왼쪽은 고정하고 service-content의 flex: 1로 남은 공간을 채웁니다. min-width: 0은 콘텐츠가 가진 기본 최소 너비보다 작게 줄어드는 것을 허용합니다. 이처럼 부모는 배치 방향을 결정하고 자식은 자신의 크기를 지정합니다.</a:t>
             </a:r>
           </a:p>
           <a:p xmlns:a="http://schemas.openxmlformats.org/drawingml/2006/main">
@@ -629,12 +716,12 @@
           </a:p>
           <a:p xmlns:a="http://schemas.openxmlformats.org/drawingml/2006/main">
             <a:r>
-              <a:t>근거: AX-web-clone main, 79003e6. html/04_customer_service.html, css/04_customer_service.css: .service-layout, .sidebar, .service-content</a:t>
-            </a:r>
-          </a:p>
-          <a:p xmlns:a="http://schemas.openxmlformats.org/drawingml/2006/main">
-            <a:r>
-              <a:t>화면 캡처: 해당 커밋의 HTML/CSS와 로컬 원본 이미지. NEXON 및 각 게임 이미지의 권리는 원 권리자에게 있습니다.</a:t>
+              <a:t>근거: AX-web-clone main의 고객센터 소스, 79003e6. html/04_customer_service.html, css/04_customer_service.css: .service-layout, .sidebar, .service-content</a:t>
+            </a:r>
+          </a:p>
+          <a:p xmlns:a="http://schemas.openxmlformats.org/drawingml/2006/main">
+            <a:r>
+              <a:t>코드 발췌는 설명을 위해 일부 선언을 생략한 것입니다. NEXON 및 각 게임 이미지의 권리는 원 권리자에게 있습니다.</a:t>
             </a:r>
           </a:p>
         </p:txBody>
@@ -704,7 +791,7 @@
           <a:lstStyle xmlns:a="http://schemas.openxmlformats.org/drawingml/2006/main"/>
           <a:p xmlns:a="http://schemas.openxmlformats.org/drawingml/2006/main">
             <a:r>
-              <a:t>게임 목록은 각 카드의 크기를 일정하게 맞추고 Flex의 줄바꿈으로 배치했습니다. 카드의 전체 너비는 테두리를 포함해 138픽셀이고 이미지는 136픽셀 정사각형입니다. 이름은 높이 50픽셀 영역에서 중앙에 정렬합니다. 카드마다 margin을 넣는 대신 gap으로 가로와 세로 간격을 한 곳에서 관리합니다. 공간이 부족하면 다음 줄로 이동하며, 이 동작만으로 전체 모바일 화면 대응을 완료했다고 볼 수는 없습니다.</a:t>
+              <a:t>헤더는 왼쪽 메뉴와 오른쪽 계정 영역의 너비가 서로 다릅니다. 로고를 좌우 요소 사이에만 배치하면 헤더 전체의 정중앙과 달라질 수 있습니다. 실제 코드에서는 header-top에 relative를 지정해 배치 기준을 만들고, 그 안의 header-logo에는 absolute를 적용합니다. top과 left의 50%는 부모의 너비와 높이를 기준으로 로고의 왼쪽 위 시작점을 가운데에 놓습니다. 이어서 transform의 translate(-50%, -50%)로 로고 자신의 크기 절반만큼 되돌리면 로고의 중심이 부모의 중심과 일치합니다. absolute 요소는 일반 흐름에서 빠지므로 헤더는 별도의 높이 63픽셀로 공간을 확보하고 있습니다.</a:t>
             </a:r>
           </a:p>
           <a:p xmlns:a="http://schemas.openxmlformats.org/drawingml/2006/main">
@@ -714,12 +801,12 @@
           </a:p>
           <a:p xmlns:a="http://schemas.openxmlformats.org/drawingml/2006/main">
             <a:r>
-              <a:t>근거: AX-web-clone main, 79003e6. css/04_customer_service.css: .game-list, .game-card, .game-card img, .game-name</a:t>
-            </a:r>
-          </a:p>
-          <a:p xmlns:a="http://schemas.openxmlformats.org/drawingml/2006/main">
-            <a:r>
-              <a:t>화면 캡처: 해당 커밋의 HTML/CSS와 로컬 원본 이미지. NEXON 및 각 게임 이미지의 권리는 원 권리자에게 있습니다.</a:t>
+              <a:t>근거: AX-web-clone main의 고객센터 소스, 79003e6. css/04_customer_service.css: .header-top, .header-logo</a:t>
+            </a:r>
+          </a:p>
+          <a:p xmlns:a="http://schemas.openxmlformats.org/drawingml/2006/main">
+            <a:r>
+              <a:t>코드 발췌는 설명을 위해 일부 선언을 생략한 것입니다. NEXON 및 각 게임 이미지의 권리는 원 권리자에게 있습니다.</a:t>
             </a:r>
           </a:p>
         </p:txBody>
@@ -789,7 +876,7 @@
           <a:lstStyle xmlns:a="http://schemas.openxmlformats.org/drawingml/2006/main"/>
           <a:p xmlns:a="http://schemas.openxmlformats.org/drawingml/2006/main">
             <a:r>
-              <a:t>왼쪽 메뉴는 aside 전체를 화면에 고정하지 않고 그 안의 nav에 sticky를 적용했습니다. 그러면 회색 배경은 본문 높이만큼 이어지고, 실제 메뉴는 스크롤 중 화면 위에 붙습니다. sticky는 부모 영역 안에서 동작하므로 항상 화면 전체를 기준으로 고정하는 fixed와 차이가 있습니다. 메뉴 높이가 화면보다 커지는 경우를 고려해 최대 높이와 세로 스크롤도 지정했습니다.</a:t>
+              <a:t>게임 카드는 이미지와 이름을 세로로 배치한 반복 구조입니다. ul 안의 li마다 같은 game-card 클래스를 사용하므로 한 번 정한 스타일이 전체 카드에 적용됩니다. 카드 너비는 138픽셀이고, 가로 간격은 32픽셀입니다. 여섯 개를 놓으면 138 곱하기 6에 다섯 간격인 32 곱하기 5를 더해 988픽셀이 됩니다. game-section의 최대 너비 1040픽셀에서 좌우 패딩 25픽셀씩을 빼면 990픽셀이므로 넓은 화면에서 한 줄에 여섯 개가 들어갑니다. 화면이 좁아지면 flex-wrap: wrap에 의해 다음 줄로 넘어갑니다. gap은 카드 사이에만 들어가며 바깥쪽 여백은 section의 padding이 담당합니다.</a:t>
             </a:r>
           </a:p>
           <a:p xmlns:a="http://schemas.openxmlformats.org/drawingml/2006/main">
@@ -799,12 +886,12 @@
           </a:p>
           <a:p xmlns:a="http://schemas.openxmlformats.org/drawingml/2006/main">
             <a:r>
-              <a:t>근거: AX-web-clone main, 79003e6. css/04_customer_service.css: .sidebar, .sidebar nav</a:t>
-            </a:r>
-          </a:p>
-          <a:p xmlns:a="http://schemas.openxmlformats.org/drawingml/2006/main">
-            <a:r>
-              <a:t>화면 캡처: 해당 커밋의 HTML/CSS와 로컬 원본 이미지. NEXON 및 각 게임 이미지의 권리는 원 권리자에게 있습니다.</a:t>
+              <a:t>근거: AX-web-clone main의 고객센터 소스, 79003e6. css/04_customer_service.css: .game-section, .game-list, .game-card, .game-name</a:t>
+            </a:r>
+          </a:p>
+          <a:p xmlns:a="http://schemas.openxmlformats.org/drawingml/2006/main">
+            <a:r>
+              <a:t>코드 발췌는 설명을 위해 일부 선언을 생략한 것입니다. NEXON 및 각 게임 이미지의 권리는 원 권리자에게 있습니다.</a:t>
             </a:r>
           </a:p>
         </p:txBody>
@@ -874,7 +961,7 @@
           <a:lstStyle xmlns:a="http://schemas.openxmlformats.org/drawingml/2006/main"/>
           <a:p xmlns:a="http://schemas.openxmlformats.org/drawingml/2006/main">
             <a:r>
-              <a:t>로그인 버튼은 기본 상태에서 검정색이고 마우스를 올리면 파란색으로 바뀝니다. 같은 강조색을 focus-visible에도 적용했기 때문에 키보드로 이동할 때도 선택 위치를 확인할 수 있습니다. 게임 카드에는 같은 두 선택자를 사용해 그림자를 추가합니다. 그림자만 바꾸므로 선택할 때 카드 너비나 주변 배치가 바뀌지 않습니다. JavaScript 없이 CSS 선택자와 transition으로 표현한 부분입니다.</a:t>
+              <a:t>공통 규칙은 customer-service라는 페이지 클래스 아래에 지정했습니다. 이 방식은 고객센터 스타일이 다른 페이지의 같은 태그까지 무조건 바꾸는 것을 줄여 줍니다. box-sizing: border-box를 적용하면 지정한 너비 안에 패딩과 테두리가 포함됩니다. 따라서 카드의 전체 너비는 138픽셀이고 좌우 1픽셀 테두리를 뺀 이미지 공간이 136픽셀이 됩니다. 제목과 목록의 기본 margin과 padding도 초기화해 브라우저 기본값 대신 CSS에서 간격을 정합니다. 게임 이미지는 너비와 높이를 모두 136픽셀로 지정해 로드 전부터 공간을 잡습니다. object-fit: cover는 원본 비율을 유지하며 지정 영역을 채우므로 이미지가 눌리지는 않지만 비율이 다르면 일부가 잘릴 수 있습니다. 공통 img의 display: block은 인라인 이미지 아래에 생길 수 있는 기준선 여백을 없애는 역할도 합니다.</a:t>
             </a:r>
           </a:p>
           <a:p xmlns:a="http://schemas.openxmlformats.org/drawingml/2006/main">
@@ -884,12 +971,12 @@
           </a:p>
           <a:p xmlns:a="http://schemas.openxmlformats.org/drawingml/2006/main">
             <a:r>
-              <a:t>근거: AX-web-clone main, 79003e6. css/04_customer_service.css: .login-button:hover, .login-button:focus-visible, .game-card:hover, .game-card:focus-visible</a:t>
-            </a:r>
-          </a:p>
-          <a:p xmlns:a="http://schemas.openxmlformats.org/drawingml/2006/main">
-            <a:r>
-              <a:t>화면 캡처: 해당 커밋의 HTML/CSS와 로컬 원본 이미지. NEXON 및 각 게임 이미지의 권리는 원 권리자에게 있습니다.</a:t>
+              <a:t>근거: AX-web-clone main의 고객센터 소스, 79003e6. css/04_customer_service.css: box-sizing 초기화, h1/h2/ul 초기화, img, .game-card img, .game-card</a:t>
+            </a:r>
+          </a:p>
+          <a:p xmlns:a="http://schemas.openxmlformats.org/drawingml/2006/main">
+            <a:r>
+              <a:t>코드 발췌는 설명을 위해 일부 선언을 생략한 것입니다. NEXON 및 각 게임 이미지의 권리는 원 권리자에게 있습니다.</a:t>
             </a:r>
           </a:p>
         </p:txBody>
@@ -959,7 +1046,7 @@
           <a:lstStyle xmlns:a="http://schemas.openxmlformats.org/drawingml/2006/main"/>
           <a:p xmlns:a="http://schemas.openxmlformats.org/drawingml/2006/main">
             <a:r>
-              <a:t>상단 링크는 팀에서 구현한 페이지를 연결하는 역할을 합니다. 로고는 메인 페이지, 로그인과 회원가입은 로그인 페이지를 가리키며 공지사항, MY결제, 보안센터도 상대 경로로 연결했습니다. 게임별 문의와 도움말은 외부 서비스 주소를 사용합니다. 이는 링크 이동을 구현한 것으로 실제 로그인 인증이나 문의 접수 처리를 이 페이지 안에서 구현한 것은 아닙니다.</a:t>
+              <a:t>왼쪽 메뉴는 aside 전체를 화면에 고정하지 않고 그 안의 nav에 sticky를 적용했습니다. 그러면 회색 배경은 본문 높이만큼 이어지고, 실제 메뉴는 스크롤 중 화면 위에 붙습니다. sticky는 부모 영역 안에서 동작하므로 항상 화면 전체를 기준으로 고정하는 fixed와 차이가 있습니다. 메뉴 높이가 화면보다 커지는 경우를 고려해 최대 높이와 세로 스크롤도 지정했습니다.</a:t>
             </a:r>
           </a:p>
           <a:p xmlns:a="http://schemas.openxmlformats.org/drawingml/2006/main">
@@ -969,7 +1056,7 @@
           </a:p>
           <a:p xmlns:a="http://schemas.openxmlformats.org/drawingml/2006/main">
             <a:r>
-              <a:t>근거: AX-web-clone main, 79003e6. html/04_customer_service.html: a href 속성</a:t>
+              <a:t>근거: AX-web-clone main, 79003e6. css/04_customer_service.css: .sidebar, .sidebar nav</a:t>
             </a:r>
           </a:p>
           <a:p xmlns:a="http://schemas.openxmlformats.org/drawingml/2006/main">
@@ -1044,7 +1131,7 @@
           <a:lstStyle xmlns:a="http://schemas.openxmlformats.org/drawingml/2006/main"/>
           <a:p xmlns:a="http://schemas.openxmlformats.org/drawingml/2006/main">
             <a:r>
-              <a:t>구현 범위는 정적인 고객센터 화면과 CSS 상호작용, 링크 연결입니다. 로그인 인증과 문의 접수 같은 서버 기능은 포함하지 않았습니다. 메뉴와 전체 서비스 보기 버튼도 화면 요소만 있고 별도 동작은 연결하지 않았습니다. CSS에는 이 페이지 전용 미디어쿼리가 없습니다. 마지막으로 전체 화면을 보여 준 뒤 아래로 스크롤해 왼쪽 메뉴를 확인하고, 로그인 버튼과 게임 카드의 선택 상태, 내부 페이지 링크를 차례로 시연합니다.</a:t>
+              <a:t>버튼은 기본 검정색에서 hover일 때 파란색으로 바뀝니다. focus-visible은 브라우저가 포커스 표시가 필요하다고 판단한 상태에 적용되며, 일반적으로 키보드로 탭 이동할 때 확인할 수 있습니다. 두 선택자에 같은 색을 지정해 입력 방식이 달라도 선택 위치를 보여 줍니다. 기본 login-button에 transition: background-color 0.2s를 지정했기 때문에 색이 갑자기 바뀌지 않고 짧은 시간 동안 전환됩니다. 게임 카드에는 box-shadow를 0.3초 동안 전환하도록 했습니다. 그림자는 레이아웃에서 차지하는 크기를 바꾸지 않으므로 옆 카드가 밀리지 않습니다. 이 동작은 CSS 선택자와 transition으로 구현했고 JavaScript는 사용하지 않았습니다.</a:t>
             </a:r>
           </a:p>
           <a:p xmlns:a="http://schemas.openxmlformats.org/drawingml/2006/main">
@@ -1054,12 +1141,97 @@
           </a:p>
           <a:p xmlns:a="http://schemas.openxmlformats.org/drawingml/2006/main">
             <a:r>
-              <a:t>근거: AX-web-clone main, 79003e6. html/04_customer_service.html, css/04_customer_service.css</a:t>
-            </a:r>
-          </a:p>
-          <a:p xmlns:a="http://schemas.openxmlformats.org/drawingml/2006/main">
-            <a:r>
-              <a:t>화면 캡처: 해당 커밋의 HTML/CSS와 로컬 원본 이미지. NEXON 및 각 게임 이미지의 권리는 원 권리자에게 있습니다.</a:t>
+              <a:t>근거: AX-web-clone main의 고객센터 소스, 79003e6. css/04_customer_service.css: .login-button, .login-button:hover, .login-button:focus-visible, .game-card</a:t>
+            </a:r>
+          </a:p>
+          <a:p xmlns:a="http://schemas.openxmlformats.org/drawingml/2006/main">
+            <a:r>
+              <a:t>코드 발췌는 설명을 위해 일부 선언을 생략한 것입니다. NEXON 및 각 게임 이미지의 권리는 원 권리자에게 있습니다.</a:t>
+            </a:r>
+          </a:p>
+        </p:txBody>
+      </p:sp>
+      <p:sp>
+        <p:nvSpPr>
+          <p:cNvPr id="4" name="Slide Number Placeholder 3"/>
+          <p:cNvSpPr>
+            <a:spLocks xmlns:a="http://schemas.openxmlformats.org/drawingml/2006/main" noGrp="1"/>
+          </p:cNvSpPr>
+          <p:nvPr>
+            <p:ph type="sldNum" idx="5"/>
+          </p:nvPr>
+        </p:nvSpPr>
+        <p:spPr/>
+        <p:txBody>
+          <a:bodyPr xmlns:a="http://schemas.openxmlformats.org/drawingml/2006/main"/>
+          <a:lstStyle xmlns:a="http://schemas.openxmlformats.org/drawingml/2006/main"/>
+          <a:p xmlns:a="http://schemas.openxmlformats.org/drawingml/2006/main"/>
+        </p:txBody>
+      </p:sp>
+    </p:spTree>
+  </p:cSld>
+  <p:clrMapOvr>
+    <a:masterClrMapping xmlns:a="http://schemas.openxmlformats.org/drawingml/2006/main"/>
+  </p:clrMapOvr>
+</p:notes>
+</file>
+
+<file path=ppt/notesSlides/notesSlide9.xml><?xml version="1.0" encoding="utf-8"?>
+<p:notes xmlns:p="http://schemas.openxmlformats.org/presentationml/2006/main">
+  <p:cSld>
+    <p:spTree>
+      <p:nvGrpSpPr>
+        <p:cNvPr id="1" name=""/>
+        <p:cNvGrpSpPr/>
+        <p:nvPr/>
+      </p:nvGrpSpPr>
+      <p:grpSpPr>
+        <a:xfrm xmlns:a="http://schemas.openxmlformats.org/drawingml/2006/main"/>
+      </p:grpSpPr>
+      <p:sp>
+        <p:nvSpPr>
+          <p:cNvPr id="2" name="Slide Image Placeholder 1"/>
+          <p:cNvSpPr>
+            <a:spLocks xmlns:a="http://schemas.openxmlformats.org/drawingml/2006/main" noGrp="1"/>
+          </p:cNvSpPr>
+          <p:nvPr>
+            <p:ph type="sldImg" idx="0"/>
+          </p:nvPr>
+        </p:nvSpPr>
+        <p:spPr/>
+      </p:sp>
+      <p:sp>
+        <p:nvSpPr>
+          <p:cNvPr id="3" name="Notes Placeholder 2"/>
+          <p:cNvSpPr>
+            <a:spLocks xmlns:a="http://schemas.openxmlformats.org/drawingml/2006/main" noGrp="1"/>
+          </p:cNvSpPr>
+          <p:nvPr>
+            <p:ph type="body" idx="1"/>
+          </p:nvPr>
+        </p:nvSpPr>
+        <p:spPr/>
+        <p:txBody>
+          <a:bodyPr xmlns:a="http://schemas.openxmlformats.org/drawingml/2006/main"/>
+          <a:lstStyle xmlns:a="http://schemas.openxmlformats.org/drawingml/2006/main"/>
+          <a:p xmlns:a="http://schemas.openxmlformats.org/drawingml/2006/main">
+            <a:r>
+              <a:t>팀에서 만든 페이지끼리는 상대 경로를 사용해 연결합니다. 로고는 메인 페이지를 가리키고 로그인과 회원가입은 로그인 페이지로 이동합니다. 고객센터 메뉴에는 aria-current="page"를 넣었습니다. CSS의 속성 선택자가 이 값을 읽어 현재 메뉴의 밑줄과 글자색을 적용하므로 의미를 나타내는 HTML 속성과 시각적인 상태가 함께 연결됩니다. 게임별 문의와 이벤트 등은 외부 주소로 연결합니다. 이 연결은 이동 경로를 제공하는 것으로, 실제 로그인 인증이나 문의 저장 기능을 고객센터 페이지 안에서 처리하는 것은 아닙니다.</a:t>
+            </a:r>
+          </a:p>
+          <a:p xmlns:a="http://schemas.openxmlformats.org/drawingml/2006/main">
+            <a:r>
+              <a:t/>
+            </a:r>
+          </a:p>
+          <a:p xmlns:a="http://schemas.openxmlformats.org/drawingml/2006/main">
+            <a:r>
+              <a:t>근거: AX-web-clone main의 고객센터 소스, 79003e6. html/04_customer_service.html: a href, aria-current; css/04_customer_service.css: .site-nav a[aria-current="page"]</a:t>
+            </a:r>
+          </a:p>
+          <a:p xmlns:a="http://schemas.openxmlformats.org/drawingml/2006/main">
+            <a:r>
+              <a:t>코드 발췌는 설명을 위해 일부 선언을 생략한 것입니다. NEXON 및 각 게임 이미지의 권리는 원 권리자에게 있습니다.</a:t>
             </a:r>
           </a:p>
         </p:txBody>
@@ -1127,7 +1299,7 @@
   </p:cSld>
   <p:clrMap bg1="lt1" tx1="dk1" bg2="lt2" tx2="dk2" accent1="accent1" accent2="accent2" accent3="accent3" accent4="accent4" accent5="accent5" accent6="accent6" hlink="hlink" folHlink="folHlink"/>
   <p:sldLayoutIdLst>
-    <p:sldLayoutId xmlns:r="http://schemas.openxmlformats.org/officeDocument/2006/relationships" id="2147483649" r:id="Rb1fb08120170479c"/>
+    <p:sldLayoutId xmlns:r="http://schemas.openxmlformats.org/officeDocument/2006/relationships" id="2147483649" r:id="Rd3623a22f1714de2"/>
   </p:sldLayoutIdLst>
   <p:txStyles>
     <p:titleStyle>
@@ -1707,6 +1879,7 @@
           <a:lstStyle xmlns:a="http://schemas.openxmlformats.org/drawingml/2006/main"/>
           <a:p xmlns:a="http://schemas.openxmlformats.org/drawingml/2006/main">
             <a:pPr>
+              <a:buNone/>
               <a:defRPr sz="2100" b="1">
                 <a:solidFill>
                   <a:srgbClr val="005CC9"/>
@@ -1764,6 +1937,7 @@
           <a:lstStyle xmlns:a="http://schemas.openxmlformats.org/drawingml/2006/main"/>
           <a:p xmlns:a="http://schemas.openxmlformats.org/drawingml/2006/main">
             <a:pPr>
+              <a:buNone/>
               <a:defRPr sz="5850" b="1">
                 <a:solidFill>
                   <a:srgbClr val="18191C"/>
@@ -1821,6 +1995,7 @@
           <a:lstStyle xmlns:a="http://schemas.openxmlformats.org/drawingml/2006/main"/>
           <a:p xmlns:a="http://schemas.openxmlformats.org/drawingml/2006/main">
             <a:pPr>
+              <a:buNone/>
               <a:defRPr sz="3000" b="0">
                 <a:solidFill>
                   <a:srgbClr val="555D6B"/>
@@ -1878,6 +2053,7 @@
           <a:lstStyle xmlns:a="http://schemas.openxmlformats.org/drawingml/2006/main"/>
           <a:p xmlns:a="http://schemas.openxmlformats.org/drawingml/2006/main">
             <a:pPr>
+              <a:buNone/>
               <a:defRPr sz="1950" b="0">
                 <a:solidFill>
                   <a:srgbClr val="555D6B"/>
@@ -1901,6 +2077,7 @@
           </a:p>
           <a:p xmlns:a="http://schemas.openxmlformats.org/drawingml/2006/main">
             <a:pPr>
+              <a:buNone/>
               <a:defRPr sz="1950" b="0">
                 <a:solidFill>
                   <a:srgbClr val="555D6B"/>
@@ -1928,6 +2105,561 @@
     <p:extLst>
       <p:ext uri="{BB962C8B-B14F-4D97-AF65-F5344CB8AC3E}">
         <p14:creationId xmlns:p14="http://schemas.microsoft.com/office/powerpoint/2010/main" val="1492783317"/>
+      </p:ext>
+    </p:extLst>
+  </p:cSld>
+</p:sld>
+</file>
+
+<file path=ppt/slides/slide10.xml><?xml version="1.0" encoding="utf-8"?>
+<p:sld xmlns:p="http://schemas.openxmlformats.org/presentationml/2006/main">
+  <p:cSld>
+    <p:bg>
+      <p:bgPr>
+        <a:solidFill xmlns:a="http://schemas.openxmlformats.org/drawingml/2006/main">
+          <a:srgbClr val="FFFFFF"/>
+        </a:solidFill>
+      </p:bgPr>
+    </p:bg>
+    <p:spTree>
+      <p:nvGrpSpPr>
+        <p:cNvPr id="1" name=""/>
+        <p:cNvGrpSpPr/>
+        <p:nvPr/>
+      </p:nvGrpSpPr>
+      <p:grpSpPr>
+        <a:xfrm xmlns:a="http://schemas.openxmlformats.org/drawingml/2006/main"/>
+      </p:grpSpPr>
+      <p:sp>
+        <p:nvSpPr>
+          <p:cNvPr id="8" name="text-35">
+            <a:extLst xmlns:a="http://schemas.openxmlformats.org/drawingml/2006/main">
+              <a:ext uri="{FF2B5EF4-FFF2-40B4-BE49-F238E27FC236}">
+                <a16:creationId xmlns:a16="http://schemas.microsoft.com/office/drawing/2014/main" id="{C17173B0-30A9-4DE1-A3B1-0277A69C2150}"/>
+              </a:ext>
+            </a:extLst>
+          </p:cNvPr>
+          <p:cNvSpPr>
+            <a:spLocks xmlns:a="http://schemas.openxmlformats.org/drawingml/2006/main" noGrp="1"/>
+          </p:cNvSpPr>
+          <p:nvPr/>
+        </p:nvSpPr>
+        <p:spPr>
+          <a:xfrm xmlns:a="http://schemas.openxmlformats.org/drawingml/2006/main">
+            <a:off x="609600" y="438150"/>
+            <a:ext cx="10972800" cy="723900"/>
+          </a:xfrm>
+          <a:prstGeom xmlns:a="http://schemas.openxmlformats.org/drawingml/2006/main" prst="rect">
+            <a:avLst/>
+          </a:prstGeom>
+          <a:noFill xmlns:a="http://schemas.openxmlformats.org/drawingml/2006/main"/>
+          <a:ln xmlns:a="http://schemas.openxmlformats.org/drawingml/2006/main" w="0">
+            <a:noFill/>
+          </a:ln>
+        </p:spPr>
+        <p:txBody>
+          <a:bodyPr xmlns:a="http://schemas.openxmlformats.org/drawingml/2006/main">
+            <a:noAutofit/>
+          </a:bodyPr>
+          <a:lstStyle xmlns:a="http://schemas.openxmlformats.org/drawingml/2006/main"/>
+          <a:p xmlns:a="http://schemas.openxmlformats.org/drawingml/2006/main">
+            <a:pPr>
+              <a:buNone/>
+              <a:defRPr sz="3450" b="1">
+                <a:solidFill>
+                  <a:srgbClr val="18191C"/>
+                </a:solidFill>
+                <a:latin typeface="Malgun Gothic"/>
+                <a:ea typeface="Malgun Gothic"/>
+                <a:cs typeface="Malgun Gothic"/>
+              </a:defRPr>
+            </a:pPr>
+            <a:r>
+              <a:rPr sz="3450" b="1">
+                <a:solidFill>
+                  <a:srgbClr val="18191C"/>
+                </a:solidFill>
+                <a:latin typeface="Malgun Gothic"/>
+                <a:ea typeface="Malgun Gothic"/>
+                <a:cs typeface="Malgun Gothic"/>
+              </a:rPr>
+              <a:t>구현 범위와 시연</a:t>
+            </a:r>
+          </a:p>
+        </p:txBody>
+      </p:sp>
+      <p:sp>
+        <p:nvSpPr>
+          <p:cNvPr id="2" name="text-36">
+            <a:extLst xmlns:a="http://schemas.openxmlformats.org/drawingml/2006/main">
+              <a:ext uri="{FF2B5EF4-FFF2-40B4-BE49-F238E27FC236}">
+                <a16:creationId xmlns:a16="http://schemas.microsoft.com/office/drawing/2014/main" id="{C68FDBBD-D935-422F-8A03-1EE6A1F675CF}"/>
+              </a:ext>
+            </a:extLst>
+          </p:cNvPr>
+          <p:cNvSpPr>
+            <a:spLocks xmlns:a="http://schemas.openxmlformats.org/drawingml/2006/main" noGrp="1"/>
+          </p:cNvSpPr>
+          <p:nvPr/>
+        </p:nvSpPr>
+        <p:spPr>
+          <a:xfrm xmlns:a="http://schemas.openxmlformats.org/drawingml/2006/main">
+            <a:off x="609600" y="1552575"/>
+            <a:ext cx="5048250" cy="571500"/>
+          </a:xfrm>
+          <a:prstGeom xmlns:a="http://schemas.openxmlformats.org/drawingml/2006/main" prst="rect">
+            <a:avLst/>
+          </a:prstGeom>
+          <a:noFill xmlns:a="http://schemas.openxmlformats.org/drawingml/2006/main"/>
+          <a:ln xmlns:a="http://schemas.openxmlformats.org/drawingml/2006/main" w="0">
+            <a:noFill/>
+          </a:ln>
+        </p:spPr>
+        <p:txBody>
+          <a:bodyPr xmlns:a="http://schemas.openxmlformats.org/drawingml/2006/main">
+            <a:noAutofit/>
+          </a:bodyPr>
+          <a:lstStyle xmlns:a="http://schemas.openxmlformats.org/drawingml/2006/main"/>
+          <a:p xmlns:a="http://schemas.openxmlformats.org/drawingml/2006/main">
+            <a:pPr>
+              <a:buNone/>
+              <a:defRPr sz="2400" b="1">
+                <a:solidFill>
+                  <a:srgbClr val="005CC9"/>
+                </a:solidFill>
+                <a:latin typeface="Malgun Gothic"/>
+                <a:ea typeface="Malgun Gothic"/>
+                <a:cs typeface="Malgun Gothic"/>
+              </a:defRPr>
+            </a:pPr>
+            <a:r>
+              <a:rPr sz="2400" b="1">
+                <a:solidFill>
+                  <a:srgbClr val="005CC9"/>
+                </a:solidFill>
+                <a:latin typeface="Malgun Gothic"/>
+                <a:ea typeface="Malgun Gothic"/>
+                <a:cs typeface="Malgun Gothic"/>
+              </a:rPr>
+              <a:t>구현한 부분</a:t>
+            </a:r>
+          </a:p>
+        </p:txBody>
+      </p:sp>
+      <p:sp>
+        <p:nvSpPr>
+          <p:cNvPr id="3" name="text-37">
+            <a:extLst xmlns:a="http://schemas.openxmlformats.org/drawingml/2006/main">
+              <a:ext uri="{FF2B5EF4-FFF2-40B4-BE49-F238E27FC236}">
+                <a16:creationId xmlns:a16="http://schemas.microsoft.com/office/drawing/2014/main" id="{1292188D-0942-478B-939A-118FE50A4391}"/>
+              </a:ext>
+            </a:extLst>
+          </p:cNvPr>
+          <p:cNvSpPr>
+            <a:spLocks xmlns:a="http://schemas.openxmlformats.org/drawingml/2006/main" noGrp="1"/>
+          </p:cNvSpPr>
+          <p:nvPr/>
+        </p:nvSpPr>
+        <p:spPr>
+          <a:xfrm xmlns:a="http://schemas.openxmlformats.org/drawingml/2006/main">
+            <a:off x="609600" y="2466975"/>
+            <a:ext cx="5191125" cy="2247900"/>
+          </a:xfrm>
+          <a:prstGeom xmlns:a="http://schemas.openxmlformats.org/drawingml/2006/main" prst="rect">
+            <a:avLst/>
+          </a:prstGeom>
+          <a:noFill xmlns:a="http://schemas.openxmlformats.org/drawingml/2006/main"/>
+          <a:ln xmlns:a="http://schemas.openxmlformats.org/drawingml/2006/main" w="0">
+            <a:noFill/>
+          </a:ln>
+        </p:spPr>
+        <p:txBody>
+          <a:bodyPr xmlns:a="http://schemas.openxmlformats.org/drawingml/2006/main">
+            <a:noAutofit/>
+          </a:bodyPr>
+          <a:lstStyle xmlns:a="http://schemas.openxmlformats.org/drawingml/2006/main"/>
+          <a:p xmlns:a="http://schemas.openxmlformats.org/drawingml/2006/main">
+            <a:pPr>
+              <a:buNone/>
+              <a:defRPr sz="2175" b="0">
+                <a:solidFill>
+                  <a:srgbClr val="18191C"/>
+                </a:solidFill>
+                <a:latin typeface="Malgun Gothic"/>
+                <a:ea typeface="Malgun Gothic"/>
+                <a:cs typeface="Malgun Gothic"/>
+              </a:defRPr>
+            </a:pPr>
+            <a:r>
+              <a:rPr sz="2175" b="0">
+                <a:solidFill>
+                  <a:srgbClr val="18191C"/>
+                </a:solidFill>
+                <a:latin typeface="Malgun Gothic"/>
+                <a:ea typeface="Malgun Gothic"/>
+                <a:cs typeface="Malgun Gothic"/>
+              </a:rPr>
+              <a:t>HTML 화면 구조</a:t>
+            </a:r>
+          </a:p>
+          <a:p xmlns:a="http://schemas.openxmlformats.org/drawingml/2006/main">
+            <a:pPr>
+              <a:buNone/>
+              <a:defRPr sz="2175" b="0">
+                <a:solidFill>
+                  <a:srgbClr val="18191C"/>
+                </a:solidFill>
+                <a:latin typeface="Malgun Gothic"/>
+                <a:ea typeface="Malgun Gothic"/>
+                <a:cs typeface="Malgun Gothic"/>
+              </a:defRPr>
+            </a:pPr>
+            <a:r>
+              <a:rPr sz="2175" b="0">
+                <a:solidFill>
+                  <a:srgbClr val="18191C"/>
+                </a:solidFill>
+                <a:latin typeface="Malgun Gothic"/>
+                <a:ea typeface="Malgun Gothic"/>
+                <a:cs typeface="Malgun Gothic"/>
+              </a:rPr>
+              <a:t>Flex 기반 배치와 카드 줄바꿈</a:t>
+            </a:r>
+          </a:p>
+          <a:p xmlns:a="http://schemas.openxmlformats.org/drawingml/2006/main">
+            <a:pPr>
+              <a:buNone/>
+              <a:defRPr sz="2175" b="0">
+                <a:solidFill>
+                  <a:srgbClr val="18191C"/>
+                </a:solidFill>
+                <a:latin typeface="Malgun Gothic"/>
+                <a:ea typeface="Malgun Gothic"/>
+                <a:cs typeface="Malgun Gothic"/>
+              </a:defRPr>
+            </a:pPr>
+            <a:r>
+              <a:rPr sz="2175" b="0">
+                <a:solidFill>
+                  <a:srgbClr val="18191C"/>
+                </a:solidFill>
+                <a:latin typeface="Malgun Gothic"/>
+                <a:ea typeface="Malgun Gothic"/>
+                <a:cs typeface="Malgun Gothic"/>
+              </a:rPr>
+              <a:t>스크롤 메뉴와 CSS 선택 상태</a:t>
+            </a:r>
+          </a:p>
+          <a:p xmlns:a="http://schemas.openxmlformats.org/drawingml/2006/main">
+            <a:pPr>
+              <a:buNone/>
+              <a:defRPr sz="2175" b="0">
+                <a:solidFill>
+                  <a:srgbClr val="18191C"/>
+                </a:solidFill>
+                <a:latin typeface="Malgun Gothic"/>
+                <a:ea typeface="Malgun Gothic"/>
+                <a:cs typeface="Malgun Gothic"/>
+              </a:defRPr>
+            </a:pPr>
+            <a:r>
+              <a:rPr sz="2175" b="0">
+                <a:solidFill>
+                  <a:srgbClr val="18191C"/>
+                </a:solidFill>
+                <a:latin typeface="Malgun Gothic"/>
+                <a:ea typeface="Malgun Gothic"/>
+                <a:cs typeface="Malgun Gothic"/>
+              </a:rPr>
+              <a:t>내부 페이지와 외부 서비스 링크</a:t>
+            </a:r>
+          </a:p>
+        </p:txBody>
+      </p:sp>
+      <p:sp>
+        <p:nvSpPr>
+          <p:cNvPr id="4" name="text-38">
+            <a:extLst xmlns:a="http://schemas.openxmlformats.org/drawingml/2006/main">
+              <a:ext uri="{FF2B5EF4-FFF2-40B4-BE49-F238E27FC236}">
+                <a16:creationId xmlns:a16="http://schemas.microsoft.com/office/drawing/2014/main" id="{F89BDF42-D2EC-4759-A351-30DB32F43372}"/>
+              </a:ext>
+            </a:extLst>
+          </p:cNvPr>
+          <p:cNvSpPr>
+            <a:spLocks xmlns:a="http://schemas.openxmlformats.org/drawingml/2006/main" noGrp="1"/>
+          </p:cNvSpPr>
+          <p:nvPr/>
+        </p:nvSpPr>
+        <p:spPr>
+          <a:xfrm xmlns:a="http://schemas.openxmlformats.org/drawingml/2006/main">
+            <a:off x="6553200" y="1552575"/>
+            <a:ext cx="5048250" cy="571500"/>
+          </a:xfrm>
+          <a:prstGeom xmlns:a="http://schemas.openxmlformats.org/drawingml/2006/main" prst="rect">
+            <a:avLst/>
+          </a:prstGeom>
+          <a:noFill xmlns:a="http://schemas.openxmlformats.org/drawingml/2006/main"/>
+          <a:ln xmlns:a="http://schemas.openxmlformats.org/drawingml/2006/main" w="0">
+            <a:noFill/>
+          </a:ln>
+        </p:spPr>
+        <p:txBody>
+          <a:bodyPr xmlns:a="http://schemas.openxmlformats.org/drawingml/2006/main">
+            <a:noAutofit/>
+          </a:bodyPr>
+          <a:lstStyle xmlns:a="http://schemas.openxmlformats.org/drawingml/2006/main"/>
+          <a:p xmlns:a="http://schemas.openxmlformats.org/drawingml/2006/main">
+            <a:pPr>
+              <a:buNone/>
+              <a:defRPr sz="2400" b="1">
+                <a:solidFill>
+                  <a:srgbClr val="555D6B"/>
+                </a:solidFill>
+                <a:latin typeface="Malgun Gothic"/>
+                <a:ea typeface="Malgun Gothic"/>
+                <a:cs typeface="Malgun Gothic"/>
+              </a:defRPr>
+            </a:pPr>
+            <a:r>
+              <a:rPr sz="2400" b="1">
+                <a:solidFill>
+                  <a:srgbClr val="555D6B"/>
+                </a:solidFill>
+                <a:latin typeface="Malgun Gothic"/>
+                <a:ea typeface="Malgun Gothic"/>
+                <a:cs typeface="Malgun Gothic"/>
+              </a:rPr>
+              <a:t>현재 범위에 없는 부분</a:t>
+            </a:r>
+          </a:p>
+        </p:txBody>
+      </p:sp>
+      <p:sp>
+        <p:nvSpPr>
+          <p:cNvPr id="5" name="text-39">
+            <a:extLst xmlns:a="http://schemas.openxmlformats.org/drawingml/2006/main">
+              <a:ext uri="{FF2B5EF4-FFF2-40B4-BE49-F238E27FC236}">
+                <a16:creationId xmlns:a16="http://schemas.microsoft.com/office/drawing/2014/main" id="{D8EDE086-E48F-4BFC-8FF4-12417B7C59DD}"/>
+              </a:ext>
+            </a:extLst>
+          </p:cNvPr>
+          <p:cNvSpPr>
+            <a:spLocks xmlns:a="http://schemas.openxmlformats.org/drawingml/2006/main" noGrp="1"/>
+          </p:cNvSpPr>
+          <p:nvPr/>
+        </p:nvSpPr>
+        <p:spPr>
+          <a:xfrm xmlns:a="http://schemas.openxmlformats.org/drawingml/2006/main">
+            <a:off x="6553200" y="2466975"/>
+            <a:ext cx="5029200" cy="2247900"/>
+          </a:xfrm>
+          <a:prstGeom xmlns:a="http://schemas.openxmlformats.org/drawingml/2006/main" prst="rect">
+            <a:avLst/>
+          </a:prstGeom>
+          <a:noFill xmlns:a="http://schemas.openxmlformats.org/drawingml/2006/main"/>
+          <a:ln xmlns:a="http://schemas.openxmlformats.org/drawingml/2006/main" w="0">
+            <a:noFill/>
+          </a:ln>
+        </p:spPr>
+        <p:txBody>
+          <a:bodyPr xmlns:a="http://schemas.openxmlformats.org/drawingml/2006/main">
+            <a:noAutofit/>
+          </a:bodyPr>
+          <a:lstStyle xmlns:a="http://schemas.openxmlformats.org/drawingml/2006/main"/>
+          <a:p xmlns:a="http://schemas.openxmlformats.org/drawingml/2006/main">
+            <a:pPr>
+              <a:buNone/>
+              <a:defRPr sz="2175" b="0">
+                <a:solidFill>
+                  <a:srgbClr val="18191C"/>
+                </a:solidFill>
+                <a:latin typeface="Malgun Gothic"/>
+                <a:ea typeface="Malgun Gothic"/>
+                <a:cs typeface="Malgun Gothic"/>
+              </a:defRPr>
+            </a:pPr>
+            <a:r>
+              <a:rPr sz="2175" b="0">
+                <a:solidFill>
+                  <a:srgbClr val="18191C"/>
+                </a:solidFill>
+                <a:latin typeface="Malgun Gothic"/>
+                <a:ea typeface="Malgun Gothic"/>
+                <a:cs typeface="Malgun Gothic"/>
+              </a:rPr>
+              <a:t>로그인 인증과 문의 접수 처리</a:t>
+            </a:r>
+          </a:p>
+          <a:p xmlns:a="http://schemas.openxmlformats.org/drawingml/2006/main">
+            <a:pPr>
+              <a:buNone/>
+              <a:defRPr sz="2175" b="0">
+                <a:solidFill>
+                  <a:srgbClr val="18191C"/>
+                </a:solidFill>
+                <a:latin typeface="Malgun Gothic"/>
+                <a:ea typeface="Malgun Gothic"/>
+                <a:cs typeface="Malgun Gothic"/>
+              </a:defRPr>
+            </a:pPr>
+            <a:r>
+              <a:rPr sz="2175" b="0">
+                <a:solidFill>
+                  <a:srgbClr val="18191C"/>
+                </a:solidFill>
+                <a:latin typeface="Malgun Gothic"/>
+                <a:ea typeface="Malgun Gothic"/>
+                <a:cs typeface="Malgun Gothic"/>
+              </a:rPr>
+              <a:t>메뉴 / 전체 서비스 보기 버튼 동작</a:t>
+            </a:r>
+          </a:p>
+          <a:p xmlns:a="http://schemas.openxmlformats.org/drawingml/2006/main">
+            <a:pPr>
+              <a:buNone/>
+              <a:defRPr sz="2175" b="0">
+                <a:solidFill>
+                  <a:srgbClr val="18191C"/>
+                </a:solidFill>
+                <a:latin typeface="Malgun Gothic"/>
+                <a:ea typeface="Malgun Gothic"/>
+                <a:cs typeface="Malgun Gothic"/>
+              </a:defRPr>
+            </a:pPr>
+            <a:r>
+              <a:rPr sz="2175" b="0">
+                <a:solidFill>
+                  <a:srgbClr val="18191C"/>
+                </a:solidFill>
+                <a:latin typeface="Malgun Gothic"/>
+                <a:ea typeface="Malgun Gothic"/>
+                <a:cs typeface="Malgun Gothic"/>
+              </a:rPr>
+              <a:t>화면 크기별 전용 미디어쿼리</a:t>
+            </a:r>
+          </a:p>
+        </p:txBody>
+      </p:sp>
+      <p:sp>
+        <p:nvSpPr>
+          <p:cNvPr id="6" name="text-40">
+            <a:extLst xmlns:a="http://schemas.openxmlformats.org/drawingml/2006/main">
+              <a:ext uri="{FF2B5EF4-FFF2-40B4-BE49-F238E27FC236}">
+                <a16:creationId xmlns:a16="http://schemas.microsoft.com/office/drawing/2014/main" id="{2BB10473-E0D4-46C0-A508-3971C629DA54}"/>
+              </a:ext>
+            </a:extLst>
+          </p:cNvPr>
+          <p:cNvSpPr>
+            <a:spLocks xmlns:a="http://schemas.openxmlformats.org/drawingml/2006/main" noGrp="1"/>
+          </p:cNvSpPr>
+          <p:nvPr/>
+        </p:nvSpPr>
+        <p:spPr>
+          <a:xfrm xmlns:a="http://schemas.openxmlformats.org/drawingml/2006/main">
+            <a:off x="609600" y="5429250"/>
+            <a:ext cx="2476500" cy="457200"/>
+          </a:xfrm>
+          <a:prstGeom xmlns:a="http://schemas.openxmlformats.org/drawingml/2006/main" prst="rect">
+            <a:avLst/>
+          </a:prstGeom>
+          <a:noFill xmlns:a="http://schemas.openxmlformats.org/drawingml/2006/main"/>
+          <a:ln xmlns:a="http://schemas.openxmlformats.org/drawingml/2006/main" w="0">
+            <a:noFill/>
+          </a:ln>
+        </p:spPr>
+        <p:txBody>
+          <a:bodyPr xmlns:a="http://schemas.openxmlformats.org/drawingml/2006/main">
+            <a:noAutofit/>
+          </a:bodyPr>
+          <a:lstStyle xmlns:a="http://schemas.openxmlformats.org/drawingml/2006/main"/>
+          <a:p xmlns:a="http://schemas.openxmlformats.org/drawingml/2006/main">
+            <a:pPr>
+              <a:buNone/>
+              <a:defRPr sz="2025" b="1">
+                <a:solidFill>
+                  <a:srgbClr val="005CC9"/>
+                </a:solidFill>
+                <a:latin typeface="Malgun Gothic"/>
+                <a:ea typeface="Malgun Gothic"/>
+                <a:cs typeface="Malgun Gothic"/>
+              </a:defRPr>
+            </a:pPr>
+            <a:r>
+              <a:rPr sz="2025" b="1">
+                <a:solidFill>
+                  <a:srgbClr val="005CC9"/>
+                </a:solidFill>
+                <a:latin typeface="Malgun Gothic"/>
+                <a:ea typeface="Malgun Gothic"/>
+                <a:cs typeface="Malgun Gothic"/>
+              </a:rPr>
+              <a:t>시연 순서</a:t>
+            </a:r>
+          </a:p>
+        </p:txBody>
+      </p:sp>
+      <p:sp>
+        <p:nvSpPr>
+          <p:cNvPr id="7" name="text-41">
+            <a:extLst xmlns:a="http://schemas.openxmlformats.org/drawingml/2006/main">
+              <a:ext uri="{FF2B5EF4-FFF2-40B4-BE49-F238E27FC236}">
+                <a16:creationId xmlns:a16="http://schemas.microsoft.com/office/drawing/2014/main" id="{5E56D58D-EE8D-48FC-A0EC-83EF5E65F885}"/>
+              </a:ext>
+            </a:extLst>
+          </p:cNvPr>
+          <p:cNvSpPr>
+            <a:spLocks xmlns:a="http://schemas.openxmlformats.org/drawingml/2006/main" noGrp="1"/>
+          </p:cNvSpPr>
+          <p:nvPr/>
+        </p:nvSpPr>
+        <p:spPr>
+          <a:xfrm xmlns:a="http://schemas.openxmlformats.org/drawingml/2006/main">
+            <a:off x="609600" y="5981700"/>
+            <a:ext cx="10972800" cy="447675"/>
+          </a:xfrm>
+          <a:prstGeom xmlns:a="http://schemas.openxmlformats.org/drawingml/2006/main" prst="rect">
+            <a:avLst/>
+          </a:prstGeom>
+          <a:noFill xmlns:a="http://schemas.openxmlformats.org/drawingml/2006/main"/>
+          <a:ln xmlns:a="http://schemas.openxmlformats.org/drawingml/2006/main" w="0">
+            <a:noFill/>
+          </a:ln>
+        </p:spPr>
+        <p:txBody>
+          <a:bodyPr xmlns:a="http://schemas.openxmlformats.org/drawingml/2006/main">
+            <a:noAutofit/>
+          </a:bodyPr>
+          <a:lstStyle xmlns:a="http://schemas.openxmlformats.org/drawingml/2006/main"/>
+          <a:p xmlns:a="http://schemas.openxmlformats.org/drawingml/2006/main">
+            <a:pPr>
+              <a:buNone/>
+              <a:defRPr sz="1950" b="0">
+                <a:solidFill>
+                  <a:srgbClr val="18191C"/>
+                </a:solidFill>
+                <a:latin typeface="Malgun Gothic"/>
+                <a:ea typeface="Malgun Gothic"/>
+                <a:cs typeface="Malgun Gothic"/>
+              </a:defRPr>
+            </a:pPr>
+            <a:r>
+              <a:rPr sz="1950" b="0">
+                <a:solidFill>
+                  <a:srgbClr val="18191C"/>
+                </a:solidFill>
+                <a:latin typeface="Malgun Gothic"/>
+                <a:ea typeface="Malgun Gothic"/>
+                <a:cs typeface="Malgun Gothic"/>
+              </a:rPr>
+              <a:t>전체 화면 확인  /  스크롤  /  버튼 선택 상태  /  페이지 이동</a:t>
+            </a:r>
+          </a:p>
+        </p:txBody>
+      </p:sp>
+    </p:spTree>
+    <p:extLst>
+      <p:ext uri="{BB962C8B-B14F-4D97-AF65-F5344CB8AC3E}">
+        <p14:creationId xmlns:p14="http://schemas.microsoft.com/office/powerpoint/2010/main" val="1620894584"/>
       </p:ext>
     </p:extLst>
   </p:cSld>
@@ -1987,6 +2719,7 @@
           <a:lstStyle xmlns:a="http://schemas.openxmlformats.org/drawingml/2006/main"/>
           <a:p xmlns:a="http://schemas.openxmlformats.org/drawingml/2006/main">
             <a:pPr>
+              <a:buNone/>
               <a:defRPr sz="3450" b="1">
                 <a:solidFill>
                   <a:srgbClr val="18191C"/>
@@ -2012,14 +2745,14 @@
       </p:sp>
       <p:pic>
         <p:nvPicPr>
-          <p:cNvPr id="10" name=""/>
+          <p:cNvPr id="12" name=""/>
           <p:cNvPicPr>
             <a:picLocks xmlns:a="http://schemas.openxmlformats.org/drawingml/2006/main" noChangeAspect="1"/>
           </p:cNvPicPr>
           <p:nvPr/>
         </p:nvPicPr>
         <p:blipFill>
-          <a:blip xmlns:r="http://schemas.openxmlformats.org/officeDocument/2006/relationships" xmlns:a="http://schemas.openxmlformats.org/drawingml/2006/main" r:embed="R62135b838de94bcc"/>
+          <a:blip xmlns:r="http://schemas.openxmlformats.org/officeDocument/2006/relationships" xmlns:a="http://schemas.openxmlformats.org/drawingml/2006/main" r:embed="R2139478d977f4e26"/>
           <a:stretch xmlns:a="http://schemas.openxmlformats.org/drawingml/2006/main"/>
         </p:blipFill>
         <p:spPr>
@@ -2066,6 +2799,7 @@
           <a:lstStyle xmlns:a="http://schemas.openxmlformats.org/drawingml/2006/main"/>
           <a:p xmlns:a="http://schemas.openxmlformats.org/drawingml/2006/main">
             <a:pPr>
+              <a:buNone/>
               <a:defRPr sz="2025" b="1">
                 <a:solidFill>
                   <a:srgbClr val="005CC9"/>
@@ -2123,6 +2857,7 @@
           <a:lstStyle xmlns:a="http://schemas.openxmlformats.org/drawingml/2006/main"/>
           <a:p xmlns:a="http://schemas.openxmlformats.org/drawingml/2006/main">
             <a:pPr>
+              <a:buNone/>
               <a:defRPr sz="1875" b="0">
                 <a:solidFill>
                   <a:srgbClr val="18191C"/>
@@ -2180,6 +2915,7 @@
           <a:lstStyle xmlns:a="http://schemas.openxmlformats.org/drawingml/2006/main"/>
           <a:p xmlns:a="http://schemas.openxmlformats.org/drawingml/2006/main">
             <a:pPr>
+              <a:buNone/>
               <a:defRPr sz="2025" b="1">
                 <a:solidFill>
                   <a:srgbClr val="005CC9"/>
@@ -2237,6 +2973,7 @@
           <a:lstStyle xmlns:a="http://schemas.openxmlformats.org/drawingml/2006/main"/>
           <a:p xmlns:a="http://schemas.openxmlformats.org/drawingml/2006/main">
             <a:pPr>
+              <a:buNone/>
               <a:defRPr sz="1875" b="0">
                 <a:solidFill>
                   <a:srgbClr val="18191C"/>
@@ -2294,6 +3031,7 @@
           <a:lstStyle xmlns:a="http://schemas.openxmlformats.org/drawingml/2006/main"/>
           <a:p xmlns:a="http://schemas.openxmlformats.org/drawingml/2006/main">
             <a:pPr>
+              <a:buNone/>
               <a:defRPr sz="2025" b="1">
                 <a:solidFill>
                   <a:srgbClr val="005CC9"/>
@@ -2351,6 +3089,7 @@
           <a:lstStyle xmlns:a="http://schemas.openxmlformats.org/drawingml/2006/main"/>
           <a:p xmlns:a="http://schemas.openxmlformats.org/drawingml/2006/main">
             <a:pPr>
+              <a:buNone/>
               <a:defRPr sz="1875" b="0">
                 <a:solidFill>
                   <a:srgbClr val="18191C"/>
@@ -2437,6 +3176,7 @@
           <a:lstStyle xmlns:a="http://schemas.openxmlformats.org/drawingml/2006/main"/>
           <a:p xmlns:a="http://schemas.openxmlformats.org/drawingml/2006/main">
             <a:pPr>
+              <a:buNone/>
               <a:defRPr sz="3450" b="1">
                 <a:solidFill>
                   <a:srgbClr val="18191C"/>
@@ -2494,6 +3234,7 @@
           <a:lstStyle xmlns:a="http://schemas.openxmlformats.org/drawingml/2006/main"/>
           <a:p xmlns:a="http://schemas.openxmlformats.org/drawingml/2006/main">
             <a:pPr>
+              <a:buNone/>
               <a:defRPr sz="2100" b="1">
                 <a:solidFill>
                   <a:srgbClr val="005CC9"/>
@@ -2551,6 +3292,7 @@
           <a:lstStyle xmlns:a="http://schemas.openxmlformats.org/drawingml/2006/main"/>
           <a:p xmlns:a="http://schemas.openxmlformats.org/drawingml/2006/main">
             <a:pPr>
+              <a:buNone/>
               <a:defRPr sz="2025" b="0">
                 <a:solidFill>
                   <a:srgbClr val="18191C"/>
@@ -2574,6 +3316,7 @@
           </a:p>
           <a:p xmlns:a="http://schemas.openxmlformats.org/drawingml/2006/main">
             <a:pPr>
+              <a:buNone/>
               <a:defRPr sz="2025" b="0">
                 <a:solidFill>
                   <a:srgbClr val="18191C"/>
@@ -2602,6 +3345,7 @@
           </a:p>
           <a:p xmlns:a="http://schemas.openxmlformats.org/drawingml/2006/main">
             <a:pPr>
+              <a:buNone/>
               <a:defRPr sz="2025" b="0">
                 <a:solidFill>
                   <a:srgbClr val="18191C"/>
@@ -2625,6 +3369,7 @@
           </a:p>
           <a:p xmlns:a="http://schemas.openxmlformats.org/drawingml/2006/main">
             <a:pPr>
+              <a:buNone/>
               <a:defRPr sz="2025" b="0">
                 <a:solidFill>
                   <a:srgbClr val="18191C"/>
@@ -2653,6 +3398,7 @@
           </a:p>
           <a:p xmlns:a="http://schemas.openxmlformats.org/drawingml/2006/main">
             <a:pPr>
+              <a:buNone/>
               <a:defRPr sz="2025" b="0">
                 <a:solidFill>
                   <a:srgbClr val="18191C"/>
@@ -2676,6 +3422,7 @@
           </a:p>
           <a:p xmlns:a="http://schemas.openxmlformats.org/drawingml/2006/main">
             <a:pPr>
+              <a:buNone/>
               <a:defRPr sz="2025" b="0">
                 <a:solidFill>
                   <a:srgbClr val="18191C"/>
@@ -2704,6 +3451,7 @@
           </a:p>
           <a:p xmlns:a="http://schemas.openxmlformats.org/drawingml/2006/main">
             <a:pPr>
+              <a:buNone/>
               <a:defRPr sz="2025" b="0">
                 <a:solidFill>
                   <a:srgbClr val="18191C"/>
@@ -2727,6 +3475,7 @@
           </a:p>
           <a:p xmlns:a="http://schemas.openxmlformats.org/drawingml/2006/main">
             <a:pPr>
+              <a:buNone/>
               <a:defRPr sz="2025" b="0">
                 <a:solidFill>
                   <a:srgbClr val="18191C"/>
@@ -2784,6 +3533,7 @@
           <a:lstStyle xmlns:a="http://schemas.openxmlformats.org/drawingml/2006/main"/>
           <a:p xmlns:a="http://schemas.openxmlformats.org/drawingml/2006/main">
             <a:pPr>
+              <a:buNone/>
               <a:defRPr sz="2100" b="1">
                 <a:solidFill>
                   <a:srgbClr val="005CC9"/>
@@ -2841,71 +3591,98 @@
           <a:lstStyle xmlns:a="http://schemas.openxmlformats.org/drawingml/2006/main"/>
           <a:p xmlns:a="http://schemas.openxmlformats.org/drawingml/2006/main">
             <a:pPr>
-              <a:defRPr sz="2175" b="0">
-                <a:solidFill>
-                  <a:srgbClr val="18191C"/>
-                </a:solidFill>
-                <a:latin typeface="Malgun Gothic"/>
-                <a:ea typeface="Malgun Gothic"/>
-                <a:cs typeface="Malgun Gothic"/>
-              </a:defRPr>
-            </a:pPr>
-            <a:r>
-              <a:rPr sz="2175" b="0">
-                <a:solidFill>
-                  <a:srgbClr val="18191C"/>
-                </a:solidFill>
-                <a:latin typeface="Malgun Gothic"/>
-                <a:ea typeface="Malgun Gothic"/>
-                <a:cs typeface="Malgun Gothic"/>
-              </a:rPr>
-              <a:t>본문은 Flex로 좌우 분리</a:t>
-            </a:r>
-          </a:p>
-          <a:p xmlns:a="http://schemas.openxmlformats.org/drawingml/2006/main">
-            <a:pPr>
-              <a:defRPr sz="2175" b="0">
-                <a:solidFill>
-                  <a:srgbClr val="18191C"/>
-                </a:solidFill>
-                <a:latin typeface="Malgun Gothic"/>
-                <a:ea typeface="Malgun Gothic"/>
-                <a:cs typeface="Malgun Gothic"/>
-              </a:defRPr>
-            </a:pPr>
-            <a:r>
-              <a:rPr sz="2175" b="0">
-                <a:solidFill>
-                  <a:srgbClr val="18191C"/>
-                </a:solidFill>
-                <a:latin typeface="Malgun Gothic"/>
-                <a:ea typeface="Malgun Gothic"/>
-                <a:cs typeface="Malgun Gothic"/>
-              </a:rPr>
-              <a:t>왼쪽 메뉴는 80px 고정</a:t>
-            </a:r>
-          </a:p>
-          <a:p xmlns:a="http://schemas.openxmlformats.org/drawingml/2006/main">
-            <a:pPr>
-              <a:defRPr sz="2175" b="0">
-                <a:solidFill>
-                  <a:srgbClr val="18191C"/>
-                </a:solidFill>
-                <a:latin typeface="Malgun Gothic"/>
-                <a:ea typeface="Malgun Gothic"/>
-                <a:cs typeface="Malgun Gothic"/>
-              </a:defRPr>
-            </a:pPr>
-            <a:r>
-              <a:rPr sz="2175" b="0">
-                <a:solidFill>
-                  <a:srgbClr val="18191C"/>
-                </a:solidFill>
-                <a:latin typeface="Malgun Gothic"/>
-                <a:ea typeface="Malgun Gothic"/>
-                <a:cs typeface="Malgun Gothic"/>
-              </a:rPr>
-              <a:t>콘텐츠는 남은 너비 사용</a:t>
+              <a:buNone/>
+              <a:defRPr sz="1950" b="0">
+                <a:solidFill>
+                  <a:srgbClr val="18191C"/>
+                </a:solidFill>
+                <a:latin typeface="Malgun Gothic"/>
+                <a:ea typeface="Malgun Gothic"/>
+                <a:cs typeface="Malgun Gothic"/>
+              </a:defRPr>
+            </a:pPr>
+            <a:r>
+              <a:rPr sz="1950" b="0">
+                <a:solidFill>
+                  <a:srgbClr val="18191C"/>
+                </a:solidFill>
+                <a:latin typeface="Malgun Gothic"/>
+                <a:ea typeface="Malgun Gothic"/>
+                <a:cs typeface="Malgun Gothic"/>
+              </a:rPr>
+              <a:t>부모 .service-layout에 display: flex</a:t>
+            </a:r>
+          </a:p>
+          <a:p xmlns:a="http://schemas.openxmlformats.org/drawingml/2006/main">
+            <a:pPr>
+              <a:buNone/>
+              <a:defRPr sz="1950" b="0">
+                <a:solidFill>
+                  <a:srgbClr val="18191C"/>
+                </a:solidFill>
+                <a:latin typeface="Malgun Gothic"/>
+                <a:ea typeface="Malgun Gothic"/>
+                <a:cs typeface="Malgun Gothic"/>
+              </a:defRPr>
+            </a:pPr>
+            <a:r>
+              <a:rPr sz="1950" b="0">
+                <a:solidFill>
+                  <a:srgbClr val="18191C"/>
+                </a:solidFill>
+                <a:latin typeface="Malgun Gothic"/>
+                <a:ea typeface="Malgun Gothic"/>
+                <a:cs typeface="Malgun Gothic"/>
+              </a:rPr>
+              <a:t>왼쪽 80px 고정, 오른쪽은 남은 공간</a:t>
+            </a:r>
+          </a:p>
+          <a:p xmlns:a="http://schemas.openxmlformats.org/drawingml/2006/main">
+            <a:pPr>
+              <a:buNone/>
+              <a:defRPr sz="1950" b="0">
+                <a:solidFill>
+                  <a:srgbClr val="18191C"/>
+                </a:solidFill>
+                <a:latin typeface="Malgun Gothic"/>
+                <a:ea typeface="Malgun Gothic"/>
+                <a:cs typeface="Malgun Gothic"/>
+              </a:defRPr>
+            </a:pPr>
+            <a:r>
+              <a:rPr sz="1950" b="0">
+                <a:solidFill>
+                  <a:srgbClr val="18191C"/>
+                </a:solidFill>
+                <a:latin typeface="Malgun Gothic"/>
+                <a:ea typeface="Malgun Gothic"/>
+                <a:cs typeface="Malgun Gothic"/>
+              </a:rPr>
+              <a:t>flex: 0 0 80px는 늘거나 줄지 않음</a:t>
+            </a:r>
+          </a:p>
+          <a:p xmlns:a="http://schemas.openxmlformats.org/drawingml/2006/main">
+            <a:pPr>
+              <a:buNone/>
+              <a:defRPr sz="1950" b="0">
+                <a:solidFill>
+                  <a:srgbClr val="18191C"/>
+                </a:solidFill>
+                <a:latin typeface="Malgun Gothic"/>
+                <a:ea typeface="Malgun Gothic"/>
+                <a:cs typeface="Malgun Gothic"/>
+              </a:defRPr>
+            </a:pPr>
+            <a:r>
+              <a:rPr sz="1950" b="0">
+                <a:solidFill>
+                  <a:srgbClr val="18191C"/>
+                </a:solidFill>
+                <a:latin typeface="Malgun Gothic"/>
+                <a:ea typeface="Malgun Gothic"/>
+                <a:cs typeface="Malgun Gothic"/>
+              </a:rPr>
+              <a:t>min-width: 0으로 콘텐츠 축소 허용</a:t>
             </a:r>
           </a:p>
         </p:txBody>
@@ -2944,6 +3721,7 @@
           <a:lstStyle xmlns:a="http://schemas.openxmlformats.org/drawingml/2006/main"/>
           <a:p xmlns:a="http://schemas.openxmlformats.org/drawingml/2006/main">
             <a:pPr>
+              <a:buNone/>
               <a:defRPr sz="1950" b="0">
                 <a:solidFill>
                   <a:srgbClr val="555D6B"/>
@@ -2967,6 +3745,7 @@
           </a:p>
           <a:p xmlns:a="http://schemas.openxmlformats.org/drawingml/2006/main">
             <a:pPr>
+              <a:buNone/>
               <a:defRPr sz="1950" b="0">
                 <a:solidFill>
                   <a:srgbClr val="555D6B"/>
@@ -2990,6 +3769,7 @@
           </a:p>
           <a:p xmlns:a="http://schemas.openxmlformats.org/drawingml/2006/main">
             <a:pPr>
+              <a:buNone/>
               <a:defRPr sz="1950" b="0">
                 <a:solidFill>
                   <a:srgbClr val="555D6B"/>
@@ -3013,6 +3793,7 @@
           </a:p>
           <a:p xmlns:a="http://schemas.openxmlformats.org/drawingml/2006/main">
             <a:pPr>
+              <a:buNone/>
               <a:defRPr sz="1950" b="0">
                 <a:solidFill>
                   <a:srgbClr val="555D6B"/>
@@ -3036,6 +3817,7 @@
           </a:p>
           <a:p xmlns:a="http://schemas.openxmlformats.org/drawingml/2006/main">
             <a:pPr>
+              <a:buNone/>
               <a:defRPr sz="1950" b="0">
                 <a:solidFill>
                   <a:srgbClr val="555D6B"/>
@@ -3090,10 +3872,10 @@
       </p:grpSpPr>
       <p:sp>
         <p:nvSpPr>
-          <p:cNvPr id="7" name="text-17">
+          <p:cNvPr id="9" name="detail-100">
             <a:extLst xmlns:a="http://schemas.openxmlformats.org/drawingml/2006/main">
               <a:ext uri="{FF2B5EF4-FFF2-40B4-BE49-F238E27FC236}">
-                <a16:creationId xmlns:a16="http://schemas.microsoft.com/office/drawing/2014/main" id="{D86B8870-12FA-49EC-B577-F5B00628E61B}"/>
+                <a16:creationId xmlns:a16="http://schemas.microsoft.com/office/drawing/2014/main" id="{C4CEA1F4-483C-4701-9B1E-48D731865D7C}"/>
               </a:ext>
             </a:extLst>
           </p:cNvPr>
@@ -3140,39 +3922,17 @@
                 <a:ea typeface="Malgun Gothic"/>
                 <a:cs typeface="Malgun Gothic"/>
               </a:rPr>
-              <a:t>게임 카드의 크기와 줄바꿈</a:t>
-            </a:r>
-          </a:p>
-        </p:txBody>
-      </p:sp>
-      <p:pic>
-        <p:nvPicPr>
-          <p:cNvPr id="8" name=""/>
-          <p:cNvPicPr>
-            <a:picLocks xmlns:a="http://schemas.openxmlformats.org/drawingml/2006/main" noChangeAspect="1"/>
-          </p:cNvPicPr>
-          <p:nvPr/>
-        </p:nvPicPr>
-        <p:blipFill>
-          <a:blip xmlns:r="http://schemas.openxmlformats.org/officeDocument/2006/relationships" xmlns:a="http://schemas.openxmlformats.org/drawingml/2006/main" r:embed="Rd0acc8d774764b12"/>
-          <a:stretch xmlns:a="http://schemas.openxmlformats.org/drawingml/2006/main"/>
-        </p:blipFill>
-        <p:spPr>
-          <a:xfrm xmlns:a="http://schemas.openxmlformats.org/drawingml/2006/main">
-            <a:off x="609600" y="1489797"/>
-            <a:ext cx="7000875" cy="3097357"/>
-          </a:xfrm>
-          <a:prstGeom xmlns:a="http://schemas.openxmlformats.org/drawingml/2006/main" prst="rect">
-            <a:avLst/>
-          </a:prstGeom>
-        </p:spPr>
-      </p:pic>
-      <p:sp>
-        <p:nvSpPr>
-          <p:cNvPr id="3" name="text-18">
+              <a:t>헤더 로고를 중앙에 배치하는 방법</a:t>
+            </a:r>
+          </a:p>
+        </p:txBody>
+      </p:sp>
+      <p:sp>
+        <p:nvSpPr>
+          <p:cNvPr id="2" name="detail-101">
             <a:extLst xmlns:a="http://schemas.openxmlformats.org/drawingml/2006/main">
               <a:ext uri="{FF2B5EF4-FFF2-40B4-BE49-F238E27FC236}">
-                <a16:creationId xmlns:a16="http://schemas.microsoft.com/office/drawing/2014/main" id="{DAA7CFFE-47EA-4C36-8E63-75A731EC48B2}"/>
+                <a16:creationId xmlns:a16="http://schemas.microsoft.com/office/drawing/2014/main" id="{AF25EF65-1927-481A-B76C-3241A9CF62C4}"/>
               </a:ext>
             </a:extLst>
           </p:cNvPr>
@@ -3183,8 +3943,8 @@
         </p:nvSpPr>
         <p:spPr>
           <a:xfrm xmlns:a="http://schemas.openxmlformats.org/drawingml/2006/main">
-            <a:off x="8115300" y="1543050"/>
-            <a:ext cx="3429000" cy="533400"/>
+            <a:off x="609600" y="1562100"/>
+            <a:ext cx="5219700" cy="514350"/>
           </a:xfrm>
           <a:prstGeom xmlns:a="http://schemas.openxmlformats.org/drawingml/2006/main" prst="rect">
             <a:avLst/>
@@ -3219,17 +3979,17 @@
                 <a:ea typeface="Malgun Gothic"/>
                 <a:cs typeface="Malgun Gothic"/>
               </a:rPr>
-              <a:t>카드 너비 138px</a:t>
-            </a:r>
-          </a:p>
-        </p:txBody>
-      </p:sp>
-      <p:sp>
-        <p:nvSpPr>
-          <p:cNvPr id="4" name="text-19">
+              <a:t>배치 기준을 부모에 지정</a:t>
+            </a:r>
+          </a:p>
+        </p:txBody>
+      </p:sp>
+      <p:sp>
+        <p:nvSpPr>
+          <p:cNvPr id="3" name="detail-102">
             <a:extLst xmlns:a="http://schemas.openxmlformats.org/drawingml/2006/main">
               <a:ext uri="{FF2B5EF4-FFF2-40B4-BE49-F238E27FC236}">
-                <a16:creationId xmlns:a16="http://schemas.microsoft.com/office/drawing/2014/main" id="{A4C1A3CF-FCDE-469C-A103-04BAA9F49B23}"/>
+                <a16:creationId xmlns:a16="http://schemas.microsoft.com/office/drawing/2014/main" id="{731B2E29-7EF3-4020-96F6-B3DD54CBC720}"/>
               </a:ext>
             </a:extLst>
           </p:cNvPr>
@@ -3240,8 +4000,8 @@
         </p:nvSpPr>
         <p:spPr>
           <a:xfrm xmlns:a="http://schemas.openxmlformats.org/drawingml/2006/main">
-            <a:off x="8115300" y="2209800"/>
-            <a:ext cx="3429000" cy="1066800"/>
+            <a:off x="609600" y="2286000"/>
+            <a:ext cx="5353050" cy="3714750"/>
           </a:xfrm>
           <a:prstGeom xmlns:a="http://schemas.openxmlformats.org/drawingml/2006/main" prst="rect">
             <a:avLst/>
@@ -3258,58 +4018,224 @@
           <a:lstStyle xmlns:a="http://schemas.openxmlformats.org/drawingml/2006/main"/>
           <a:p xmlns:a="http://schemas.openxmlformats.org/drawingml/2006/main">
             <a:pPr>
-              <a:defRPr sz="2025" b="0">
-                <a:solidFill>
-                  <a:srgbClr val="18191C"/>
-                </a:solidFill>
-                <a:latin typeface="Malgun Gothic"/>
-                <a:ea typeface="Malgun Gothic"/>
-                <a:cs typeface="Malgun Gothic"/>
-              </a:defRPr>
-            </a:pPr>
-            <a:r>
-              <a:rPr sz="2025" b="0">
-                <a:solidFill>
-                  <a:srgbClr val="18191C"/>
-                </a:solidFill>
-                <a:latin typeface="Malgun Gothic"/>
-                <a:ea typeface="Malgun Gothic"/>
-                <a:cs typeface="Malgun Gothic"/>
-              </a:rPr>
-              <a:t>이미지는 136 × 136px</a:t>
-            </a:r>
-          </a:p>
-          <a:p xmlns:a="http://schemas.openxmlformats.org/drawingml/2006/main">
-            <a:pPr>
-              <a:defRPr sz="2025" b="0">
-                <a:solidFill>
-                  <a:srgbClr val="18191C"/>
-                </a:solidFill>
-                <a:latin typeface="Malgun Gothic"/>
-                <a:ea typeface="Malgun Gothic"/>
-                <a:cs typeface="Malgun Gothic"/>
-              </a:defRPr>
-            </a:pPr>
-            <a:r>
-              <a:rPr sz="2025" b="0">
-                <a:solidFill>
-                  <a:srgbClr val="18191C"/>
-                </a:solidFill>
-                <a:latin typeface="Malgun Gothic"/>
-                <a:ea typeface="Malgun Gothic"/>
-                <a:cs typeface="Malgun Gothic"/>
-              </a:rPr>
-              <a:t>이름 영역은 높이 50px</a:t>
-            </a:r>
-          </a:p>
-        </p:txBody>
-      </p:sp>
-      <p:sp>
-        <p:nvSpPr>
-          <p:cNvPr id="5" name="text-20">
+              <a:defRPr sz="1950" b="0">
+                <a:solidFill>
+                  <a:srgbClr val="555D6B"/>
+                </a:solidFill>
+                <a:latin typeface="Malgun Gothic"/>
+                <a:ea typeface="Malgun Gothic"/>
+                <a:cs typeface="Malgun Gothic"/>
+              </a:defRPr>
+            </a:pPr>
+            <a:r>
+              <a:rPr sz="1950" b="0">
+                <a:solidFill>
+                  <a:srgbClr val="555D6B"/>
+                </a:solidFill>
+                <a:latin typeface="Malgun Gothic"/>
+                <a:ea typeface="Malgun Gothic"/>
+                <a:cs typeface="Malgun Gothic"/>
+              </a:rPr>
+              <a:t>.header-top {</a:t>
+            </a:r>
+          </a:p>
+          <a:p xmlns:a="http://schemas.openxmlformats.org/drawingml/2006/main">
+            <a:pPr>
+              <a:defRPr sz="1950" b="0">
+                <a:solidFill>
+                  <a:srgbClr val="555D6B"/>
+                </a:solidFill>
+                <a:latin typeface="Malgun Gothic"/>
+                <a:ea typeface="Malgun Gothic"/>
+                <a:cs typeface="Malgun Gothic"/>
+              </a:defRPr>
+            </a:pPr>
+            <a:r>
+              <a:rPr sz="1950" b="0">
+                <a:solidFill>
+                  <a:srgbClr val="555D6B"/>
+                </a:solidFill>
+                <a:latin typeface="Malgun Gothic"/>
+                <a:ea typeface="Malgun Gothic"/>
+                <a:cs typeface="Malgun Gothic"/>
+              </a:rPr>
+              <a:t>  position: relative;</a:t>
+            </a:r>
+          </a:p>
+          <a:p xmlns:a="http://schemas.openxmlformats.org/drawingml/2006/main">
+            <a:pPr>
+              <a:defRPr sz="1950" b="0">
+                <a:solidFill>
+                  <a:srgbClr val="555D6B"/>
+                </a:solidFill>
+                <a:latin typeface="Malgun Gothic"/>
+                <a:ea typeface="Malgun Gothic"/>
+                <a:cs typeface="Malgun Gothic"/>
+              </a:defRPr>
+            </a:pPr>
+            <a:r>
+              <a:rPr sz="1950" b="0">
+                <a:solidFill>
+                  <a:srgbClr val="555D6B"/>
+                </a:solidFill>
+                <a:latin typeface="Malgun Gothic"/>
+                <a:ea typeface="Malgun Gothic"/>
+                <a:cs typeface="Malgun Gothic"/>
+              </a:rPr>
+              <a:t>}</a:t>
+            </a:r>
+          </a:p>
+          <a:p xmlns:a="http://schemas.openxmlformats.org/drawingml/2006/main">
+            <a:r>
+              <a:t/>
+            </a:r>
+          </a:p>
+          <a:p xmlns:a="http://schemas.openxmlformats.org/drawingml/2006/main">
+            <a:pPr>
+              <a:defRPr sz="1950" b="0">
+                <a:solidFill>
+                  <a:srgbClr val="555D6B"/>
+                </a:solidFill>
+                <a:latin typeface="Malgun Gothic"/>
+                <a:ea typeface="Malgun Gothic"/>
+                <a:cs typeface="Malgun Gothic"/>
+              </a:defRPr>
+            </a:pPr>
+            <a:r>
+              <a:rPr sz="1950" b="0">
+                <a:solidFill>
+                  <a:srgbClr val="555D6B"/>
+                </a:solidFill>
+                <a:latin typeface="Malgun Gothic"/>
+                <a:ea typeface="Malgun Gothic"/>
+                <a:cs typeface="Malgun Gothic"/>
+              </a:rPr>
+              <a:t>.header-logo {</a:t>
+            </a:r>
+          </a:p>
+          <a:p xmlns:a="http://schemas.openxmlformats.org/drawingml/2006/main">
+            <a:pPr>
+              <a:defRPr sz="1950" b="0">
+                <a:solidFill>
+                  <a:srgbClr val="555D6B"/>
+                </a:solidFill>
+                <a:latin typeface="Malgun Gothic"/>
+                <a:ea typeface="Malgun Gothic"/>
+                <a:cs typeface="Malgun Gothic"/>
+              </a:defRPr>
+            </a:pPr>
+            <a:r>
+              <a:rPr sz="1950" b="0">
+                <a:solidFill>
+                  <a:srgbClr val="555D6B"/>
+                </a:solidFill>
+                <a:latin typeface="Malgun Gothic"/>
+                <a:ea typeface="Malgun Gothic"/>
+                <a:cs typeface="Malgun Gothic"/>
+              </a:rPr>
+              <a:t>  position: absolute;</a:t>
+            </a:r>
+          </a:p>
+          <a:p xmlns:a="http://schemas.openxmlformats.org/drawingml/2006/main">
+            <a:pPr>
+              <a:defRPr sz="1950" b="0">
+                <a:solidFill>
+                  <a:srgbClr val="555D6B"/>
+                </a:solidFill>
+                <a:latin typeface="Malgun Gothic"/>
+                <a:ea typeface="Malgun Gothic"/>
+                <a:cs typeface="Malgun Gothic"/>
+              </a:defRPr>
+            </a:pPr>
+            <a:r>
+              <a:rPr sz="1950" b="0">
+                <a:solidFill>
+                  <a:srgbClr val="555D6B"/>
+                </a:solidFill>
+                <a:latin typeface="Malgun Gothic"/>
+                <a:ea typeface="Malgun Gothic"/>
+                <a:cs typeface="Malgun Gothic"/>
+              </a:rPr>
+              <a:t>  top: 50%;</a:t>
+            </a:r>
+          </a:p>
+          <a:p xmlns:a="http://schemas.openxmlformats.org/drawingml/2006/main">
+            <a:pPr>
+              <a:defRPr sz="1950" b="0">
+                <a:solidFill>
+                  <a:srgbClr val="555D6B"/>
+                </a:solidFill>
+                <a:latin typeface="Malgun Gothic"/>
+                <a:ea typeface="Malgun Gothic"/>
+                <a:cs typeface="Malgun Gothic"/>
+              </a:defRPr>
+            </a:pPr>
+            <a:r>
+              <a:rPr sz="1950" b="0">
+                <a:solidFill>
+                  <a:srgbClr val="555D6B"/>
+                </a:solidFill>
+                <a:latin typeface="Malgun Gothic"/>
+                <a:ea typeface="Malgun Gothic"/>
+                <a:cs typeface="Malgun Gothic"/>
+              </a:rPr>
+              <a:t>  left: 50%;</a:t>
+            </a:r>
+          </a:p>
+          <a:p xmlns:a="http://schemas.openxmlformats.org/drawingml/2006/main">
+            <a:pPr>
+              <a:defRPr sz="1950" b="0">
+                <a:solidFill>
+                  <a:srgbClr val="555D6B"/>
+                </a:solidFill>
+                <a:latin typeface="Malgun Gothic"/>
+                <a:ea typeface="Malgun Gothic"/>
+                <a:cs typeface="Malgun Gothic"/>
+              </a:defRPr>
+            </a:pPr>
+            <a:r>
+              <a:rPr sz="1950" b="0">
+                <a:solidFill>
+                  <a:srgbClr val="555D6B"/>
+                </a:solidFill>
+                <a:latin typeface="Malgun Gothic"/>
+                <a:ea typeface="Malgun Gothic"/>
+                <a:cs typeface="Malgun Gothic"/>
+              </a:rPr>
+              <a:t>  transform: translate(-50%, -50%);</a:t>
+            </a:r>
+          </a:p>
+          <a:p xmlns:a="http://schemas.openxmlformats.org/drawingml/2006/main">
+            <a:pPr>
+              <a:defRPr sz="1950" b="0">
+                <a:solidFill>
+                  <a:srgbClr val="555D6B"/>
+                </a:solidFill>
+                <a:latin typeface="Malgun Gothic"/>
+                <a:ea typeface="Malgun Gothic"/>
+                <a:cs typeface="Malgun Gothic"/>
+              </a:defRPr>
+            </a:pPr>
+            <a:r>
+              <a:rPr sz="1950" b="0">
+                <a:solidFill>
+                  <a:srgbClr val="555D6B"/>
+                </a:solidFill>
+                <a:latin typeface="Malgun Gothic"/>
+                <a:ea typeface="Malgun Gothic"/>
+                <a:cs typeface="Malgun Gothic"/>
+              </a:rPr>
+              <a:t>}</a:t>
+            </a:r>
+          </a:p>
+        </p:txBody>
+      </p:sp>
+      <p:sp>
+        <p:nvSpPr>
+          <p:cNvPr id="4" name="detail-103">
             <a:extLst xmlns:a="http://schemas.openxmlformats.org/drawingml/2006/main">
               <a:ext uri="{FF2B5EF4-FFF2-40B4-BE49-F238E27FC236}">
-                <a16:creationId xmlns:a16="http://schemas.microsoft.com/office/drawing/2014/main" id="{1FBC6A85-A2C7-478E-942D-D53E7B05A45D}"/>
+                <a16:creationId xmlns:a16="http://schemas.microsoft.com/office/drawing/2014/main" id="{BE9B942D-912A-4007-A892-A89BDB2F6748}"/>
               </a:ext>
             </a:extLst>
           </p:cNvPr>
@@ -3320,8 +4246,8 @@
         </p:nvSpPr>
         <p:spPr>
           <a:xfrm xmlns:a="http://schemas.openxmlformats.org/drawingml/2006/main">
-            <a:off x="8115300" y="3619500"/>
-            <a:ext cx="3429000" cy="1066800"/>
+            <a:off x="6553200" y="1562100"/>
+            <a:ext cx="5029200" cy="533400"/>
           </a:xfrm>
           <a:prstGeom xmlns:a="http://schemas.openxmlformats.org/drawingml/2006/main" prst="rect">
             <a:avLst/>
@@ -3338,58 +4264,35 @@
           <a:lstStyle xmlns:a="http://schemas.openxmlformats.org/drawingml/2006/main"/>
           <a:p xmlns:a="http://schemas.openxmlformats.org/drawingml/2006/main">
             <a:pPr>
-              <a:defRPr sz="2025" b="0">
-                <a:solidFill>
-                  <a:srgbClr val="18191C"/>
-                </a:solidFill>
-                <a:latin typeface="Malgun Gothic"/>
-                <a:ea typeface="Malgun Gothic"/>
-                <a:cs typeface="Malgun Gothic"/>
-              </a:defRPr>
-            </a:pPr>
-            <a:r>
-              <a:rPr sz="2025" b="0">
-                <a:solidFill>
-                  <a:srgbClr val="18191C"/>
-                </a:solidFill>
-                <a:latin typeface="Malgun Gothic"/>
-                <a:ea typeface="Malgun Gothic"/>
-                <a:cs typeface="Malgun Gothic"/>
-              </a:rPr>
-              <a:t>가로 간격 32px</a:t>
-            </a:r>
-          </a:p>
-          <a:p xmlns:a="http://schemas.openxmlformats.org/drawingml/2006/main">
-            <a:pPr>
-              <a:defRPr sz="2025" b="0">
-                <a:solidFill>
-                  <a:srgbClr val="18191C"/>
-                </a:solidFill>
-                <a:latin typeface="Malgun Gothic"/>
-                <a:ea typeface="Malgun Gothic"/>
-                <a:cs typeface="Malgun Gothic"/>
-              </a:defRPr>
-            </a:pPr>
-            <a:r>
-              <a:rPr sz="2025" b="0">
-                <a:solidFill>
-                  <a:srgbClr val="18191C"/>
-                </a:solidFill>
-                <a:latin typeface="Malgun Gothic"/>
-                <a:ea typeface="Malgun Gothic"/>
-                <a:cs typeface="Malgun Gothic"/>
-              </a:rPr>
-              <a:t>세로 간격 62px</a:t>
-            </a:r>
-          </a:p>
-        </p:txBody>
-      </p:sp>
-      <p:sp>
-        <p:nvSpPr>
-          <p:cNvPr id="6" name="text-21">
+              <a:defRPr sz="2175" b="1">
+                <a:solidFill>
+                  <a:srgbClr val="005CC9"/>
+                </a:solidFill>
+                <a:latin typeface="Malgun Gothic"/>
+                <a:ea typeface="Malgun Gothic"/>
+                <a:cs typeface="Malgun Gothic"/>
+              </a:defRPr>
+            </a:pPr>
+            <a:r>
+              <a:rPr sz="2175" b="1">
+                <a:solidFill>
+                  <a:srgbClr val="005CC9"/>
+                </a:solidFill>
+                <a:latin typeface="Malgun Gothic"/>
+                <a:ea typeface="Malgun Gothic"/>
+                <a:cs typeface="Malgun Gothic"/>
+              </a:rPr>
+              <a:t>1. 부모의 가운데로 이동</a:t>
+            </a:r>
+          </a:p>
+        </p:txBody>
+      </p:sp>
+      <p:sp>
+        <p:nvSpPr>
+          <p:cNvPr id="5" name="detail-104">
             <a:extLst xmlns:a="http://schemas.openxmlformats.org/drawingml/2006/main">
               <a:ext uri="{FF2B5EF4-FFF2-40B4-BE49-F238E27FC236}">
-                <a16:creationId xmlns:a16="http://schemas.microsoft.com/office/drawing/2014/main" id="{D26510C7-96B4-47C0-A83B-189212A9D24B}"/>
+                <a16:creationId xmlns:a16="http://schemas.microsoft.com/office/drawing/2014/main" id="{8ACAADF7-D4D2-42F2-88E8-16CDE0BBF8A6}"/>
               </a:ext>
             </a:extLst>
           </p:cNvPr>
@@ -3400,8 +4303,8 @@
         </p:nvSpPr>
         <p:spPr>
           <a:xfrm xmlns:a="http://schemas.openxmlformats.org/drawingml/2006/main">
-            <a:off x="609600" y="4933950"/>
-            <a:ext cx="10810875" cy="1409700"/>
+            <a:off x="6553200" y="2190750"/>
+            <a:ext cx="4953000" cy="923925"/>
           </a:xfrm>
           <a:prstGeom xmlns:a="http://schemas.openxmlformats.org/drawingml/2006/main" prst="rect">
             <a:avLst/>
@@ -3420,7 +4323,7 @@
             <a:pPr>
               <a:defRPr sz="2025" b="0">
                 <a:solidFill>
-                  <a:srgbClr val="555D6B"/>
+                  <a:srgbClr val="18191C"/>
                 </a:solidFill>
                 <a:latin typeface="Malgun Gothic"/>
                 <a:ea typeface="Malgun Gothic"/>
@@ -3430,20 +4333,20 @@
             <a:r>
               <a:rPr sz="2025" b="0">
                 <a:solidFill>
-                  <a:srgbClr val="555D6B"/>
-                </a:solidFill>
-                <a:latin typeface="Malgun Gothic"/>
-                <a:ea typeface="Malgun Gothic"/>
-                <a:cs typeface="Malgun Gothic"/>
-              </a:rPr>
-              <a:t>.game-list {</a:t>
+                  <a:srgbClr val="18191C"/>
+                </a:solidFill>
+                <a:latin typeface="Malgun Gothic"/>
+                <a:ea typeface="Malgun Gothic"/>
+                <a:cs typeface="Malgun Gothic"/>
+              </a:rPr>
+              <a:t>top과 left의 50%는</a:t>
             </a:r>
           </a:p>
           <a:p xmlns:a="http://schemas.openxmlformats.org/drawingml/2006/main">
             <a:pPr>
               <a:defRPr sz="2025" b="0">
                 <a:solidFill>
-                  <a:srgbClr val="555D6B"/>
+                  <a:srgbClr val="18191C"/>
                 </a:solidFill>
                 <a:latin typeface="Malgun Gothic"/>
                 <a:ea typeface="Malgun Gothic"/>
@@ -3453,20 +4356,111 @@
             <a:r>
               <a:rPr sz="2025" b="0">
                 <a:solidFill>
-                  <a:srgbClr val="555D6B"/>
-                </a:solidFill>
-                <a:latin typeface="Malgun Gothic"/>
-                <a:ea typeface="Malgun Gothic"/>
-                <a:cs typeface="Malgun Gothic"/>
-              </a:rPr>
-              <a:t>  display: flex;  flex-wrap: wrap;</a:t>
-            </a:r>
-          </a:p>
+                  <a:srgbClr val="18191C"/>
+                </a:solidFill>
+                <a:latin typeface="Malgun Gothic"/>
+                <a:ea typeface="Malgun Gothic"/>
+                <a:cs typeface="Malgun Gothic"/>
+              </a:rPr>
+              <a:t>부모를 기준으로 위치를 정함</a:t>
+            </a:r>
+          </a:p>
+        </p:txBody>
+      </p:sp>
+      <p:sp>
+        <p:nvSpPr>
+          <p:cNvPr id="6" name="detail-105">
+            <a:extLst xmlns:a="http://schemas.openxmlformats.org/drawingml/2006/main">
+              <a:ext uri="{FF2B5EF4-FFF2-40B4-BE49-F238E27FC236}">
+                <a16:creationId xmlns:a16="http://schemas.microsoft.com/office/drawing/2014/main" id="{D08BE4D3-1AB9-4D99-8DB2-F0EE3887CFB2}"/>
+              </a:ext>
+            </a:extLst>
+          </p:cNvPr>
+          <p:cNvSpPr>
+            <a:spLocks xmlns:a="http://schemas.openxmlformats.org/drawingml/2006/main" noGrp="1"/>
+          </p:cNvSpPr>
+          <p:nvPr/>
+        </p:nvSpPr>
+        <p:spPr>
+          <a:xfrm xmlns:a="http://schemas.openxmlformats.org/drawingml/2006/main">
+            <a:off x="6553200" y="3343275"/>
+            <a:ext cx="5029200" cy="552450"/>
+          </a:xfrm>
+          <a:prstGeom xmlns:a="http://schemas.openxmlformats.org/drawingml/2006/main" prst="rect">
+            <a:avLst/>
+          </a:prstGeom>
+          <a:noFill xmlns:a="http://schemas.openxmlformats.org/drawingml/2006/main"/>
+          <a:ln xmlns:a="http://schemas.openxmlformats.org/drawingml/2006/main" w="0">
+            <a:noFill/>
+          </a:ln>
+        </p:spPr>
+        <p:txBody>
+          <a:bodyPr xmlns:a="http://schemas.openxmlformats.org/drawingml/2006/main">
+            <a:noAutofit/>
+          </a:bodyPr>
+          <a:lstStyle xmlns:a="http://schemas.openxmlformats.org/drawingml/2006/main"/>
+          <a:p xmlns:a="http://schemas.openxmlformats.org/drawingml/2006/main">
+            <a:pPr>
+              <a:defRPr sz="2175" b="1">
+                <a:solidFill>
+                  <a:srgbClr val="005CC9"/>
+                </a:solidFill>
+                <a:latin typeface="Malgun Gothic"/>
+                <a:ea typeface="Malgun Gothic"/>
+                <a:cs typeface="Malgun Gothic"/>
+              </a:defRPr>
+            </a:pPr>
+            <a:r>
+              <a:rPr sz="2175" b="1">
+                <a:solidFill>
+                  <a:srgbClr val="005CC9"/>
+                </a:solidFill>
+                <a:latin typeface="Malgun Gothic"/>
+                <a:ea typeface="Malgun Gothic"/>
+                <a:cs typeface="Malgun Gothic"/>
+              </a:rPr>
+              <a:t>2. 로고 크기의 절반만큼 보정</a:t>
+            </a:r>
+          </a:p>
+        </p:txBody>
+      </p:sp>
+      <p:sp>
+        <p:nvSpPr>
+          <p:cNvPr id="7" name="detail-106">
+            <a:extLst xmlns:a="http://schemas.openxmlformats.org/drawingml/2006/main">
+              <a:ext uri="{FF2B5EF4-FFF2-40B4-BE49-F238E27FC236}">
+                <a16:creationId xmlns:a16="http://schemas.microsoft.com/office/drawing/2014/main" id="{3B11EE59-076D-4BC6-8897-EC97ED668E6A}"/>
+              </a:ext>
+            </a:extLst>
+          </p:cNvPr>
+          <p:cNvSpPr>
+            <a:spLocks xmlns:a="http://schemas.openxmlformats.org/drawingml/2006/main" noGrp="1"/>
+          </p:cNvSpPr>
+          <p:nvPr/>
+        </p:nvSpPr>
+        <p:spPr>
+          <a:xfrm xmlns:a="http://schemas.openxmlformats.org/drawingml/2006/main">
+            <a:off x="6553200" y="3990975"/>
+            <a:ext cx="4953000" cy="923925"/>
+          </a:xfrm>
+          <a:prstGeom xmlns:a="http://schemas.openxmlformats.org/drawingml/2006/main" prst="rect">
+            <a:avLst/>
+          </a:prstGeom>
+          <a:noFill xmlns:a="http://schemas.openxmlformats.org/drawingml/2006/main"/>
+          <a:ln xmlns:a="http://schemas.openxmlformats.org/drawingml/2006/main" w="0">
+            <a:noFill/>
+          </a:ln>
+        </p:spPr>
+        <p:txBody>
+          <a:bodyPr xmlns:a="http://schemas.openxmlformats.org/drawingml/2006/main">
+            <a:noAutofit/>
+          </a:bodyPr>
+          <a:lstStyle xmlns:a="http://schemas.openxmlformats.org/drawingml/2006/main"/>
           <a:p xmlns:a="http://schemas.openxmlformats.org/drawingml/2006/main">
             <a:pPr>
               <a:defRPr sz="2025" b="0">
                 <a:solidFill>
-                  <a:srgbClr val="555D6B"/>
+                  <a:srgbClr val="18191C"/>
                 </a:solidFill>
                 <a:latin typeface="Malgun Gothic"/>
                 <a:ea typeface="Malgun Gothic"/>
@@ -3476,20 +4470,20 @@
             <a:r>
               <a:rPr sz="2025" b="0">
                 <a:solidFill>
-                  <a:srgbClr val="555D6B"/>
-                </a:solidFill>
-                <a:latin typeface="Malgun Gothic"/>
-                <a:ea typeface="Malgun Gothic"/>
-                <a:cs typeface="Malgun Gothic"/>
-              </a:rPr>
-              <a:t>  gap: 62px 32px;</a:t>
+                  <a:srgbClr val="18191C"/>
+                </a:solidFill>
+                <a:latin typeface="Malgun Gothic"/>
+                <a:ea typeface="Malgun Gothic"/>
+                <a:cs typeface="Malgun Gothic"/>
+              </a:rPr>
+              <a:t>translate의 -50%는</a:t>
             </a:r>
           </a:p>
           <a:p xmlns:a="http://schemas.openxmlformats.org/drawingml/2006/main">
             <a:pPr>
               <a:defRPr sz="2025" b="0">
                 <a:solidFill>
-                  <a:srgbClr val="555D6B"/>
+                  <a:srgbClr val="18191C"/>
                 </a:solidFill>
                 <a:latin typeface="Malgun Gothic"/>
                 <a:ea typeface="Malgun Gothic"/>
@@ -3499,13 +4493,93 @@
             <a:r>
               <a:rPr sz="2025" b="0">
                 <a:solidFill>
-                  <a:srgbClr val="555D6B"/>
-                </a:solidFill>
-                <a:latin typeface="Malgun Gothic"/>
-                <a:ea typeface="Malgun Gothic"/>
-                <a:cs typeface="Malgun Gothic"/>
-              </a:rPr>
-              <a:t>}</a:t>
+                  <a:srgbClr val="18191C"/>
+                </a:solidFill>
+                <a:latin typeface="Malgun Gothic"/>
+                <a:ea typeface="Malgun Gothic"/>
+                <a:cs typeface="Malgun Gothic"/>
+              </a:rPr>
+              <a:t>로고 자신의 너비와 높이가 기준</a:t>
+            </a:r>
+          </a:p>
+        </p:txBody>
+      </p:sp>
+      <p:sp>
+        <p:nvSpPr>
+          <p:cNvPr id="8" name="detail-107">
+            <a:extLst xmlns:a="http://schemas.openxmlformats.org/drawingml/2006/main">
+              <a:ext uri="{FF2B5EF4-FFF2-40B4-BE49-F238E27FC236}">
+                <a16:creationId xmlns:a16="http://schemas.microsoft.com/office/drawing/2014/main" id="{96581B0A-37C2-4232-BF15-56F769463C24}"/>
+              </a:ext>
+            </a:extLst>
+          </p:cNvPr>
+          <p:cNvSpPr>
+            <a:spLocks xmlns:a="http://schemas.openxmlformats.org/drawingml/2006/main" noGrp="1"/>
+          </p:cNvSpPr>
+          <p:nvPr/>
+        </p:nvSpPr>
+        <p:spPr>
+          <a:xfrm xmlns:a="http://schemas.openxmlformats.org/drawingml/2006/main">
+            <a:off x="6553200" y="5457825"/>
+            <a:ext cx="4953000" cy="857250"/>
+          </a:xfrm>
+          <a:prstGeom xmlns:a="http://schemas.openxmlformats.org/drawingml/2006/main" prst="rect">
+            <a:avLst/>
+          </a:prstGeom>
+          <a:noFill xmlns:a="http://schemas.openxmlformats.org/drawingml/2006/main"/>
+          <a:ln xmlns:a="http://schemas.openxmlformats.org/drawingml/2006/main" w="0">
+            <a:noFill/>
+          </a:ln>
+        </p:spPr>
+        <p:txBody>
+          <a:bodyPr xmlns:a="http://schemas.openxmlformats.org/drawingml/2006/main">
+            <a:noAutofit/>
+          </a:bodyPr>
+          <a:lstStyle xmlns:a="http://schemas.openxmlformats.org/drawingml/2006/main"/>
+          <a:p xmlns:a="http://schemas.openxmlformats.org/drawingml/2006/main">
+            <a:pPr>
+              <a:defRPr sz="2100" b="1">
+                <a:solidFill>
+                  <a:srgbClr val="18191C"/>
+                </a:solidFill>
+                <a:latin typeface="Malgun Gothic"/>
+                <a:ea typeface="Malgun Gothic"/>
+                <a:cs typeface="Malgun Gothic"/>
+              </a:defRPr>
+            </a:pPr>
+            <a:r>
+              <a:rPr sz="2100" b="1">
+                <a:solidFill>
+                  <a:srgbClr val="18191C"/>
+                </a:solidFill>
+                <a:latin typeface="Malgun Gothic"/>
+                <a:ea typeface="Malgun Gothic"/>
+                <a:cs typeface="Malgun Gothic"/>
+              </a:rPr>
+              <a:t>좌우 메뉴의 너비가 달라도</a:t>
+            </a:r>
+          </a:p>
+          <a:p xmlns:a="http://schemas.openxmlformats.org/drawingml/2006/main">
+            <a:pPr>
+              <a:defRPr sz="2100" b="1">
+                <a:solidFill>
+                  <a:srgbClr val="18191C"/>
+                </a:solidFill>
+                <a:latin typeface="Malgun Gothic"/>
+                <a:ea typeface="Malgun Gothic"/>
+                <a:cs typeface="Malgun Gothic"/>
+              </a:defRPr>
+            </a:pPr>
+            <a:r>
+              <a:rPr sz="2100" b="1">
+                <a:solidFill>
+                  <a:srgbClr val="18191C"/>
+                </a:solidFill>
+                <a:latin typeface="Malgun Gothic"/>
+                <a:ea typeface="Malgun Gothic"/>
+                <a:cs typeface="Malgun Gothic"/>
+              </a:rPr>
+              <a:t>로고는 헤더 중앙에 유지</a:t>
             </a:r>
           </a:p>
         </p:txBody>
@@ -3513,7 +4587,7 @@
     </p:spTree>
     <p:extLst>
       <p:ext uri="{BB962C8B-B14F-4D97-AF65-F5344CB8AC3E}">
-        <p14:creationId xmlns:p14="http://schemas.microsoft.com/office/powerpoint/2010/main" val="206677030"/>
+        <p14:creationId xmlns:p14="http://schemas.microsoft.com/office/powerpoint/2010/main" val="1140900790"/>
       </p:ext>
     </p:extLst>
   </p:cSld>
@@ -3541,10 +4615,10 @@
       </p:grpSpPr>
       <p:sp>
         <p:nvSpPr>
-          <p:cNvPr id="6" name="text-22">
+          <p:cNvPr id="7" name="text-17">
             <a:extLst xmlns:a="http://schemas.openxmlformats.org/drawingml/2006/main">
               <a:ext uri="{FF2B5EF4-FFF2-40B4-BE49-F238E27FC236}">
-                <a16:creationId xmlns:a16="http://schemas.microsoft.com/office/drawing/2014/main" id="{D3B2E35A-C9E7-4A52-AE38-1F6E044C173E}"/>
+                <a16:creationId xmlns:a16="http://schemas.microsoft.com/office/drawing/2014/main" id="{D86B8870-12FA-49EC-B577-F5B00628E61B}"/>
               </a:ext>
             </a:extLst>
           </p:cNvPr>
@@ -3573,6 +4647,7 @@
           <a:lstStyle xmlns:a="http://schemas.openxmlformats.org/drawingml/2006/main"/>
           <a:p xmlns:a="http://schemas.openxmlformats.org/drawingml/2006/main">
             <a:pPr>
+              <a:buNone/>
               <a:defRPr sz="3450" b="1">
                 <a:solidFill>
                   <a:srgbClr val="18191C"/>
@@ -3591,27 +4666,27 @@
                 <a:ea typeface="Malgun Gothic"/>
                 <a:cs typeface="Malgun Gothic"/>
               </a:rPr>
-              <a:t>스크롤을 따라가는 왼쪽 메뉴</a:t>
+              <a:t>게임 카드의 크기와 줄바꿈</a:t>
             </a:r>
           </a:p>
         </p:txBody>
       </p:sp>
       <p:pic>
         <p:nvPicPr>
-          <p:cNvPr id="7" name=""/>
+          <p:cNvPr id="11" name=""/>
           <p:cNvPicPr>
             <a:picLocks xmlns:a="http://schemas.openxmlformats.org/drawingml/2006/main" noChangeAspect="1"/>
           </p:cNvPicPr>
           <p:nvPr/>
         </p:nvPicPr>
         <p:blipFill>
-          <a:blip xmlns:r="http://schemas.openxmlformats.org/officeDocument/2006/relationships" xmlns:a="http://schemas.openxmlformats.org/drawingml/2006/main" r:embed="R43b6ee100f694b17"/>
+          <a:blip xmlns:r="http://schemas.openxmlformats.org/officeDocument/2006/relationships" xmlns:a="http://schemas.openxmlformats.org/drawingml/2006/main" r:embed="R5670d0f8c46046cc"/>
           <a:stretch xmlns:a="http://schemas.openxmlformats.org/drawingml/2006/main"/>
         </p:blipFill>
         <p:spPr>
           <a:xfrm xmlns:a="http://schemas.openxmlformats.org/drawingml/2006/main">
-            <a:off x="515112" y="1438275"/>
-            <a:ext cx="7351776" cy="5105400"/>
+            <a:off x="609600" y="1489797"/>
+            <a:ext cx="7000875" cy="3097357"/>
           </a:xfrm>
           <a:prstGeom xmlns:a="http://schemas.openxmlformats.org/drawingml/2006/main" prst="rect">
             <a:avLst/>
@@ -3620,10 +4695,10 @@
       </p:pic>
       <p:sp>
         <p:nvSpPr>
-          <p:cNvPr id="3" name="text-23">
+          <p:cNvPr id="3" name="text-18">
             <a:extLst xmlns:a="http://schemas.openxmlformats.org/drawingml/2006/main">
               <a:ext uri="{FF2B5EF4-FFF2-40B4-BE49-F238E27FC236}">
-                <a16:creationId xmlns:a16="http://schemas.microsoft.com/office/drawing/2014/main" id="{8FD47462-9B16-4380-9916-4053DE772BA6}"/>
+                <a16:creationId xmlns:a16="http://schemas.microsoft.com/office/drawing/2014/main" id="{DAA7CFFE-47EA-4C36-8E63-75A731EC48B2}"/>
               </a:ext>
             </a:extLst>
           </p:cNvPr>
@@ -3634,8 +4709,8 @@
         </p:nvSpPr>
         <p:spPr>
           <a:xfrm xmlns:a="http://schemas.openxmlformats.org/drawingml/2006/main">
-            <a:off x="8258175" y="1590675"/>
-            <a:ext cx="3333750" cy="857250"/>
+            <a:off x="8115300" y="1543050"/>
+            <a:ext cx="3429000" cy="533400"/>
           </a:xfrm>
           <a:prstGeom xmlns:a="http://schemas.openxmlformats.org/drawingml/2006/main" prst="rect">
             <a:avLst/>
@@ -3652,7 +4727,8 @@
           <a:lstStyle xmlns:a="http://schemas.openxmlformats.org/drawingml/2006/main"/>
           <a:p xmlns:a="http://schemas.openxmlformats.org/drawingml/2006/main">
             <a:pPr>
-              <a:defRPr sz="2175" b="1">
+              <a:buNone/>
+              <a:defRPr sz="2250" b="1">
                 <a:solidFill>
                   <a:srgbClr val="005CC9"/>
                 </a:solidFill>
@@ -3662,7 +4738,7 @@
               </a:defRPr>
             </a:pPr>
             <a:r>
-              <a:rPr sz="2175" b="1">
+              <a:rPr sz="2250" b="1">
                 <a:solidFill>
                   <a:srgbClr val="005CC9"/>
                 </a:solidFill>
@@ -3670,17 +4746,17 @@
                 <a:ea typeface="Malgun Gothic"/>
                 <a:cs typeface="Malgun Gothic"/>
               </a:rPr>
-              <a:t>배경과 메뉴의 역할 분리</a:t>
-            </a:r>
-          </a:p>
-        </p:txBody>
-      </p:sp>
-      <p:sp>
-        <p:nvSpPr>
-          <p:cNvPr id="4" name="text-24">
+              <a:t>카드 너비 138px</a:t>
+            </a:r>
+          </a:p>
+        </p:txBody>
+      </p:sp>
+      <p:sp>
+        <p:nvSpPr>
+          <p:cNvPr id="4" name="text-19">
             <a:extLst xmlns:a="http://schemas.openxmlformats.org/drawingml/2006/main">
               <a:ext uri="{FF2B5EF4-FFF2-40B4-BE49-F238E27FC236}">
-                <a16:creationId xmlns:a16="http://schemas.microsoft.com/office/drawing/2014/main" id="{75D2EAD2-1E41-4146-8400-AA3E321A1190}"/>
+                <a16:creationId xmlns:a16="http://schemas.microsoft.com/office/drawing/2014/main" id="{A4C1A3CF-FCDE-469C-A103-04BAA9F49B23}"/>
               </a:ext>
             </a:extLst>
           </p:cNvPr>
@@ -3691,8 +4767,8 @@
         </p:nvSpPr>
         <p:spPr>
           <a:xfrm xmlns:a="http://schemas.openxmlformats.org/drawingml/2006/main">
-            <a:off x="8258175" y="2705100"/>
-            <a:ext cx="3333750" cy="1133475"/>
+            <a:off x="8115300" y="2209800"/>
+            <a:ext cx="3429000" cy="1066800"/>
           </a:xfrm>
           <a:prstGeom xmlns:a="http://schemas.openxmlformats.org/drawingml/2006/main" prst="rect">
             <a:avLst/>
@@ -3709,58 +4785,60 @@
           <a:lstStyle xmlns:a="http://schemas.openxmlformats.org/drawingml/2006/main"/>
           <a:p xmlns:a="http://schemas.openxmlformats.org/drawingml/2006/main">
             <a:pPr>
-              <a:defRPr sz="1950" b="0">
-                <a:solidFill>
-                  <a:srgbClr val="18191C"/>
-                </a:solidFill>
-                <a:latin typeface="Malgun Gothic"/>
-                <a:ea typeface="Malgun Gothic"/>
-                <a:cs typeface="Malgun Gothic"/>
-              </a:defRPr>
-            </a:pPr>
-            <a:r>
-              <a:rPr sz="1950" b="0">
-                <a:solidFill>
-                  <a:srgbClr val="18191C"/>
-                </a:solidFill>
-                <a:latin typeface="Malgun Gothic"/>
-                <a:ea typeface="Malgun Gothic"/>
-                <a:cs typeface="Malgun Gothic"/>
-              </a:rPr>
-              <a:t>aside는 본문 높이를 채우고</a:t>
-            </a:r>
-          </a:p>
-          <a:p xmlns:a="http://schemas.openxmlformats.org/drawingml/2006/main">
-            <a:pPr>
-              <a:defRPr sz="1950" b="0">
-                <a:solidFill>
-                  <a:srgbClr val="18191C"/>
-                </a:solidFill>
-                <a:latin typeface="Malgun Gothic"/>
-                <a:ea typeface="Malgun Gothic"/>
-                <a:cs typeface="Malgun Gothic"/>
-              </a:defRPr>
-            </a:pPr>
-            <a:r>
-              <a:rPr sz="1950" b="0">
-                <a:solidFill>
-                  <a:srgbClr val="18191C"/>
-                </a:solidFill>
-                <a:latin typeface="Malgun Gothic"/>
-                <a:ea typeface="Malgun Gothic"/>
-                <a:cs typeface="Malgun Gothic"/>
-              </a:rPr>
-              <a:t>안쪽 nav만 위쪽에 고정</a:t>
-            </a:r>
-          </a:p>
-        </p:txBody>
-      </p:sp>
-      <p:sp>
-        <p:nvSpPr>
-          <p:cNvPr id="5" name="text-25">
+              <a:buNone/>
+              <a:defRPr sz="2025" b="0">
+                <a:solidFill>
+                  <a:srgbClr val="18191C"/>
+                </a:solidFill>
+                <a:latin typeface="Malgun Gothic"/>
+                <a:ea typeface="Malgun Gothic"/>
+                <a:cs typeface="Malgun Gothic"/>
+              </a:defRPr>
+            </a:pPr>
+            <a:r>
+              <a:rPr sz="2025" b="0">
+                <a:solidFill>
+                  <a:srgbClr val="18191C"/>
+                </a:solidFill>
+                <a:latin typeface="Malgun Gothic"/>
+                <a:ea typeface="Malgun Gothic"/>
+                <a:cs typeface="Malgun Gothic"/>
+              </a:rPr>
+              <a:t>이미지는 136 × 136px</a:t>
+            </a:r>
+          </a:p>
+          <a:p xmlns:a="http://schemas.openxmlformats.org/drawingml/2006/main">
+            <a:pPr>
+              <a:buNone/>
+              <a:defRPr sz="2025" b="0">
+                <a:solidFill>
+                  <a:srgbClr val="18191C"/>
+                </a:solidFill>
+                <a:latin typeface="Malgun Gothic"/>
+                <a:ea typeface="Malgun Gothic"/>
+                <a:cs typeface="Malgun Gothic"/>
+              </a:defRPr>
+            </a:pPr>
+            <a:r>
+              <a:rPr sz="2025" b="0">
+                <a:solidFill>
+                  <a:srgbClr val="18191C"/>
+                </a:solidFill>
+                <a:latin typeface="Malgun Gothic"/>
+                <a:ea typeface="Malgun Gothic"/>
+                <a:cs typeface="Malgun Gothic"/>
+              </a:rPr>
+              <a:t>이름 영역은 높이 50px</a:t>
+            </a:r>
+          </a:p>
+        </p:txBody>
+      </p:sp>
+      <p:sp>
+        <p:nvSpPr>
+          <p:cNvPr id="5" name="text-20">
             <a:extLst xmlns:a="http://schemas.openxmlformats.org/drawingml/2006/main">
               <a:ext uri="{FF2B5EF4-FFF2-40B4-BE49-F238E27FC236}">
-                <a16:creationId xmlns:a16="http://schemas.microsoft.com/office/drawing/2014/main" id="{339A3840-9A3E-48A5-AC88-1AEAD77AEC27}"/>
+                <a16:creationId xmlns:a16="http://schemas.microsoft.com/office/drawing/2014/main" id="{1FBC6A85-A2C7-478E-942D-D53E7B05A45D}"/>
               </a:ext>
             </a:extLst>
           </p:cNvPr>
@@ -3771,8 +4849,8 @@
         </p:nvSpPr>
         <p:spPr>
           <a:xfrm xmlns:a="http://schemas.openxmlformats.org/drawingml/2006/main">
-            <a:off x="8258175" y="4219575"/>
-            <a:ext cx="3333750" cy="2057400"/>
+            <a:off x="8115300" y="3619500"/>
+            <a:ext cx="3429000" cy="1066800"/>
           </a:xfrm>
           <a:prstGeom xmlns:a="http://schemas.openxmlformats.org/drawingml/2006/main" prst="rect">
             <a:avLst/>
@@ -3789,9 +4867,221 @@
           <a:lstStyle xmlns:a="http://schemas.openxmlformats.org/drawingml/2006/main"/>
           <a:p xmlns:a="http://schemas.openxmlformats.org/drawingml/2006/main">
             <a:pPr>
+              <a:buNone/>
+              <a:defRPr sz="2025" b="0">
+                <a:solidFill>
+                  <a:srgbClr val="18191C"/>
+                </a:solidFill>
+                <a:latin typeface="Malgun Gothic"/>
+                <a:ea typeface="Malgun Gothic"/>
+                <a:cs typeface="Malgun Gothic"/>
+              </a:defRPr>
+            </a:pPr>
+            <a:r>
+              <a:rPr sz="2025" b="0">
+                <a:solidFill>
+                  <a:srgbClr val="18191C"/>
+                </a:solidFill>
+                <a:latin typeface="Malgun Gothic"/>
+                <a:ea typeface="Malgun Gothic"/>
+                <a:cs typeface="Malgun Gothic"/>
+              </a:rPr>
+              <a:t>가로 간격 32px</a:t>
+            </a:r>
+          </a:p>
+          <a:p xmlns:a="http://schemas.openxmlformats.org/drawingml/2006/main">
+            <a:pPr>
+              <a:buNone/>
+              <a:defRPr sz="2025" b="0">
+                <a:solidFill>
+                  <a:srgbClr val="18191C"/>
+                </a:solidFill>
+                <a:latin typeface="Malgun Gothic"/>
+                <a:ea typeface="Malgun Gothic"/>
+                <a:cs typeface="Malgun Gothic"/>
+              </a:defRPr>
+            </a:pPr>
+            <a:r>
+              <a:rPr sz="2025" b="0">
+                <a:solidFill>
+                  <a:srgbClr val="18191C"/>
+                </a:solidFill>
+                <a:latin typeface="Malgun Gothic"/>
+                <a:ea typeface="Malgun Gothic"/>
+                <a:cs typeface="Malgun Gothic"/>
+              </a:rPr>
+              <a:t>세로 간격 62px</a:t>
+            </a:r>
+          </a:p>
+        </p:txBody>
+      </p:sp>
+      <p:sp>
+        <p:nvSpPr>
+          <p:cNvPr id="6" name="text-21">
+            <a:extLst xmlns:a="http://schemas.openxmlformats.org/drawingml/2006/main">
+              <a:ext uri="{FF2B5EF4-FFF2-40B4-BE49-F238E27FC236}">
+                <a16:creationId xmlns:a16="http://schemas.microsoft.com/office/drawing/2014/main" id="{D26510C7-96B4-47C0-A83B-189212A9D24B}"/>
+              </a:ext>
+            </a:extLst>
+          </p:cNvPr>
+          <p:cNvSpPr>
+            <a:spLocks xmlns:a="http://schemas.openxmlformats.org/drawingml/2006/main" noGrp="1"/>
+          </p:cNvSpPr>
+          <p:nvPr/>
+        </p:nvSpPr>
+        <p:spPr>
+          <a:xfrm xmlns:a="http://schemas.openxmlformats.org/drawingml/2006/main">
+            <a:off x="609600" y="4933950"/>
+            <a:ext cx="6619875" cy="1409700"/>
+          </a:xfrm>
+          <a:prstGeom xmlns:a="http://schemas.openxmlformats.org/drawingml/2006/main" prst="rect">
+            <a:avLst/>
+          </a:prstGeom>
+          <a:noFill xmlns:a="http://schemas.openxmlformats.org/drawingml/2006/main"/>
+          <a:ln xmlns:a="http://schemas.openxmlformats.org/drawingml/2006/main" w="0">
+            <a:noFill/>
+          </a:ln>
+        </p:spPr>
+        <p:txBody>
+          <a:bodyPr xmlns:a="http://schemas.openxmlformats.org/drawingml/2006/main">
+            <a:noAutofit/>
+          </a:bodyPr>
+          <a:lstStyle xmlns:a="http://schemas.openxmlformats.org/drawingml/2006/main"/>
+          <a:p xmlns:a="http://schemas.openxmlformats.org/drawingml/2006/main">
+            <a:pPr>
+              <a:buNone/>
+              <a:defRPr sz="2025" b="0">
+                <a:solidFill>
+                  <a:srgbClr val="555D6B"/>
+                </a:solidFill>
+                <a:latin typeface="Malgun Gothic"/>
+                <a:ea typeface="Malgun Gothic"/>
+                <a:cs typeface="Malgun Gothic"/>
+              </a:defRPr>
+            </a:pPr>
+            <a:r>
+              <a:rPr sz="2025" b="0">
+                <a:solidFill>
+                  <a:srgbClr val="555D6B"/>
+                </a:solidFill>
+                <a:latin typeface="Malgun Gothic"/>
+                <a:ea typeface="Malgun Gothic"/>
+                <a:cs typeface="Malgun Gothic"/>
+              </a:rPr>
+              <a:t>.game-list {</a:t>
+            </a:r>
+          </a:p>
+          <a:p xmlns:a="http://schemas.openxmlformats.org/drawingml/2006/main">
+            <a:pPr>
+              <a:buNone/>
+              <a:defRPr sz="2025" b="0">
+                <a:solidFill>
+                  <a:srgbClr val="555D6B"/>
+                </a:solidFill>
+                <a:latin typeface="Malgun Gothic"/>
+                <a:ea typeface="Malgun Gothic"/>
+                <a:cs typeface="Malgun Gothic"/>
+              </a:defRPr>
+            </a:pPr>
+            <a:r>
+              <a:rPr sz="2025" b="0">
+                <a:solidFill>
+                  <a:srgbClr val="555D6B"/>
+                </a:solidFill>
+                <a:latin typeface="Malgun Gothic"/>
+                <a:ea typeface="Malgun Gothic"/>
+                <a:cs typeface="Malgun Gothic"/>
+              </a:rPr>
+              <a:t>  display: flex;  flex-wrap: wrap;</a:t>
+            </a:r>
+          </a:p>
+          <a:p xmlns:a="http://schemas.openxmlformats.org/drawingml/2006/main">
+            <a:pPr>
+              <a:buNone/>
+              <a:defRPr sz="2025" b="0">
+                <a:solidFill>
+                  <a:srgbClr val="555D6B"/>
+                </a:solidFill>
+                <a:latin typeface="Malgun Gothic"/>
+                <a:ea typeface="Malgun Gothic"/>
+                <a:cs typeface="Malgun Gothic"/>
+              </a:defRPr>
+            </a:pPr>
+            <a:r>
+              <a:rPr sz="2025" b="0">
+                <a:solidFill>
+                  <a:srgbClr val="555D6B"/>
+                </a:solidFill>
+                <a:latin typeface="Malgun Gothic"/>
+                <a:ea typeface="Malgun Gothic"/>
+                <a:cs typeface="Malgun Gothic"/>
+              </a:rPr>
+              <a:t>  gap: 62px 32px;</a:t>
+            </a:r>
+          </a:p>
+          <a:p xmlns:a="http://schemas.openxmlformats.org/drawingml/2006/main">
+            <a:pPr>
+              <a:buNone/>
+              <a:defRPr sz="2025" b="0">
+                <a:solidFill>
+                  <a:srgbClr val="555D6B"/>
+                </a:solidFill>
+                <a:latin typeface="Malgun Gothic"/>
+                <a:ea typeface="Malgun Gothic"/>
+                <a:cs typeface="Malgun Gothic"/>
+              </a:defRPr>
+            </a:pPr>
+            <a:r>
+              <a:rPr sz="2025" b="0">
+                <a:solidFill>
+                  <a:srgbClr val="555D6B"/>
+                </a:solidFill>
+                <a:latin typeface="Malgun Gothic"/>
+                <a:ea typeface="Malgun Gothic"/>
+                <a:cs typeface="Malgun Gothic"/>
+              </a:rPr>
+              <a:t>}</a:t>
+            </a:r>
+          </a:p>
+        </p:txBody>
+      </p:sp>
+      <p:sp>
+        <p:nvSpPr>
+          <p:cNvPr id="9" name="detail-108">
+            <a:extLst xmlns:a="http://schemas.openxmlformats.org/drawingml/2006/main">
+              <a:ext uri="{FF2B5EF4-FFF2-40B4-BE49-F238E27FC236}">
+                <a16:creationId xmlns:a16="http://schemas.microsoft.com/office/drawing/2014/main" id="{4ED79D49-F6AD-4E46-A82B-DF91A3C616BA}"/>
+              </a:ext>
+            </a:extLst>
+          </p:cNvPr>
+          <p:cNvSpPr>
+            <a:spLocks xmlns:a="http://schemas.openxmlformats.org/drawingml/2006/main" noGrp="1"/>
+          </p:cNvSpPr>
+          <p:nvPr/>
+        </p:nvSpPr>
+        <p:spPr>
+          <a:xfrm xmlns:a="http://schemas.openxmlformats.org/drawingml/2006/main">
+            <a:off x="7620000" y="5010150"/>
+            <a:ext cx="4000500" cy="1247775"/>
+          </a:xfrm>
+          <a:prstGeom xmlns:a="http://schemas.openxmlformats.org/drawingml/2006/main" prst="rect">
+            <a:avLst/>
+          </a:prstGeom>
+          <a:noFill xmlns:a="http://schemas.openxmlformats.org/drawingml/2006/main"/>
+          <a:ln xmlns:a="http://schemas.openxmlformats.org/drawingml/2006/main" w="0">
+            <a:noFill/>
+          </a:ln>
+        </p:spPr>
+        <p:txBody>
+          <a:bodyPr xmlns:a="http://schemas.openxmlformats.org/drawingml/2006/main">
+            <a:noAutofit/>
+          </a:bodyPr>
+          <a:lstStyle xmlns:a="http://schemas.openxmlformats.org/drawingml/2006/main"/>
+          <a:p xmlns:a="http://schemas.openxmlformats.org/drawingml/2006/main">
+            <a:pPr>
               <a:defRPr sz="1800" b="0">
                 <a:solidFill>
-                  <a:srgbClr val="555D6B"/>
+                  <a:srgbClr val="005CC9"/>
                 </a:solidFill>
                 <a:latin typeface="Malgun Gothic"/>
                 <a:ea typeface="Malgun Gothic"/>
@@ -3801,20 +5091,20 @@
             <a:r>
               <a:rPr sz="1800" b="0">
                 <a:solidFill>
-                  <a:srgbClr val="555D6B"/>
-                </a:solidFill>
-                <a:latin typeface="Malgun Gothic"/>
-                <a:ea typeface="Malgun Gothic"/>
-                <a:cs typeface="Malgun Gothic"/>
-              </a:rPr>
-              <a:t>.sidebar nav {</a:t>
+                  <a:srgbClr val="005CC9"/>
+                </a:solidFill>
+                <a:latin typeface="Malgun Gothic"/>
+                <a:ea typeface="Malgun Gothic"/>
+                <a:cs typeface="Malgun Gothic"/>
+              </a:rPr>
+              <a:t>넓은 화면의 한 줄</a:t>
             </a:r>
           </a:p>
           <a:p xmlns:a="http://schemas.openxmlformats.org/drawingml/2006/main">
             <a:pPr>
               <a:defRPr sz="1800" b="0">
                 <a:solidFill>
-                  <a:srgbClr val="555D6B"/>
+                  <a:srgbClr val="005CC9"/>
                 </a:solidFill>
                 <a:latin typeface="Malgun Gothic"/>
                 <a:ea typeface="Malgun Gothic"/>
@@ -3824,20 +5114,20 @@
             <a:r>
               <a:rPr sz="1800" b="0">
                 <a:solidFill>
-                  <a:srgbClr val="555D6B"/>
-                </a:solidFill>
-                <a:latin typeface="Malgun Gothic"/>
-                <a:ea typeface="Malgun Gothic"/>
-                <a:cs typeface="Malgun Gothic"/>
-              </a:rPr>
-              <a:t>  position: sticky;</a:t>
+                  <a:srgbClr val="005CC9"/>
+                </a:solidFill>
+                <a:latin typeface="Malgun Gothic"/>
+                <a:ea typeface="Malgun Gothic"/>
+                <a:cs typeface="Malgun Gothic"/>
+              </a:rPr>
+              <a:t>138 × 6 + 32 × 5 = 988px</a:t>
             </a:r>
           </a:p>
           <a:p xmlns:a="http://schemas.openxmlformats.org/drawingml/2006/main">
             <a:pPr>
               <a:defRPr sz="1800" b="0">
                 <a:solidFill>
-                  <a:srgbClr val="555D6B"/>
+                  <a:srgbClr val="005CC9"/>
                 </a:solidFill>
                 <a:latin typeface="Malgun Gothic"/>
                 <a:ea typeface="Malgun Gothic"/>
@@ -3847,82 +5137,13 @@
             <a:r>
               <a:rPr sz="1800" b="0">
                 <a:solidFill>
-                  <a:srgbClr val="555D6B"/>
-                </a:solidFill>
-                <a:latin typeface="Malgun Gothic"/>
-                <a:ea typeface="Malgun Gothic"/>
-                <a:cs typeface="Malgun Gothic"/>
-              </a:rPr>
-              <a:t>  top: 0;</a:t>
-            </a:r>
-          </a:p>
-          <a:p xmlns:a="http://schemas.openxmlformats.org/drawingml/2006/main">
-            <a:pPr>
-              <a:defRPr sz="1800" b="0">
-                <a:solidFill>
-                  <a:srgbClr val="555D6B"/>
-                </a:solidFill>
-                <a:latin typeface="Malgun Gothic"/>
-                <a:ea typeface="Malgun Gothic"/>
-                <a:cs typeface="Malgun Gothic"/>
-              </a:defRPr>
-            </a:pPr>
-            <a:r>
-              <a:rPr sz="1800" b="0">
-                <a:solidFill>
-                  <a:srgbClr val="555D6B"/>
-                </a:solidFill>
-                <a:latin typeface="Malgun Gothic"/>
-                <a:ea typeface="Malgun Gothic"/>
-                <a:cs typeface="Malgun Gothic"/>
-              </a:rPr>
-              <a:t>  max-height: 100vh;</a:t>
-            </a:r>
-          </a:p>
-          <a:p xmlns:a="http://schemas.openxmlformats.org/drawingml/2006/main">
-            <a:pPr>
-              <a:defRPr sz="1800" b="0">
-                <a:solidFill>
-                  <a:srgbClr val="555D6B"/>
-                </a:solidFill>
-                <a:latin typeface="Malgun Gothic"/>
-                <a:ea typeface="Malgun Gothic"/>
-                <a:cs typeface="Malgun Gothic"/>
-              </a:defRPr>
-            </a:pPr>
-            <a:r>
-              <a:rPr sz="1800" b="0">
-                <a:solidFill>
-                  <a:srgbClr val="555D6B"/>
-                </a:solidFill>
-                <a:latin typeface="Malgun Gothic"/>
-                <a:ea typeface="Malgun Gothic"/>
-                <a:cs typeface="Malgun Gothic"/>
-              </a:rPr>
-              <a:t>  overflow-y: auto;</a:t>
-            </a:r>
-          </a:p>
-          <a:p xmlns:a="http://schemas.openxmlformats.org/drawingml/2006/main">
-            <a:pPr>
-              <a:defRPr sz="1800" b="0">
-                <a:solidFill>
-                  <a:srgbClr val="555D6B"/>
-                </a:solidFill>
-                <a:latin typeface="Malgun Gothic"/>
-                <a:ea typeface="Malgun Gothic"/>
-                <a:cs typeface="Malgun Gothic"/>
-              </a:defRPr>
-            </a:pPr>
-            <a:r>
-              <a:rPr sz="1800" b="0">
-                <a:solidFill>
-                  <a:srgbClr val="555D6B"/>
-                </a:solidFill>
-                <a:latin typeface="Malgun Gothic"/>
-                <a:ea typeface="Malgun Gothic"/>
-                <a:cs typeface="Malgun Gothic"/>
-              </a:rPr>
-              <a:t>}</a:t>
+                  <a:srgbClr val="005CC9"/>
+                </a:solidFill>
+                <a:latin typeface="Malgun Gothic"/>
+                <a:ea typeface="Malgun Gothic"/>
+                <a:cs typeface="Malgun Gothic"/>
+              </a:rPr>
+              <a:t>목록 안쪽 최대 너비 990px</a:t>
             </a:r>
           </a:p>
         </p:txBody>
@@ -3930,7 +5151,7 @@
     </p:spTree>
     <p:extLst>
       <p:ext uri="{BB962C8B-B14F-4D97-AF65-F5344CB8AC3E}">
-        <p14:creationId xmlns:p14="http://schemas.microsoft.com/office/powerpoint/2010/main" val="1409088698"/>
+        <p14:creationId xmlns:p14="http://schemas.microsoft.com/office/powerpoint/2010/main" val="206677030"/>
       </p:ext>
     </p:extLst>
   </p:cSld>
@@ -3958,10 +5179,10 @@
       </p:grpSpPr>
       <p:sp>
         <p:nvSpPr>
-          <p:cNvPr id="7" name="text-26">
+          <p:cNvPr id="9" name="detail-109">
             <a:extLst xmlns:a="http://schemas.openxmlformats.org/drawingml/2006/main">
               <a:ext uri="{FF2B5EF4-FFF2-40B4-BE49-F238E27FC236}">
-                <a16:creationId xmlns:a16="http://schemas.microsoft.com/office/drawing/2014/main" id="{593DDCD8-6AED-41A8-A83E-5CF08033D706}"/>
+                <a16:creationId xmlns:a16="http://schemas.microsoft.com/office/drawing/2014/main" id="{FF8C59C7-C68B-4B28-9CC9-1BC3495AE180}"/>
               </a:ext>
             </a:extLst>
           </p:cNvPr>
@@ -4008,17 +5229,17 @@
                 <a:ea typeface="Malgun Gothic"/>
                 <a:cs typeface="Malgun Gothic"/>
               </a:rPr>
-              <a:t>CSS로 표현한 선택 상태</a:t>
-            </a:r>
-          </a:p>
-        </p:txBody>
-      </p:sp>
-      <p:sp>
-        <p:nvSpPr>
-          <p:cNvPr id="2" name="text-27">
+              <a:t>공통 스타일과 이미지 크기 관리</a:t>
+            </a:r>
+          </a:p>
+        </p:txBody>
+      </p:sp>
+      <p:sp>
+        <p:nvSpPr>
+          <p:cNvPr id="2" name="detail-110">
             <a:extLst xmlns:a="http://schemas.openxmlformats.org/drawingml/2006/main">
               <a:ext uri="{FF2B5EF4-FFF2-40B4-BE49-F238E27FC236}">
-                <a16:creationId xmlns:a16="http://schemas.microsoft.com/office/drawing/2014/main" id="{6F54B16D-9C14-4A00-86E8-E0854AE90E34}"/>
+                <a16:creationId xmlns:a16="http://schemas.microsoft.com/office/drawing/2014/main" id="{E57E8739-B628-4DC9-B88D-0B0277A2B033}"/>
               </a:ext>
             </a:extLst>
           </p:cNvPr>
@@ -4029,8 +5250,8 @@
         </p:nvSpPr>
         <p:spPr>
           <a:xfrm xmlns:a="http://schemas.openxmlformats.org/drawingml/2006/main">
-            <a:off x="609600" y="1800225"/>
-            <a:ext cx="2095500" cy="533400"/>
+            <a:off x="609600" y="1533525"/>
+            <a:ext cx="5238750" cy="533400"/>
           </a:xfrm>
           <a:prstGeom xmlns:a="http://schemas.openxmlformats.org/drawingml/2006/main" prst="rect">
             <a:avLst/>
@@ -4047,57 +5268,35 @@
           <a:lstStyle xmlns:a="http://schemas.openxmlformats.org/drawingml/2006/main"/>
           <a:p xmlns:a="http://schemas.openxmlformats.org/drawingml/2006/main">
             <a:pPr>
-              <a:defRPr sz="2100" b="1">
-                <a:solidFill>
-                  <a:srgbClr val="555D6B"/>
-                </a:solidFill>
-                <a:latin typeface="Malgun Gothic"/>
-                <a:ea typeface="Malgun Gothic"/>
-                <a:cs typeface="Malgun Gothic"/>
-              </a:defRPr>
-            </a:pPr>
-            <a:r>
-              <a:rPr sz="2100" b="1">
-                <a:solidFill>
-                  <a:srgbClr val="555D6B"/>
-                </a:solidFill>
-                <a:latin typeface="Malgun Gothic"/>
-                <a:ea typeface="Malgun Gothic"/>
-                <a:cs typeface="Malgun Gothic"/>
-              </a:rPr>
-              <a:t>기본 상태</a:t>
-            </a:r>
-          </a:p>
-        </p:txBody>
-      </p:sp>
-      <p:pic>
-        <p:nvPicPr>
-          <p:cNvPr id="9" name=""/>
-          <p:cNvPicPr>
-            <a:picLocks xmlns:a="http://schemas.openxmlformats.org/drawingml/2006/main" noChangeAspect="1"/>
-          </p:cNvPicPr>
-          <p:nvPr/>
-        </p:nvPicPr>
-        <p:blipFill>
-          <a:blip xmlns:r="http://schemas.openxmlformats.org/officeDocument/2006/relationships" xmlns:a="http://schemas.openxmlformats.org/drawingml/2006/main" r:embed="R79bca34c7b7f40e3"/>
-          <a:stretch xmlns:a="http://schemas.openxmlformats.org/drawingml/2006/main"/>
-        </p:blipFill>
-        <p:spPr>
-          <a:xfrm xmlns:a="http://schemas.openxmlformats.org/drawingml/2006/main">
-            <a:off x="2705100" y="1407795"/>
-            <a:ext cx="8877300" cy="1775460"/>
-          </a:xfrm>
-          <a:prstGeom xmlns:a="http://schemas.openxmlformats.org/drawingml/2006/main" prst="rect">
-            <a:avLst/>
-          </a:prstGeom>
-        </p:spPr>
-      </p:pic>
-      <p:sp>
-        <p:nvSpPr>
-          <p:cNvPr id="4" name="text-28">
+              <a:defRPr sz="2250" b="1">
+                <a:solidFill>
+                  <a:srgbClr val="005CC9"/>
+                </a:solidFill>
+                <a:latin typeface="Malgun Gothic"/>
+                <a:ea typeface="Malgun Gothic"/>
+                <a:cs typeface="Malgun Gothic"/>
+              </a:defRPr>
+            </a:pPr>
+            <a:r>
+              <a:rPr sz="2250" b="1">
+                <a:solidFill>
+                  <a:srgbClr val="005CC9"/>
+                </a:solidFill>
+                <a:latin typeface="Malgun Gothic"/>
+                <a:ea typeface="Malgun Gothic"/>
+                <a:cs typeface="Malgun Gothic"/>
+              </a:rPr>
+              <a:t>페이지 범위와 크기 계산</a:t>
+            </a:r>
+          </a:p>
+        </p:txBody>
+      </p:sp>
+      <p:sp>
+        <p:nvSpPr>
+          <p:cNvPr id="3" name="detail-111">
             <a:extLst xmlns:a="http://schemas.openxmlformats.org/drawingml/2006/main">
               <a:ext uri="{FF2B5EF4-FFF2-40B4-BE49-F238E27FC236}">
-                <a16:creationId xmlns:a16="http://schemas.microsoft.com/office/drawing/2014/main" id="{A391F7E7-E8CE-47CF-BB60-CB9699D5F050}"/>
+                <a16:creationId xmlns:a16="http://schemas.microsoft.com/office/drawing/2014/main" id="{96815BF0-0EEF-4099-AF87-44129E2AC67B}"/>
               </a:ext>
             </a:extLst>
           </p:cNvPr>
@@ -4108,8 +5307,8 @@
         </p:nvSpPr>
         <p:spPr>
           <a:xfrm xmlns:a="http://schemas.openxmlformats.org/drawingml/2006/main">
-            <a:off x="609600" y="3867150"/>
-            <a:ext cx="2095500" cy="533400"/>
+            <a:off x="609600" y="2257425"/>
+            <a:ext cx="5276850" cy="3533775"/>
           </a:xfrm>
           <a:prstGeom xmlns:a="http://schemas.openxmlformats.org/drawingml/2006/main" prst="rect">
             <a:avLst/>
@@ -4126,57 +5325,224 @@
           <a:lstStyle xmlns:a="http://schemas.openxmlformats.org/drawingml/2006/main"/>
           <a:p xmlns:a="http://schemas.openxmlformats.org/drawingml/2006/main">
             <a:pPr>
-              <a:defRPr sz="2100" b="1">
-                <a:solidFill>
-                  <a:srgbClr val="005CC9"/>
-                </a:solidFill>
-                <a:latin typeface="Malgun Gothic"/>
-                <a:ea typeface="Malgun Gothic"/>
-                <a:cs typeface="Malgun Gothic"/>
-              </a:defRPr>
-            </a:pPr>
-            <a:r>
-              <a:rPr sz="2100" b="1">
-                <a:solidFill>
-                  <a:srgbClr val="005CC9"/>
-                </a:solidFill>
-                <a:latin typeface="Malgun Gothic"/>
-                <a:ea typeface="Malgun Gothic"/>
-                <a:cs typeface="Malgun Gothic"/>
-              </a:rPr>
-              <a:t>마우스 선택</a:t>
-            </a:r>
-          </a:p>
-        </p:txBody>
-      </p:sp>
-      <p:pic>
-        <p:nvPicPr>
-          <p:cNvPr id="11" name=""/>
-          <p:cNvPicPr>
-            <a:picLocks xmlns:a="http://schemas.openxmlformats.org/drawingml/2006/main" noChangeAspect="1"/>
-          </p:cNvPicPr>
-          <p:nvPr/>
-        </p:nvPicPr>
-        <p:blipFill>
-          <a:blip xmlns:r="http://schemas.openxmlformats.org/officeDocument/2006/relationships" xmlns:a="http://schemas.openxmlformats.org/drawingml/2006/main" r:embed="R29e4d485d0254c03"/>
-          <a:stretch xmlns:a="http://schemas.openxmlformats.org/drawingml/2006/main"/>
-        </p:blipFill>
-        <p:spPr>
-          <a:xfrm xmlns:a="http://schemas.openxmlformats.org/drawingml/2006/main">
-            <a:off x="2705100" y="3474720"/>
-            <a:ext cx="8877300" cy="1775460"/>
-          </a:xfrm>
-          <a:prstGeom xmlns:a="http://schemas.openxmlformats.org/drawingml/2006/main" prst="rect">
-            <a:avLst/>
-          </a:prstGeom>
-        </p:spPr>
-      </p:pic>
-      <p:sp>
-        <p:nvSpPr>
-          <p:cNvPr id="6" name="text-29">
+              <a:defRPr sz="1950" b="0">
+                <a:solidFill>
+                  <a:srgbClr val="555D6B"/>
+                </a:solidFill>
+                <a:latin typeface="Malgun Gothic"/>
+                <a:ea typeface="Malgun Gothic"/>
+                <a:cs typeface="Malgun Gothic"/>
+              </a:defRPr>
+            </a:pPr>
+            <a:r>
+              <a:rPr sz="1950" b="0">
+                <a:solidFill>
+                  <a:srgbClr val="555D6B"/>
+                </a:solidFill>
+                <a:latin typeface="Malgun Gothic"/>
+                <a:ea typeface="Malgun Gothic"/>
+                <a:cs typeface="Malgun Gothic"/>
+              </a:rPr>
+              <a:t>.customer-service * {</a:t>
+            </a:r>
+          </a:p>
+          <a:p xmlns:a="http://schemas.openxmlformats.org/drawingml/2006/main">
+            <a:pPr>
+              <a:defRPr sz="1950" b="0">
+                <a:solidFill>
+                  <a:srgbClr val="555D6B"/>
+                </a:solidFill>
+                <a:latin typeface="Malgun Gothic"/>
+                <a:ea typeface="Malgun Gothic"/>
+                <a:cs typeface="Malgun Gothic"/>
+              </a:defRPr>
+            </a:pPr>
+            <a:r>
+              <a:rPr sz="1950" b="0">
+                <a:solidFill>
+                  <a:srgbClr val="555D6B"/>
+                </a:solidFill>
+                <a:latin typeface="Malgun Gothic"/>
+                <a:ea typeface="Malgun Gothic"/>
+                <a:cs typeface="Malgun Gothic"/>
+              </a:rPr>
+              <a:t>  box-sizing: border-box;</a:t>
+            </a:r>
+          </a:p>
+          <a:p xmlns:a="http://schemas.openxmlformats.org/drawingml/2006/main">
+            <a:pPr>
+              <a:defRPr sz="1950" b="0">
+                <a:solidFill>
+                  <a:srgbClr val="555D6B"/>
+                </a:solidFill>
+                <a:latin typeface="Malgun Gothic"/>
+                <a:ea typeface="Malgun Gothic"/>
+                <a:cs typeface="Malgun Gothic"/>
+              </a:defRPr>
+            </a:pPr>
+            <a:r>
+              <a:rPr sz="1950" b="0">
+                <a:solidFill>
+                  <a:srgbClr val="555D6B"/>
+                </a:solidFill>
+                <a:latin typeface="Malgun Gothic"/>
+                <a:ea typeface="Malgun Gothic"/>
+                <a:cs typeface="Malgun Gothic"/>
+              </a:rPr>
+              <a:t>}</a:t>
+            </a:r>
+          </a:p>
+          <a:p xmlns:a="http://schemas.openxmlformats.org/drawingml/2006/main">
+            <a:r>
+              <a:t/>
+            </a:r>
+          </a:p>
+          <a:p xmlns:a="http://schemas.openxmlformats.org/drawingml/2006/main">
+            <a:pPr>
+              <a:defRPr sz="1950" b="0">
+                <a:solidFill>
+                  <a:srgbClr val="555D6B"/>
+                </a:solidFill>
+                <a:latin typeface="Malgun Gothic"/>
+                <a:ea typeface="Malgun Gothic"/>
+                <a:cs typeface="Malgun Gothic"/>
+              </a:defRPr>
+            </a:pPr>
+            <a:r>
+              <a:rPr sz="1950" b="0">
+                <a:solidFill>
+                  <a:srgbClr val="555D6B"/>
+                </a:solidFill>
+                <a:latin typeface="Malgun Gothic"/>
+                <a:ea typeface="Malgun Gothic"/>
+                <a:cs typeface="Malgun Gothic"/>
+              </a:rPr>
+              <a:t>.customer-service h1,</a:t>
+            </a:r>
+          </a:p>
+          <a:p xmlns:a="http://schemas.openxmlformats.org/drawingml/2006/main">
+            <a:pPr>
+              <a:defRPr sz="1950" b="0">
+                <a:solidFill>
+                  <a:srgbClr val="555D6B"/>
+                </a:solidFill>
+                <a:latin typeface="Malgun Gothic"/>
+                <a:ea typeface="Malgun Gothic"/>
+                <a:cs typeface="Malgun Gothic"/>
+              </a:defRPr>
+            </a:pPr>
+            <a:r>
+              <a:rPr sz="1950" b="0">
+                <a:solidFill>
+                  <a:srgbClr val="555D6B"/>
+                </a:solidFill>
+                <a:latin typeface="Malgun Gothic"/>
+                <a:ea typeface="Malgun Gothic"/>
+                <a:cs typeface="Malgun Gothic"/>
+              </a:rPr>
+              <a:t>.customer-service h2,</a:t>
+            </a:r>
+          </a:p>
+          <a:p xmlns:a="http://schemas.openxmlformats.org/drawingml/2006/main">
+            <a:pPr>
+              <a:defRPr sz="1950" b="0">
+                <a:solidFill>
+                  <a:srgbClr val="555D6B"/>
+                </a:solidFill>
+                <a:latin typeface="Malgun Gothic"/>
+                <a:ea typeface="Malgun Gothic"/>
+                <a:cs typeface="Malgun Gothic"/>
+              </a:defRPr>
+            </a:pPr>
+            <a:r>
+              <a:rPr sz="1950" b="0">
+                <a:solidFill>
+                  <a:srgbClr val="555D6B"/>
+                </a:solidFill>
+                <a:latin typeface="Malgun Gothic"/>
+                <a:ea typeface="Malgun Gothic"/>
+                <a:cs typeface="Malgun Gothic"/>
+              </a:rPr>
+              <a:t>.customer-service ul {</a:t>
+            </a:r>
+          </a:p>
+          <a:p xmlns:a="http://schemas.openxmlformats.org/drawingml/2006/main">
+            <a:pPr>
+              <a:defRPr sz="1950" b="0">
+                <a:solidFill>
+                  <a:srgbClr val="555D6B"/>
+                </a:solidFill>
+                <a:latin typeface="Malgun Gothic"/>
+                <a:ea typeface="Malgun Gothic"/>
+                <a:cs typeface="Malgun Gothic"/>
+              </a:defRPr>
+            </a:pPr>
+            <a:r>
+              <a:rPr sz="1950" b="0">
+                <a:solidFill>
+                  <a:srgbClr val="555D6B"/>
+                </a:solidFill>
+                <a:latin typeface="Malgun Gothic"/>
+                <a:ea typeface="Malgun Gothic"/>
+                <a:cs typeface="Malgun Gothic"/>
+              </a:rPr>
+              <a:t>  margin: 0;</a:t>
+            </a:r>
+          </a:p>
+          <a:p xmlns:a="http://schemas.openxmlformats.org/drawingml/2006/main">
+            <a:pPr>
+              <a:defRPr sz="1950" b="0">
+                <a:solidFill>
+                  <a:srgbClr val="555D6B"/>
+                </a:solidFill>
+                <a:latin typeface="Malgun Gothic"/>
+                <a:ea typeface="Malgun Gothic"/>
+                <a:cs typeface="Malgun Gothic"/>
+              </a:defRPr>
+            </a:pPr>
+            <a:r>
+              <a:rPr sz="1950" b="0">
+                <a:solidFill>
+                  <a:srgbClr val="555D6B"/>
+                </a:solidFill>
+                <a:latin typeface="Malgun Gothic"/>
+                <a:ea typeface="Malgun Gothic"/>
+                <a:cs typeface="Malgun Gothic"/>
+              </a:rPr>
+              <a:t>  padding: 0;</a:t>
+            </a:r>
+          </a:p>
+          <a:p xmlns:a="http://schemas.openxmlformats.org/drawingml/2006/main">
+            <a:pPr>
+              <a:defRPr sz="1950" b="0">
+                <a:solidFill>
+                  <a:srgbClr val="555D6B"/>
+                </a:solidFill>
+                <a:latin typeface="Malgun Gothic"/>
+                <a:ea typeface="Malgun Gothic"/>
+                <a:cs typeface="Malgun Gothic"/>
+              </a:defRPr>
+            </a:pPr>
+            <a:r>
+              <a:rPr sz="1950" b="0">
+                <a:solidFill>
+                  <a:srgbClr val="555D6B"/>
+                </a:solidFill>
+                <a:latin typeface="Malgun Gothic"/>
+                <a:ea typeface="Malgun Gothic"/>
+                <a:cs typeface="Malgun Gothic"/>
+              </a:rPr>
+              <a:t>}</a:t>
+            </a:r>
+          </a:p>
+        </p:txBody>
+      </p:sp>
+      <p:sp>
+        <p:nvSpPr>
+          <p:cNvPr id="4" name="detail-112">
             <a:extLst xmlns:a="http://schemas.openxmlformats.org/drawingml/2006/main">
               <a:ext uri="{FF2B5EF4-FFF2-40B4-BE49-F238E27FC236}">
-                <a16:creationId xmlns:a16="http://schemas.microsoft.com/office/drawing/2014/main" id="{787A1D84-1904-4252-BE66-6803FE8E8661}"/>
+                <a16:creationId xmlns:a16="http://schemas.microsoft.com/office/drawing/2014/main" id="{BF01C09A-F613-40C6-958B-AA4DD789B4CB}"/>
               </a:ext>
             </a:extLst>
           </p:cNvPr>
@@ -4187,8 +5553,8 @@
         </p:nvSpPr>
         <p:spPr>
           <a:xfrm xmlns:a="http://schemas.openxmlformats.org/drawingml/2006/main">
-            <a:off x="609600" y="5667375"/>
-            <a:ext cx="10972800" cy="495300"/>
+            <a:off x="609600" y="5762625"/>
+            <a:ext cx="5238750" cy="914400"/>
           </a:xfrm>
           <a:prstGeom xmlns:a="http://schemas.openxmlformats.org/drawingml/2006/main" prst="rect">
             <a:avLst/>
@@ -4205,7 +5571,110 @@
           <a:lstStyle xmlns:a="http://schemas.openxmlformats.org/drawingml/2006/main"/>
           <a:p xmlns:a="http://schemas.openxmlformats.org/drawingml/2006/main">
             <a:pPr>
-              <a:defRPr sz="2175" b="1">
+              <a:defRPr sz="1725" b="0">
+                <a:solidFill>
+                  <a:srgbClr val="18191C"/>
+                </a:solidFill>
+                <a:latin typeface="Malgun Gothic"/>
+                <a:ea typeface="Malgun Gothic"/>
+                <a:cs typeface="Malgun Gothic"/>
+              </a:defRPr>
+            </a:pPr>
+            <a:r>
+              <a:rPr sz="1725" b="0">
+                <a:solidFill>
+                  <a:srgbClr val="18191C"/>
+                </a:solidFill>
+                <a:latin typeface="Malgun Gothic"/>
+                <a:ea typeface="Malgun Gothic"/>
+                <a:cs typeface="Malgun Gothic"/>
+              </a:rPr>
+              <a:t>페이지 클래스 아래로 스타일 제한</a:t>
+            </a:r>
+          </a:p>
+          <a:p xmlns:a="http://schemas.openxmlformats.org/drawingml/2006/main">
+            <a:pPr>
+              <a:defRPr sz="1725" b="0">
+                <a:solidFill>
+                  <a:srgbClr val="18191C"/>
+                </a:solidFill>
+                <a:latin typeface="Malgun Gothic"/>
+                <a:ea typeface="Malgun Gothic"/>
+                <a:cs typeface="Malgun Gothic"/>
+              </a:defRPr>
+            </a:pPr>
+            <a:r>
+              <a:rPr sz="1725" b="0">
+                <a:solidFill>
+                  <a:srgbClr val="18191C"/>
+                </a:solidFill>
+                <a:latin typeface="Malgun Gothic"/>
+                <a:ea typeface="Malgun Gothic"/>
+                <a:cs typeface="Malgun Gothic"/>
+              </a:rPr>
+              <a:t>width에 패딩과 테두리 포함</a:t>
+            </a:r>
+          </a:p>
+          <a:p xmlns:a="http://schemas.openxmlformats.org/drawingml/2006/main">
+            <a:pPr>
+              <a:defRPr sz="1725" b="0">
+                <a:solidFill>
+                  <a:srgbClr val="18191C"/>
+                </a:solidFill>
+                <a:latin typeface="Malgun Gothic"/>
+                <a:ea typeface="Malgun Gothic"/>
+                <a:cs typeface="Malgun Gothic"/>
+              </a:defRPr>
+            </a:pPr>
+            <a:r>
+              <a:rPr sz="1725" b="0">
+                <a:solidFill>
+                  <a:srgbClr val="18191C"/>
+                </a:solidFill>
+                <a:latin typeface="Malgun Gothic"/>
+                <a:ea typeface="Malgun Gothic"/>
+                <a:cs typeface="Malgun Gothic"/>
+              </a:rPr>
+              <a:t>제목과 목록의 기본 여백 초기화</a:t>
+            </a:r>
+          </a:p>
+        </p:txBody>
+      </p:sp>
+      <p:sp>
+        <p:nvSpPr>
+          <p:cNvPr id="5" name="detail-113">
+            <a:extLst xmlns:a="http://schemas.openxmlformats.org/drawingml/2006/main">
+              <a:ext uri="{FF2B5EF4-FFF2-40B4-BE49-F238E27FC236}">
+                <a16:creationId xmlns:a16="http://schemas.microsoft.com/office/drawing/2014/main" id="{CFAD9DDA-9F10-4FB5-8654-1CF6BD0526C8}"/>
+              </a:ext>
+            </a:extLst>
+          </p:cNvPr>
+          <p:cNvSpPr>
+            <a:spLocks xmlns:a="http://schemas.openxmlformats.org/drawingml/2006/main" noGrp="1"/>
+          </p:cNvSpPr>
+          <p:nvPr/>
+        </p:nvSpPr>
+        <p:spPr>
+          <a:xfrm xmlns:a="http://schemas.openxmlformats.org/drawingml/2006/main">
+            <a:off x="6553200" y="1533525"/>
+            <a:ext cx="5010150" cy="533400"/>
+          </a:xfrm>
+          <a:prstGeom xmlns:a="http://schemas.openxmlformats.org/drawingml/2006/main" prst="rect">
+            <a:avLst/>
+          </a:prstGeom>
+          <a:noFill xmlns:a="http://schemas.openxmlformats.org/drawingml/2006/main"/>
+          <a:ln xmlns:a="http://schemas.openxmlformats.org/drawingml/2006/main" w="0">
+            <a:noFill/>
+          </a:ln>
+        </p:spPr>
+        <p:txBody>
+          <a:bodyPr xmlns:a="http://schemas.openxmlformats.org/drawingml/2006/main">
+            <a:noAutofit/>
+          </a:bodyPr>
+          <a:lstStyle xmlns:a="http://schemas.openxmlformats.org/drawingml/2006/main"/>
+          <a:p xmlns:a="http://schemas.openxmlformats.org/drawingml/2006/main">
+            <a:pPr>
+              <a:defRPr sz="2250" b="1">
                 <a:solidFill>
                   <a:srgbClr val="005CC9"/>
                 </a:solidFill>
@@ -4215,7 +5684,7 @@
               </a:defRPr>
             </a:pPr>
             <a:r>
-              <a:rPr sz="2175" b="1">
+              <a:rPr sz="2250" b="1">
                 <a:solidFill>
                   <a:srgbClr val="005CC9"/>
                 </a:solidFill>
@@ -4223,7 +5692,339 @@
                 <a:ea typeface="Malgun Gothic"/>
                 <a:cs typeface="Malgun Gothic"/>
               </a:rPr>
-              <a:t>:hover와 :focus-visible에 같은 강조색 적용</a:t>
+              <a:t>이미지 공간과 비율</a:t>
+            </a:r>
+          </a:p>
+        </p:txBody>
+      </p:sp>
+      <p:sp>
+        <p:nvSpPr>
+          <p:cNvPr id="6" name="detail-114">
+            <a:extLst xmlns:a="http://schemas.openxmlformats.org/drawingml/2006/main">
+              <a:ext uri="{FF2B5EF4-FFF2-40B4-BE49-F238E27FC236}">
+                <a16:creationId xmlns:a16="http://schemas.microsoft.com/office/drawing/2014/main" id="{38522469-BD33-4617-81BF-8E95AE7AE4C7}"/>
+              </a:ext>
+            </a:extLst>
+          </p:cNvPr>
+          <p:cNvSpPr>
+            <a:spLocks xmlns:a="http://schemas.openxmlformats.org/drawingml/2006/main" noGrp="1"/>
+          </p:cNvSpPr>
+          <p:nvPr/>
+        </p:nvSpPr>
+        <p:spPr>
+          <a:xfrm xmlns:a="http://schemas.openxmlformats.org/drawingml/2006/main">
+            <a:off x="6553200" y="2257425"/>
+            <a:ext cx="5029200" cy="1809750"/>
+          </a:xfrm>
+          <a:prstGeom xmlns:a="http://schemas.openxmlformats.org/drawingml/2006/main" prst="rect">
+            <a:avLst/>
+          </a:prstGeom>
+          <a:noFill xmlns:a="http://schemas.openxmlformats.org/drawingml/2006/main"/>
+          <a:ln xmlns:a="http://schemas.openxmlformats.org/drawingml/2006/main" w="0">
+            <a:noFill/>
+          </a:ln>
+        </p:spPr>
+        <p:txBody>
+          <a:bodyPr xmlns:a="http://schemas.openxmlformats.org/drawingml/2006/main">
+            <a:noAutofit/>
+          </a:bodyPr>
+          <a:lstStyle xmlns:a="http://schemas.openxmlformats.org/drawingml/2006/main"/>
+          <a:p xmlns:a="http://schemas.openxmlformats.org/drawingml/2006/main">
+            <a:pPr>
+              <a:defRPr sz="1875" b="0">
+                <a:solidFill>
+                  <a:srgbClr val="555D6B"/>
+                </a:solidFill>
+                <a:latin typeface="Malgun Gothic"/>
+                <a:ea typeface="Malgun Gothic"/>
+                <a:cs typeface="Malgun Gothic"/>
+              </a:defRPr>
+            </a:pPr>
+            <a:r>
+              <a:rPr sz="1875" b="0">
+                <a:solidFill>
+                  <a:srgbClr val="555D6B"/>
+                </a:solidFill>
+                <a:latin typeface="Malgun Gothic"/>
+                <a:ea typeface="Malgun Gothic"/>
+                <a:cs typeface="Malgun Gothic"/>
+              </a:rPr>
+              <a:t>.customer-service .game-card img {</a:t>
+            </a:r>
+          </a:p>
+          <a:p xmlns:a="http://schemas.openxmlformats.org/drawingml/2006/main">
+            <a:pPr>
+              <a:defRPr sz="1875" b="0">
+                <a:solidFill>
+                  <a:srgbClr val="555D6B"/>
+                </a:solidFill>
+                <a:latin typeface="Malgun Gothic"/>
+                <a:ea typeface="Malgun Gothic"/>
+                <a:cs typeface="Malgun Gothic"/>
+              </a:defRPr>
+            </a:pPr>
+            <a:r>
+              <a:rPr sz="1875" b="0">
+                <a:solidFill>
+                  <a:srgbClr val="555D6B"/>
+                </a:solidFill>
+                <a:latin typeface="Malgun Gothic"/>
+                <a:ea typeface="Malgun Gothic"/>
+                <a:cs typeface="Malgun Gothic"/>
+              </a:rPr>
+              <a:t>  width: 136px;</a:t>
+            </a:r>
+          </a:p>
+          <a:p xmlns:a="http://schemas.openxmlformats.org/drawingml/2006/main">
+            <a:pPr>
+              <a:defRPr sz="1875" b="0">
+                <a:solidFill>
+                  <a:srgbClr val="555D6B"/>
+                </a:solidFill>
+                <a:latin typeface="Malgun Gothic"/>
+                <a:ea typeface="Malgun Gothic"/>
+                <a:cs typeface="Malgun Gothic"/>
+              </a:defRPr>
+            </a:pPr>
+            <a:r>
+              <a:rPr sz="1875" b="0">
+                <a:solidFill>
+                  <a:srgbClr val="555D6B"/>
+                </a:solidFill>
+                <a:latin typeface="Malgun Gothic"/>
+                <a:ea typeface="Malgun Gothic"/>
+                <a:cs typeface="Malgun Gothic"/>
+              </a:rPr>
+              <a:t>  height: 136px;</a:t>
+            </a:r>
+          </a:p>
+          <a:p xmlns:a="http://schemas.openxmlformats.org/drawingml/2006/main">
+            <a:pPr>
+              <a:defRPr sz="1875" b="0">
+                <a:solidFill>
+                  <a:srgbClr val="555D6B"/>
+                </a:solidFill>
+                <a:latin typeface="Malgun Gothic"/>
+                <a:ea typeface="Malgun Gothic"/>
+                <a:cs typeface="Malgun Gothic"/>
+              </a:defRPr>
+            </a:pPr>
+            <a:r>
+              <a:rPr sz="1875" b="0">
+                <a:solidFill>
+                  <a:srgbClr val="555D6B"/>
+                </a:solidFill>
+                <a:latin typeface="Malgun Gothic"/>
+                <a:ea typeface="Malgun Gothic"/>
+                <a:cs typeface="Malgun Gothic"/>
+              </a:rPr>
+              <a:t>  object-fit: cover;</a:t>
+            </a:r>
+          </a:p>
+          <a:p xmlns:a="http://schemas.openxmlformats.org/drawingml/2006/main">
+            <a:pPr>
+              <a:defRPr sz="1875" b="0">
+                <a:solidFill>
+                  <a:srgbClr val="555D6B"/>
+                </a:solidFill>
+                <a:latin typeface="Malgun Gothic"/>
+                <a:ea typeface="Malgun Gothic"/>
+                <a:cs typeface="Malgun Gothic"/>
+              </a:defRPr>
+            </a:pPr>
+            <a:r>
+              <a:rPr sz="1875" b="0">
+                <a:solidFill>
+                  <a:srgbClr val="555D6B"/>
+                </a:solidFill>
+                <a:latin typeface="Malgun Gothic"/>
+                <a:ea typeface="Malgun Gothic"/>
+                <a:cs typeface="Malgun Gothic"/>
+              </a:rPr>
+              <a:t>}</a:t>
+            </a:r>
+          </a:p>
+        </p:txBody>
+      </p:sp>
+      <p:sp>
+        <p:nvSpPr>
+          <p:cNvPr id="7" name="detail-115">
+            <a:extLst xmlns:a="http://schemas.openxmlformats.org/drawingml/2006/main">
+              <a:ext uri="{FF2B5EF4-FFF2-40B4-BE49-F238E27FC236}">
+                <a16:creationId xmlns:a16="http://schemas.microsoft.com/office/drawing/2014/main" id="{F0BDC965-7AC2-49A7-9A4A-6200E25917C1}"/>
+              </a:ext>
+            </a:extLst>
+          </p:cNvPr>
+          <p:cNvSpPr>
+            <a:spLocks xmlns:a="http://schemas.openxmlformats.org/drawingml/2006/main" noGrp="1"/>
+          </p:cNvSpPr>
+          <p:nvPr/>
+        </p:nvSpPr>
+        <p:spPr>
+          <a:xfrm xmlns:a="http://schemas.openxmlformats.org/drawingml/2006/main">
+            <a:off x="6553200" y="4352925"/>
+            <a:ext cx="5029200" cy="1371600"/>
+          </a:xfrm>
+          <a:prstGeom xmlns:a="http://schemas.openxmlformats.org/drawingml/2006/main" prst="rect">
+            <a:avLst/>
+          </a:prstGeom>
+          <a:noFill xmlns:a="http://schemas.openxmlformats.org/drawingml/2006/main"/>
+          <a:ln xmlns:a="http://schemas.openxmlformats.org/drawingml/2006/main" w="0">
+            <a:noFill/>
+          </a:ln>
+        </p:spPr>
+        <p:txBody>
+          <a:bodyPr xmlns:a="http://schemas.openxmlformats.org/drawingml/2006/main">
+            <a:noAutofit/>
+          </a:bodyPr>
+          <a:lstStyle xmlns:a="http://schemas.openxmlformats.org/drawingml/2006/main"/>
+          <a:p xmlns:a="http://schemas.openxmlformats.org/drawingml/2006/main">
+            <a:pPr>
+              <a:defRPr sz="2025" b="0">
+                <a:solidFill>
+                  <a:srgbClr val="18191C"/>
+                </a:solidFill>
+                <a:latin typeface="Malgun Gothic"/>
+                <a:ea typeface="Malgun Gothic"/>
+                <a:cs typeface="Malgun Gothic"/>
+              </a:defRPr>
+            </a:pPr>
+            <a:r>
+              <a:rPr sz="2025" b="0">
+                <a:solidFill>
+                  <a:srgbClr val="18191C"/>
+                </a:solidFill>
+                <a:latin typeface="Malgun Gothic"/>
+                <a:ea typeface="Malgun Gothic"/>
+                <a:cs typeface="Malgun Gothic"/>
+              </a:rPr>
+              <a:t>이미지 로드 전에도 공간 확보</a:t>
+            </a:r>
+          </a:p>
+          <a:p xmlns:a="http://schemas.openxmlformats.org/drawingml/2006/main">
+            <a:pPr>
+              <a:defRPr sz="2025" b="0">
+                <a:solidFill>
+                  <a:srgbClr val="18191C"/>
+                </a:solidFill>
+                <a:latin typeface="Malgun Gothic"/>
+                <a:ea typeface="Malgun Gothic"/>
+                <a:cs typeface="Malgun Gothic"/>
+              </a:defRPr>
+            </a:pPr>
+            <a:r>
+              <a:rPr sz="2025" b="0">
+                <a:solidFill>
+                  <a:srgbClr val="18191C"/>
+                </a:solidFill>
+                <a:latin typeface="Malgun Gothic"/>
+                <a:ea typeface="Malgun Gothic"/>
+                <a:cs typeface="Malgun Gothic"/>
+              </a:rPr>
+              <a:t>비율을 유지하며 정사각형 채우기</a:t>
+            </a:r>
+          </a:p>
+          <a:p xmlns:a="http://schemas.openxmlformats.org/drawingml/2006/main">
+            <a:pPr>
+              <a:defRPr sz="2025" b="0">
+                <a:solidFill>
+                  <a:srgbClr val="18191C"/>
+                </a:solidFill>
+                <a:latin typeface="Malgun Gothic"/>
+                <a:ea typeface="Malgun Gothic"/>
+                <a:cs typeface="Malgun Gothic"/>
+              </a:defRPr>
+            </a:pPr>
+            <a:r>
+              <a:rPr sz="2025" b="0">
+                <a:solidFill>
+                  <a:srgbClr val="18191C"/>
+                </a:solidFill>
+                <a:latin typeface="Malgun Gothic"/>
+                <a:ea typeface="Malgun Gothic"/>
+                <a:cs typeface="Malgun Gothic"/>
+              </a:rPr>
+              <a:t>비율이 다르면 가장자리 일부 잘림</a:t>
+            </a:r>
+          </a:p>
+        </p:txBody>
+      </p:sp>
+      <p:sp>
+        <p:nvSpPr>
+          <p:cNvPr id="8" name="detail-116">
+            <a:extLst xmlns:a="http://schemas.openxmlformats.org/drawingml/2006/main">
+              <a:ext uri="{FF2B5EF4-FFF2-40B4-BE49-F238E27FC236}">
+                <a16:creationId xmlns:a16="http://schemas.microsoft.com/office/drawing/2014/main" id="{223B37D5-C263-47E1-837D-35DA2EE392F5}"/>
+              </a:ext>
+            </a:extLst>
+          </p:cNvPr>
+          <p:cNvSpPr>
+            <a:spLocks xmlns:a="http://schemas.openxmlformats.org/drawingml/2006/main" noGrp="1"/>
+          </p:cNvSpPr>
+          <p:nvPr/>
+        </p:nvSpPr>
+        <p:spPr>
+          <a:xfrm xmlns:a="http://schemas.openxmlformats.org/drawingml/2006/main">
+            <a:off x="6553200" y="5848350"/>
+            <a:ext cx="5029200" cy="762000"/>
+          </a:xfrm>
+          <a:prstGeom xmlns:a="http://schemas.openxmlformats.org/drawingml/2006/main" prst="rect">
+            <a:avLst/>
+          </a:prstGeom>
+          <a:noFill xmlns:a="http://schemas.openxmlformats.org/drawingml/2006/main"/>
+          <a:ln xmlns:a="http://schemas.openxmlformats.org/drawingml/2006/main" w="0">
+            <a:noFill/>
+          </a:ln>
+        </p:spPr>
+        <p:txBody>
+          <a:bodyPr xmlns:a="http://schemas.openxmlformats.org/drawingml/2006/main">
+            <a:noAutofit/>
+          </a:bodyPr>
+          <a:lstStyle xmlns:a="http://schemas.openxmlformats.org/drawingml/2006/main"/>
+          <a:p xmlns:a="http://schemas.openxmlformats.org/drawingml/2006/main">
+            <a:pPr>
+              <a:defRPr sz="1800" b="1">
+                <a:solidFill>
+                  <a:srgbClr val="005CC9"/>
+                </a:solidFill>
+                <a:latin typeface="Malgun Gothic"/>
+                <a:ea typeface="Malgun Gothic"/>
+                <a:cs typeface="Malgun Gothic"/>
+              </a:defRPr>
+            </a:pPr>
+            <a:r>
+              <a:rPr sz="1800" b="1">
+                <a:solidFill>
+                  <a:srgbClr val="005CC9"/>
+                </a:solidFill>
+                <a:latin typeface="Malgun Gothic"/>
+                <a:ea typeface="Malgun Gothic"/>
+                <a:cs typeface="Malgun Gothic"/>
+              </a:rPr>
+              <a:t>이미지 136px + 좌우 테두리 2px</a:t>
+            </a:r>
+          </a:p>
+          <a:p xmlns:a="http://schemas.openxmlformats.org/drawingml/2006/main">
+            <a:pPr>
+              <a:defRPr sz="1800" b="1">
+                <a:solidFill>
+                  <a:srgbClr val="005CC9"/>
+                </a:solidFill>
+                <a:latin typeface="Malgun Gothic"/>
+                <a:ea typeface="Malgun Gothic"/>
+                <a:cs typeface="Malgun Gothic"/>
+              </a:defRPr>
+            </a:pPr>
+            <a:r>
+              <a:rPr sz="1800" b="1">
+                <a:solidFill>
+                  <a:srgbClr val="005CC9"/>
+                </a:solidFill>
+                <a:latin typeface="Malgun Gothic"/>
+                <a:ea typeface="Malgun Gothic"/>
+                <a:cs typeface="Malgun Gothic"/>
+              </a:rPr>
+              <a:t>= 카드 전체 너비 138px</a:t>
             </a:r>
           </a:p>
         </p:txBody>
@@ -4231,7 +6032,7 @@
     </p:spTree>
     <p:extLst>
       <p:ext uri="{BB962C8B-B14F-4D97-AF65-F5344CB8AC3E}">
-        <p14:creationId xmlns:p14="http://schemas.microsoft.com/office/powerpoint/2010/main" val="855842776"/>
+        <p14:creationId xmlns:p14="http://schemas.microsoft.com/office/powerpoint/2010/main" val="1057066079"/>
       </p:ext>
     </p:extLst>
   </p:cSld>
@@ -4259,10 +6060,10 @@
       </p:grpSpPr>
       <p:sp>
         <p:nvSpPr>
-          <p:cNvPr id="7" name="text-30">
+          <p:cNvPr id="6" name="text-22">
             <a:extLst xmlns:a="http://schemas.openxmlformats.org/drawingml/2006/main">
               <a:ext uri="{FF2B5EF4-FFF2-40B4-BE49-F238E27FC236}">
-                <a16:creationId xmlns:a16="http://schemas.microsoft.com/office/drawing/2014/main" id="{02184F8B-57B9-448A-B818-6BF5A6E8B3BB}"/>
+                <a16:creationId xmlns:a16="http://schemas.microsoft.com/office/drawing/2014/main" id="{D3B2E35A-C9E7-4A52-AE38-1F6E044C173E}"/>
               </a:ext>
             </a:extLst>
           </p:cNvPr>
@@ -4291,6 +6092,7 @@
           <a:lstStyle xmlns:a="http://schemas.openxmlformats.org/drawingml/2006/main"/>
           <a:p xmlns:a="http://schemas.openxmlformats.org/drawingml/2006/main">
             <a:pPr>
+              <a:buNone/>
               <a:defRPr sz="3450" b="1">
                 <a:solidFill>
                   <a:srgbClr val="18191C"/>
@@ -4309,27 +6111,27 @@
                 <a:ea typeface="Malgun Gothic"/>
                 <a:cs typeface="Malgun Gothic"/>
               </a:rPr>
-              <a:t>팀 페이지와 외부 서비스 연결</a:t>
+              <a:t>스크롤을 따라가는 왼쪽 메뉴</a:t>
             </a:r>
           </a:p>
         </p:txBody>
       </p:sp>
       <p:pic>
         <p:nvPicPr>
-          <p:cNvPr id="8" name=""/>
+          <p:cNvPr id="9" name=""/>
           <p:cNvPicPr>
             <a:picLocks xmlns:a="http://schemas.openxmlformats.org/drawingml/2006/main" noChangeAspect="1"/>
           </p:cNvPicPr>
           <p:nvPr/>
         </p:nvPicPr>
         <p:blipFill>
-          <a:blip xmlns:r="http://schemas.openxmlformats.org/officeDocument/2006/relationships" xmlns:a="http://schemas.openxmlformats.org/drawingml/2006/main" r:embed="Rebdc2b46281f4e70"/>
+          <a:blip xmlns:r="http://schemas.openxmlformats.org/officeDocument/2006/relationships" xmlns:a="http://schemas.openxmlformats.org/drawingml/2006/main" r:embed="R43708931f90944a6"/>
           <a:stretch xmlns:a="http://schemas.openxmlformats.org/drawingml/2006/main"/>
         </p:blipFill>
         <p:spPr>
           <a:xfrm xmlns:a="http://schemas.openxmlformats.org/drawingml/2006/main">
-            <a:off x="609600" y="1460183"/>
-            <a:ext cx="10972800" cy="899160"/>
+            <a:off x="515112" y="1438275"/>
+            <a:ext cx="7351776" cy="5105400"/>
           </a:xfrm>
           <a:prstGeom xmlns:a="http://schemas.openxmlformats.org/drawingml/2006/main" prst="rect">
             <a:avLst/>
@@ -4338,10 +6140,10 @@
       </p:pic>
       <p:sp>
         <p:nvSpPr>
-          <p:cNvPr id="3" name="text-31">
+          <p:cNvPr id="3" name="text-23">
             <a:extLst xmlns:a="http://schemas.openxmlformats.org/drawingml/2006/main">
               <a:ext uri="{FF2B5EF4-FFF2-40B4-BE49-F238E27FC236}">
-                <a16:creationId xmlns:a16="http://schemas.microsoft.com/office/drawing/2014/main" id="{B62C282B-AF93-4E00-9D8B-8CC750BA822D}"/>
+                <a16:creationId xmlns:a16="http://schemas.microsoft.com/office/drawing/2014/main" id="{8FD47462-9B16-4380-9916-4053DE772BA6}"/>
               </a:ext>
             </a:extLst>
           </p:cNvPr>
@@ -4352,8 +6154,8 @@
         </p:nvSpPr>
         <p:spPr>
           <a:xfrm xmlns:a="http://schemas.openxmlformats.org/drawingml/2006/main">
-            <a:off x="609600" y="2876550"/>
-            <a:ext cx="5048250" cy="552450"/>
+            <a:off x="8258175" y="1590675"/>
+            <a:ext cx="3333750" cy="857250"/>
           </a:xfrm>
           <a:prstGeom xmlns:a="http://schemas.openxmlformats.org/drawingml/2006/main" prst="rect">
             <a:avLst/>
@@ -4370,7 +6172,8 @@
           <a:lstStyle xmlns:a="http://schemas.openxmlformats.org/drawingml/2006/main"/>
           <a:p xmlns:a="http://schemas.openxmlformats.org/drawingml/2006/main">
             <a:pPr>
-              <a:defRPr sz="2325" b="1">
+              <a:buNone/>
+              <a:defRPr sz="2175" b="1">
                 <a:solidFill>
                   <a:srgbClr val="005CC9"/>
                 </a:solidFill>
@@ -4380,7 +6183,7 @@
               </a:defRPr>
             </a:pPr>
             <a:r>
-              <a:rPr sz="2325" b="1">
+              <a:rPr sz="2175" b="1">
                 <a:solidFill>
                   <a:srgbClr val="005CC9"/>
                 </a:solidFill>
@@ -4388,17 +6191,17 @@
                 <a:ea typeface="Malgun Gothic"/>
                 <a:cs typeface="Malgun Gothic"/>
               </a:rPr>
-              <a:t>프로젝트 내부 링크</a:t>
-            </a:r>
-          </a:p>
-        </p:txBody>
-      </p:sp>
-      <p:sp>
-        <p:nvSpPr>
-          <p:cNvPr id="4" name="text-32">
+              <a:t>배경과 메뉴의 역할 분리</a:t>
+            </a:r>
+          </a:p>
+        </p:txBody>
+      </p:sp>
+      <p:sp>
+        <p:nvSpPr>
+          <p:cNvPr id="4" name="text-24">
             <a:extLst xmlns:a="http://schemas.openxmlformats.org/drawingml/2006/main">
               <a:ext uri="{FF2B5EF4-FFF2-40B4-BE49-F238E27FC236}">
-                <a16:creationId xmlns:a16="http://schemas.microsoft.com/office/drawing/2014/main" id="{D00EBF54-1A0E-472F-A65F-98DAD40F1968}"/>
+                <a16:creationId xmlns:a16="http://schemas.microsoft.com/office/drawing/2014/main" id="{75D2EAD2-1E41-4146-8400-AA3E321A1190}"/>
               </a:ext>
             </a:extLst>
           </p:cNvPr>
@@ -4409,8 +6212,8 @@
         </p:nvSpPr>
         <p:spPr>
           <a:xfrm xmlns:a="http://schemas.openxmlformats.org/drawingml/2006/main">
-            <a:off x="609600" y="3733800"/>
-            <a:ext cx="5181600" cy="1971675"/>
+            <a:off x="8258175" y="2647950"/>
+            <a:ext cx="3333750" cy="1323975"/>
           </a:xfrm>
           <a:prstGeom xmlns:a="http://schemas.openxmlformats.org/drawingml/2006/main" prst="rect">
             <a:avLst/>
@@ -4427,81 +6230,84 @@
           <a:lstStyle xmlns:a="http://schemas.openxmlformats.org/drawingml/2006/main"/>
           <a:p xmlns:a="http://schemas.openxmlformats.org/drawingml/2006/main">
             <a:pPr>
-              <a:defRPr sz="2025" b="0">
-                <a:solidFill>
-                  <a:srgbClr val="18191C"/>
-                </a:solidFill>
-                <a:latin typeface="Malgun Gothic"/>
-                <a:ea typeface="Malgun Gothic"/>
-                <a:cs typeface="Malgun Gothic"/>
-              </a:defRPr>
-            </a:pPr>
-            <a:r>
-              <a:rPr sz="2025" b="0">
-                <a:solidFill>
-                  <a:srgbClr val="18191C"/>
-                </a:solidFill>
-                <a:latin typeface="Malgun Gothic"/>
-                <a:ea typeface="Malgun Gothic"/>
-                <a:cs typeface="Malgun Gothic"/>
-              </a:rPr>
-              <a:t>로고는 메인 페이지로 이동</a:t>
-            </a:r>
-          </a:p>
-          <a:p xmlns:a="http://schemas.openxmlformats.org/drawingml/2006/main">
-            <a:pPr>
-              <a:defRPr sz="2025" b="0">
-                <a:solidFill>
-                  <a:srgbClr val="18191C"/>
-                </a:solidFill>
-                <a:latin typeface="Malgun Gothic"/>
-                <a:ea typeface="Malgun Gothic"/>
-                <a:cs typeface="Malgun Gothic"/>
-              </a:defRPr>
-            </a:pPr>
-            <a:r>
-              <a:rPr sz="2025" b="0">
-                <a:solidFill>
-                  <a:srgbClr val="18191C"/>
-                </a:solidFill>
-                <a:latin typeface="Malgun Gothic"/>
-                <a:ea typeface="Malgun Gothic"/>
-                <a:cs typeface="Malgun Gothic"/>
-              </a:rPr>
-              <a:t>회원가입과 로그인은 로그인 페이지로 이동</a:t>
-            </a:r>
-          </a:p>
-          <a:p xmlns:a="http://schemas.openxmlformats.org/drawingml/2006/main">
-            <a:pPr>
-              <a:defRPr sz="2025" b="0">
-                <a:solidFill>
-                  <a:srgbClr val="18191C"/>
-                </a:solidFill>
-                <a:latin typeface="Malgun Gothic"/>
-                <a:ea typeface="Malgun Gothic"/>
-                <a:cs typeface="Malgun Gothic"/>
-              </a:defRPr>
-            </a:pPr>
-            <a:r>
-              <a:rPr sz="2025" b="0">
-                <a:solidFill>
-                  <a:srgbClr val="18191C"/>
-                </a:solidFill>
-                <a:latin typeface="Malgun Gothic"/>
-                <a:ea typeface="Malgun Gothic"/>
-                <a:cs typeface="Malgun Gothic"/>
-              </a:rPr>
-              <a:t>공지사항, MY결제, 보안센터 연결</a:t>
-            </a:r>
-          </a:p>
-        </p:txBody>
-      </p:sp>
-      <p:sp>
-        <p:nvSpPr>
-          <p:cNvPr id="5" name="text-33">
+              <a:buNone/>
+              <a:defRPr sz="1950" b="0">
+                <a:solidFill>
+                  <a:srgbClr val="18191C"/>
+                </a:solidFill>
+                <a:latin typeface="Malgun Gothic"/>
+                <a:ea typeface="Malgun Gothic"/>
+                <a:cs typeface="Malgun Gothic"/>
+              </a:defRPr>
+            </a:pPr>
+            <a:r>
+              <a:rPr sz="1950" b="0">
+                <a:solidFill>
+                  <a:srgbClr val="18191C"/>
+                </a:solidFill>
+                <a:latin typeface="Malgun Gothic"/>
+                <a:ea typeface="Malgun Gothic"/>
+                <a:cs typeface="Malgun Gothic"/>
+              </a:rPr>
+              <a:t>aside는 본문 높이를 채움</a:t>
+            </a:r>
+          </a:p>
+          <a:p xmlns:a="http://schemas.openxmlformats.org/drawingml/2006/main">
+            <a:pPr>
+              <a:buNone/>
+              <a:defRPr sz="1950" b="0">
+                <a:solidFill>
+                  <a:srgbClr val="18191C"/>
+                </a:solidFill>
+                <a:latin typeface="Malgun Gothic"/>
+                <a:ea typeface="Malgun Gothic"/>
+                <a:cs typeface="Malgun Gothic"/>
+              </a:defRPr>
+            </a:pPr>
+            <a:r>
+              <a:rPr sz="1950" b="0">
+                <a:solidFill>
+                  <a:srgbClr val="18191C"/>
+                </a:solidFill>
+                <a:latin typeface="Malgun Gothic"/>
+                <a:ea typeface="Malgun Gothic"/>
+                <a:cs typeface="Malgun Gothic"/>
+              </a:rPr>
+              <a:t>nav가 top: 0에 닿으면 붙고</a:t>
+            </a:r>
+          </a:p>
+          <a:p xmlns:a="http://schemas.openxmlformats.org/drawingml/2006/main">
+            <a:pPr>
+              <a:buNone/>
+              <a:defRPr sz="1950" b="0">
+                <a:solidFill>
+                  <a:srgbClr val="18191C"/>
+                </a:solidFill>
+                <a:latin typeface="Malgun Gothic"/>
+                <a:ea typeface="Malgun Gothic"/>
+                <a:cs typeface="Malgun Gothic"/>
+              </a:defRPr>
+            </a:pPr>
+            <a:r>
+              <a:rPr sz="1950" b="0">
+                <a:solidFill>
+                  <a:srgbClr val="18191C"/>
+                </a:solidFill>
+                <a:latin typeface="Malgun Gothic"/>
+                <a:ea typeface="Malgun Gothic"/>
+                <a:cs typeface="Malgun Gothic"/>
+              </a:rPr>
+              <a:t>부모 영역 안에서 위치 유지</a:t>
+            </a:r>
+          </a:p>
+        </p:txBody>
+      </p:sp>
+      <p:sp>
+        <p:nvSpPr>
+          <p:cNvPr id="5" name="text-25">
             <a:extLst xmlns:a="http://schemas.openxmlformats.org/drawingml/2006/main">
               <a:ext uri="{FF2B5EF4-FFF2-40B4-BE49-F238E27FC236}">
-                <a16:creationId xmlns:a16="http://schemas.microsoft.com/office/drawing/2014/main" id="{3B497291-84DE-4563-8800-924CBE7608D5}"/>
+                <a16:creationId xmlns:a16="http://schemas.microsoft.com/office/drawing/2014/main" id="{339A3840-9A3E-48A5-AC88-1AEAD77AEC27}"/>
               </a:ext>
             </a:extLst>
           </p:cNvPr>
@@ -4512,8 +6318,8 @@
         </p:nvSpPr>
         <p:spPr>
           <a:xfrm xmlns:a="http://schemas.openxmlformats.org/drawingml/2006/main">
-            <a:off x="6543675" y="2876550"/>
-            <a:ext cx="5048250" cy="552450"/>
+            <a:off x="8258175" y="4219575"/>
+            <a:ext cx="3333750" cy="2057400"/>
           </a:xfrm>
           <a:prstGeom xmlns:a="http://schemas.openxmlformats.org/drawingml/2006/main" prst="rect">
             <a:avLst/>
@@ -4530,128 +6336,146 @@
           <a:lstStyle xmlns:a="http://schemas.openxmlformats.org/drawingml/2006/main"/>
           <a:p xmlns:a="http://schemas.openxmlformats.org/drawingml/2006/main">
             <a:pPr>
-              <a:defRPr sz="2325" b="1">
-                <a:solidFill>
-                  <a:srgbClr val="005CC9"/>
-                </a:solidFill>
-                <a:latin typeface="Malgun Gothic"/>
-                <a:ea typeface="Malgun Gothic"/>
-                <a:cs typeface="Malgun Gothic"/>
-              </a:defRPr>
-            </a:pPr>
-            <a:r>
-              <a:rPr sz="2325" b="1">
-                <a:solidFill>
-                  <a:srgbClr val="005CC9"/>
-                </a:solidFill>
-                <a:latin typeface="Malgun Gothic"/>
-                <a:ea typeface="Malgun Gothic"/>
-                <a:cs typeface="Malgun Gothic"/>
-              </a:rPr>
-              <a:t>외부 서비스 링크</a:t>
-            </a:r>
-          </a:p>
-        </p:txBody>
-      </p:sp>
-      <p:sp>
-        <p:nvSpPr>
-          <p:cNvPr id="6" name="text-34">
-            <a:extLst xmlns:a="http://schemas.openxmlformats.org/drawingml/2006/main">
-              <a:ext uri="{FF2B5EF4-FFF2-40B4-BE49-F238E27FC236}">
-                <a16:creationId xmlns:a16="http://schemas.microsoft.com/office/drawing/2014/main" id="{C74F8426-C2F5-460D-8CFA-18790077F6E7}"/>
-              </a:ext>
-            </a:extLst>
-          </p:cNvPr>
-          <p:cNvSpPr>
-            <a:spLocks xmlns:a="http://schemas.openxmlformats.org/drawingml/2006/main" noGrp="1"/>
-          </p:cNvSpPr>
-          <p:nvPr/>
-        </p:nvSpPr>
-        <p:spPr>
-          <a:xfrm xmlns:a="http://schemas.openxmlformats.org/drawingml/2006/main">
-            <a:off x="6543675" y="3733800"/>
-            <a:ext cx="5048250" cy="1971675"/>
-          </a:xfrm>
-          <a:prstGeom xmlns:a="http://schemas.openxmlformats.org/drawingml/2006/main" prst="rect">
-            <a:avLst/>
-          </a:prstGeom>
-          <a:noFill xmlns:a="http://schemas.openxmlformats.org/drawingml/2006/main"/>
-          <a:ln xmlns:a="http://schemas.openxmlformats.org/drawingml/2006/main" w="0">
-            <a:noFill/>
-          </a:ln>
-        </p:spPr>
-        <p:txBody>
-          <a:bodyPr xmlns:a="http://schemas.openxmlformats.org/drawingml/2006/main">
-            <a:noAutofit/>
-          </a:bodyPr>
-          <a:lstStyle xmlns:a="http://schemas.openxmlformats.org/drawingml/2006/main"/>
-          <a:p xmlns:a="http://schemas.openxmlformats.org/drawingml/2006/main">
-            <a:pPr>
-              <a:defRPr sz="2025" b="0">
-                <a:solidFill>
-                  <a:srgbClr val="18191C"/>
-                </a:solidFill>
-                <a:latin typeface="Malgun Gothic"/>
-                <a:ea typeface="Malgun Gothic"/>
-                <a:cs typeface="Malgun Gothic"/>
-              </a:defRPr>
-            </a:pPr>
-            <a:r>
-              <a:rPr sz="2025" b="0">
-                <a:solidFill>
-                  <a:srgbClr val="18191C"/>
-                </a:solidFill>
-                <a:latin typeface="Malgun Gothic"/>
-                <a:ea typeface="Malgun Gothic"/>
-                <a:cs typeface="Malgun Gothic"/>
-              </a:rPr>
-              <a:t>게임 카드는 각 문의 페이지로 이동</a:t>
-            </a:r>
-          </a:p>
-          <a:p xmlns:a="http://schemas.openxmlformats.org/drawingml/2006/main">
-            <a:pPr>
-              <a:defRPr sz="2025" b="0">
-                <a:solidFill>
-                  <a:srgbClr val="18191C"/>
-                </a:solidFill>
-                <a:latin typeface="Malgun Gothic"/>
-                <a:ea typeface="Malgun Gothic"/>
-                <a:cs typeface="Malgun Gothic"/>
-              </a:defRPr>
-            </a:pPr>
-            <a:r>
-              <a:rPr sz="2025" b="0">
-                <a:solidFill>
-                  <a:srgbClr val="18191C"/>
-                </a:solidFill>
-                <a:latin typeface="Malgun Gothic"/>
-                <a:ea typeface="Malgun Gothic"/>
-                <a:cs typeface="Malgun Gothic"/>
-              </a:rPr>
-              <a:t>이벤트와 내정보는 넥슨 서비스 연결</a:t>
-            </a:r>
-          </a:p>
-          <a:p xmlns:a="http://schemas.openxmlformats.org/drawingml/2006/main">
-            <a:pPr>
-              <a:defRPr sz="2025" b="0">
-                <a:solidFill>
-                  <a:srgbClr val="18191C"/>
-                </a:solidFill>
-                <a:latin typeface="Malgun Gothic"/>
-                <a:ea typeface="Malgun Gothic"/>
-                <a:cs typeface="Malgun Gothic"/>
-              </a:defRPr>
-            </a:pPr>
-            <a:r>
-              <a:rPr sz="2025" b="0">
-                <a:solidFill>
-                  <a:srgbClr val="18191C"/>
-                </a:solidFill>
-                <a:latin typeface="Malgun Gothic"/>
-                <a:ea typeface="Malgun Gothic"/>
-                <a:cs typeface="Malgun Gothic"/>
-              </a:rPr>
-              <a:t>문의방법, 다운로드, 신고하기 연결</a:t>
+              <a:buNone/>
+              <a:defRPr sz="1800" b="0">
+                <a:solidFill>
+                  <a:srgbClr val="555D6B"/>
+                </a:solidFill>
+                <a:latin typeface="Malgun Gothic"/>
+                <a:ea typeface="Malgun Gothic"/>
+                <a:cs typeface="Malgun Gothic"/>
+              </a:defRPr>
+            </a:pPr>
+            <a:r>
+              <a:rPr sz="1800" b="0">
+                <a:solidFill>
+                  <a:srgbClr val="555D6B"/>
+                </a:solidFill>
+                <a:latin typeface="Malgun Gothic"/>
+                <a:ea typeface="Malgun Gothic"/>
+                <a:cs typeface="Malgun Gothic"/>
+              </a:rPr>
+              <a:t>.sidebar nav {</a:t>
+            </a:r>
+          </a:p>
+          <a:p xmlns:a="http://schemas.openxmlformats.org/drawingml/2006/main">
+            <a:pPr>
+              <a:buNone/>
+              <a:defRPr sz="1800" b="0">
+                <a:solidFill>
+                  <a:srgbClr val="555D6B"/>
+                </a:solidFill>
+                <a:latin typeface="Malgun Gothic"/>
+                <a:ea typeface="Malgun Gothic"/>
+                <a:cs typeface="Malgun Gothic"/>
+              </a:defRPr>
+            </a:pPr>
+            <a:r>
+              <a:rPr sz="1800" b="0">
+                <a:solidFill>
+                  <a:srgbClr val="555D6B"/>
+                </a:solidFill>
+                <a:latin typeface="Malgun Gothic"/>
+                <a:ea typeface="Malgun Gothic"/>
+                <a:cs typeface="Malgun Gothic"/>
+              </a:rPr>
+              <a:t>  position: sticky;</a:t>
+            </a:r>
+          </a:p>
+          <a:p xmlns:a="http://schemas.openxmlformats.org/drawingml/2006/main">
+            <a:pPr>
+              <a:buNone/>
+              <a:defRPr sz="1800" b="0">
+                <a:solidFill>
+                  <a:srgbClr val="555D6B"/>
+                </a:solidFill>
+                <a:latin typeface="Malgun Gothic"/>
+                <a:ea typeface="Malgun Gothic"/>
+                <a:cs typeface="Malgun Gothic"/>
+              </a:defRPr>
+            </a:pPr>
+            <a:r>
+              <a:rPr sz="1800" b="0">
+                <a:solidFill>
+                  <a:srgbClr val="555D6B"/>
+                </a:solidFill>
+                <a:latin typeface="Malgun Gothic"/>
+                <a:ea typeface="Malgun Gothic"/>
+                <a:cs typeface="Malgun Gothic"/>
+              </a:rPr>
+              <a:t>  top: 0;</a:t>
+            </a:r>
+          </a:p>
+          <a:p xmlns:a="http://schemas.openxmlformats.org/drawingml/2006/main">
+            <a:pPr>
+              <a:buNone/>
+              <a:defRPr sz="1800" b="0">
+                <a:solidFill>
+                  <a:srgbClr val="555D6B"/>
+                </a:solidFill>
+                <a:latin typeface="Malgun Gothic"/>
+                <a:ea typeface="Malgun Gothic"/>
+                <a:cs typeface="Malgun Gothic"/>
+              </a:defRPr>
+            </a:pPr>
+            <a:r>
+              <a:rPr sz="1800" b="0">
+                <a:solidFill>
+                  <a:srgbClr val="555D6B"/>
+                </a:solidFill>
+                <a:latin typeface="Malgun Gothic"/>
+                <a:ea typeface="Malgun Gothic"/>
+                <a:cs typeface="Malgun Gothic"/>
+              </a:rPr>
+              <a:t>  max-height: 100vh;</a:t>
+            </a:r>
+          </a:p>
+          <a:p xmlns:a="http://schemas.openxmlformats.org/drawingml/2006/main">
+            <a:pPr>
+              <a:buNone/>
+              <a:defRPr sz="1800" b="0">
+                <a:solidFill>
+                  <a:srgbClr val="555D6B"/>
+                </a:solidFill>
+                <a:latin typeface="Malgun Gothic"/>
+                <a:ea typeface="Malgun Gothic"/>
+                <a:cs typeface="Malgun Gothic"/>
+              </a:defRPr>
+            </a:pPr>
+            <a:r>
+              <a:rPr sz="1800" b="0">
+                <a:solidFill>
+                  <a:srgbClr val="555D6B"/>
+                </a:solidFill>
+                <a:latin typeface="Malgun Gothic"/>
+                <a:ea typeface="Malgun Gothic"/>
+                <a:cs typeface="Malgun Gothic"/>
+              </a:rPr>
+              <a:t>  overflow-y: auto;</a:t>
+            </a:r>
+          </a:p>
+          <a:p xmlns:a="http://schemas.openxmlformats.org/drawingml/2006/main">
+            <a:pPr>
+              <a:buNone/>
+              <a:defRPr sz="1800" b="0">
+                <a:solidFill>
+                  <a:srgbClr val="555D6B"/>
+                </a:solidFill>
+                <a:latin typeface="Malgun Gothic"/>
+                <a:ea typeface="Malgun Gothic"/>
+                <a:cs typeface="Malgun Gothic"/>
+              </a:defRPr>
+            </a:pPr>
+            <a:r>
+              <a:rPr sz="1800" b="0">
+                <a:solidFill>
+                  <a:srgbClr val="555D6B"/>
+                </a:solidFill>
+                <a:latin typeface="Malgun Gothic"/>
+                <a:ea typeface="Malgun Gothic"/>
+                <a:cs typeface="Malgun Gothic"/>
+              </a:rPr>
+              <a:t>}</a:t>
             </a:r>
           </a:p>
         </p:txBody>
@@ -4659,7 +6483,7 @@
     </p:spTree>
     <p:extLst>
       <p:ext uri="{BB962C8B-B14F-4D97-AF65-F5344CB8AC3E}">
-        <p14:creationId xmlns:p14="http://schemas.microsoft.com/office/powerpoint/2010/main" val="1868541726"/>
+        <p14:creationId xmlns:p14="http://schemas.microsoft.com/office/powerpoint/2010/main" val="1409088698"/>
       </p:ext>
     </p:extLst>
   </p:cSld>
@@ -4687,10 +6511,10 @@
       </p:grpSpPr>
       <p:sp>
         <p:nvSpPr>
-          <p:cNvPr id="8" name="text-35">
+          <p:cNvPr id="7" name="text-26">
             <a:extLst xmlns:a="http://schemas.openxmlformats.org/drawingml/2006/main">
               <a:ext uri="{FF2B5EF4-FFF2-40B4-BE49-F238E27FC236}">
-                <a16:creationId xmlns:a16="http://schemas.microsoft.com/office/drawing/2014/main" id="{C17173B0-30A9-4DE1-A3B1-0277A69C2150}"/>
+                <a16:creationId xmlns:a16="http://schemas.microsoft.com/office/drawing/2014/main" id="{593DDCD8-6AED-41A8-A83E-5CF08033D706}"/>
               </a:ext>
             </a:extLst>
           </p:cNvPr>
@@ -4719,6 +6543,7 @@
           <a:lstStyle xmlns:a="http://schemas.openxmlformats.org/drawingml/2006/main"/>
           <a:p xmlns:a="http://schemas.openxmlformats.org/drawingml/2006/main">
             <a:pPr>
+              <a:buNone/>
               <a:defRPr sz="3450" b="1">
                 <a:solidFill>
                   <a:srgbClr val="18191C"/>
@@ -4737,17 +6562,17 @@
                 <a:ea typeface="Malgun Gothic"/>
                 <a:cs typeface="Malgun Gothic"/>
               </a:rPr>
-              <a:t>구현 범위와 시연</a:t>
-            </a:r>
-          </a:p>
-        </p:txBody>
-      </p:sp>
-      <p:sp>
-        <p:nvSpPr>
-          <p:cNvPr id="2" name="text-36">
+              <a:t>CSS로 표현한 선택 상태</a:t>
+            </a:r>
+          </a:p>
+        </p:txBody>
+      </p:sp>
+      <p:sp>
+        <p:nvSpPr>
+          <p:cNvPr id="2" name="text-27">
             <a:extLst xmlns:a="http://schemas.openxmlformats.org/drawingml/2006/main">
               <a:ext uri="{FF2B5EF4-FFF2-40B4-BE49-F238E27FC236}">
-                <a16:creationId xmlns:a16="http://schemas.microsoft.com/office/drawing/2014/main" id="{C68FDBBD-D935-422F-8A03-1EE6A1F675CF}"/>
+                <a16:creationId xmlns:a16="http://schemas.microsoft.com/office/drawing/2014/main" id="{6F54B16D-9C14-4A00-86E8-E0854AE90E34}"/>
               </a:ext>
             </a:extLst>
           </p:cNvPr>
@@ -4758,8 +6583,8 @@
         </p:nvSpPr>
         <p:spPr>
           <a:xfrm xmlns:a="http://schemas.openxmlformats.org/drawingml/2006/main">
-            <a:off x="609600" y="1552575"/>
-            <a:ext cx="5048250" cy="571500"/>
+            <a:off x="609600" y="1800225"/>
+            <a:ext cx="2095500" cy="533400"/>
           </a:xfrm>
           <a:prstGeom xmlns:a="http://schemas.openxmlformats.org/drawingml/2006/main" prst="rect">
             <a:avLst/>
@@ -4776,35 +6601,58 @@
           <a:lstStyle xmlns:a="http://schemas.openxmlformats.org/drawingml/2006/main"/>
           <a:p xmlns:a="http://schemas.openxmlformats.org/drawingml/2006/main">
             <a:pPr>
-              <a:defRPr sz="2400" b="1">
-                <a:solidFill>
-                  <a:srgbClr val="005CC9"/>
-                </a:solidFill>
-                <a:latin typeface="Malgun Gothic"/>
-                <a:ea typeface="Malgun Gothic"/>
-                <a:cs typeface="Malgun Gothic"/>
-              </a:defRPr>
-            </a:pPr>
-            <a:r>
-              <a:rPr sz="2400" b="1">
-                <a:solidFill>
-                  <a:srgbClr val="005CC9"/>
-                </a:solidFill>
-                <a:latin typeface="Malgun Gothic"/>
-                <a:ea typeface="Malgun Gothic"/>
-                <a:cs typeface="Malgun Gothic"/>
-              </a:rPr>
-              <a:t>구현한 부분</a:t>
-            </a:r>
-          </a:p>
-        </p:txBody>
-      </p:sp>
-      <p:sp>
-        <p:nvSpPr>
-          <p:cNvPr id="3" name="text-37">
+              <a:buNone/>
+              <a:defRPr sz="2100" b="1">
+                <a:solidFill>
+                  <a:srgbClr val="555D6B"/>
+                </a:solidFill>
+                <a:latin typeface="Malgun Gothic"/>
+                <a:ea typeface="Malgun Gothic"/>
+                <a:cs typeface="Malgun Gothic"/>
+              </a:defRPr>
+            </a:pPr>
+            <a:r>
+              <a:rPr sz="2100" b="1">
+                <a:solidFill>
+                  <a:srgbClr val="555D6B"/>
+                </a:solidFill>
+                <a:latin typeface="Malgun Gothic"/>
+                <a:ea typeface="Malgun Gothic"/>
+                <a:cs typeface="Malgun Gothic"/>
+              </a:rPr>
+              <a:t>기본 상태</a:t>
+            </a:r>
+          </a:p>
+        </p:txBody>
+      </p:sp>
+      <p:pic>
+        <p:nvPicPr>
+          <p:cNvPr id="13" name=""/>
+          <p:cNvPicPr>
+            <a:picLocks xmlns:a="http://schemas.openxmlformats.org/drawingml/2006/main" noChangeAspect="1"/>
+          </p:cNvPicPr>
+          <p:nvPr/>
+        </p:nvPicPr>
+        <p:blipFill>
+          <a:blip xmlns:r="http://schemas.openxmlformats.org/officeDocument/2006/relationships" xmlns:a="http://schemas.openxmlformats.org/drawingml/2006/main" r:embed="R6c4b3a1319704318"/>
+          <a:stretch xmlns:a="http://schemas.openxmlformats.org/drawingml/2006/main"/>
+        </p:blipFill>
+        <p:spPr>
+          <a:xfrm xmlns:a="http://schemas.openxmlformats.org/drawingml/2006/main">
+            <a:off x="2705100" y="1407795"/>
+            <a:ext cx="8877300" cy="1775460"/>
+          </a:xfrm>
+          <a:prstGeom xmlns:a="http://schemas.openxmlformats.org/drawingml/2006/main" prst="rect">
+            <a:avLst/>
+          </a:prstGeom>
+        </p:spPr>
+      </p:pic>
+      <p:sp>
+        <p:nvSpPr>
+          <p:cNvPr id="4" name="text-28">
             <a:extLst xmlns:a="http://schemas.openxmlformats.org/drawingml/2006/main">
               <a:ext uri="{FF2B5EF4-FFF2-40B4-BE49-F238E27FC236}">
-                <a16:creationId xmlns:a16="http://schemas.microsoft.com/office/drawing/2014/main" id="{1292188D-0942-478B-939A-118FE50A4391}"/>
+                <a16:creationId xmlns:a16="http://schemas.microsoft.com/office/drawing/2014/main" id="{A391F7E7-E8CE-47CF-BB60-CB9699D5F050}"/>
               </a:ext>
             </a:extLst>
           </p:cNvPr>
@@ -4815,8 +6663,8 @@
         </p:nvSpPr>
         <p:spPr>
           <a:xfrm xmlns:a="http://schemas.openxmlformats.org/drawingml/2006/main">
-            <a:off x="609600" y="2466975"/>
-            <a:ext cx="5191125" cy="2247900"/>
+            <a:off x="609600" y="3867150"/>
+            <a:ext cx="2095500" cy="533400"/>
           </a:xfrm>
           <a:prstGeom xmlns:a="http://schemas.openxmlformats.org/drawingml/2006/main" prst="rect">
             <a:avLst/>
@@ -4833,104 +6681,58 @@
           <a:lstStyle xmlns:a="http://schemas.openxmlformats.org/drawingml/2006/main"/>
           <a:p xmlns:a="http://schemas.openxmlformats.org/drawingml/2006/main">
             <a:pPr>
-              <a:defRPr sz="2175" b="0">
-                <a:solidFill>
-                  <a:srgbClr val="18191C"/>
-                </a:solidFill>
-                <a:latin typeface="Malgun Gothic"/>
-                <a:ea typeface="Malgun Gothic"/>
-                <a:cs typeface="Malgun Gothic"/>
-              </a:defRPr>
-            </a:pPr>
-            <a:r>
-              <a:rPr sz="2175" b="0">
-                <a:solidFill>
-                  <a:srgbClr val="18191C"/>
-                </a:solidFill>
-                <a:latin typeface="Malgun Gothic"/>
-                <a:ea typeface="Malgun Gothic"/>
-                <a:cs typeface="Malgun Gothic"/>
-              </a:rPr>
-              <a:t>HTML 화면 구조</a:t>
-            </a:r>
-          </a:p>
-          <a:p xmlns:a="http://schemas.openxmlformats.org/drawingml/2006/main">
-            <a:pPr>
-              <a:defRPr sz="2175" b="0">
-                <a:solidFill>
-                  <a:srgbClr val="18191C"/>
-                </a:solidFill>
-                <a:latin typeface="Malgun Gothic"/>
-                <a:ea typeface="Malgun Gothic"/>
-                <a:cs typeface="Malgun Gothic"/>
-              </a:defRPr>
-            </a:pPr>
-            <a:r>
-              <a:rPr sz="2175" b="0">
-                <a:solidFill>
-                  <a:srgbClr val="18191C"/>
-                </a:solidFill>
-                <a:latin typeface="Malgun Gothic"/>
-                <a:ea typeface="Malgun Gothic"/>
-                <a:cs typeface="Malgun Gothic"/>
-              </a:rPr>
-              <a:t>Flex 기반 배치와 카드 줄바꿈</a:t>
-            </a:r>
-          </a:p>
-          <a:p xmlns:a="http://schemas.openxmlformats.org/drawingml/2006/main">
-            <a:pPr>
-              <a:defRPr sz="2175" b="0">
-                <a:solidFill>
-                  <a:srgbClr val="18191C"/>
-                </a:solidFill>
-                <a:latin typeface="Malgun Gothic"/>
-                <a:ea typeface="Malgun Gothic"/>
-                <a:cs typeface="Malgun Gothic"/>
-              </a:defRPr>
-            </a:pPr>
-            <a:r>
-              <a:rPr sz="2175" b="0">
-                <a:solidFill>
-                  <a:srgbClr val="18191C"/>
-                </a:solidFill>
-                <a:latin typeface="Malgun Gothic"/>
-                <a:ea typeface="Malgun Gothic"/>
-                <a:cs typeface="Malgun Gothic"/>
-              </a:rPr>
-              <a:t>스크롤 메뉴와 CSS 선택 상태</a:t>
-            </a:r>
-          </a:p>
-          <a:p xmlns:a="http://schemas.openxmlformats.org/drawingml/2006/main">
-            <a:pPr>
-              <a:defRPr sz="2175" b="0">
-                <a:solidFill>
-                  <a:srgbClr val="18191C"/>
-                </a:solidFill>
-                <a:latin typeface="Malgun Gothic"/>
-                <a:ea typeface="Malgun Gothic"/>
-                <a:cs typeface="Malgun Gothic"/>
-              </a:defRPr>
-            </a:pPr>
-            <a:r>
-              <a:rPr sz="2175" b="0">
-                <a:solidFill>
-                  <a:srgbClr val="18191C"/>
-                </a:solidFill>
-                <a:latin typeface="Malgun Gothic"/>
-                <a:ea typeface="Malgun Gothic"/>
-                <a:cs typeface="Malgun Gothic"/>
-              </a:rPr>
-              <a:t>내부 페이지와 외부 서비스 링크</a:t>
-            </a:r>
-          </a:p>
-        </p:txBody>
-      </p:sp>
-      <p:sp>
-        <p:nvSpPr>
-          <p:cNvPr id="4" name="text-38">
+              <a:buNone/>
+              <a:defRPr sz="2100" b="1">
+                <a:solidFill>
+                  <a:srgbClr val="005CC9"/>
+                </a:solidFill>
+                <a:latin typeface="Malgun Gothic"/>
+                <a:ea typeface="Malgun Gothic"/>
+                <a:cs typeface="Malgun Gothic"/>
+              </a:defRPr>
+            </a:pPr>
+            <a:r>
+              <a:rPr sz="2100" b="1">
+                <a:solidFill>
+                  <a:srgbClr val="005CC9"/>
+                </a:solidFill>
+                <a:latin typeface="Malgun Gothic"/>
+                <a:ea typeface="Malgun Gothic"/>
+                <a:cs typeface="Malgun Gothic"/>
+              </a:rPr>
+              <a:t>마우스 선택</a:t>
+            </a:r>
+          </a:p>
+        </p:txBody>
+      </p:sp>
+      <p:pic>
+        <p:nvPicPr>
+          <p:cNvPr id="15" name=""/>
+          <p:cNvPicPr>
+            <a:picLocks xmlns:a="http://schemas.openxmlformats.org/drawingml/2006/main" noChangeAspect="1"/>
+          </p:cNvPicPr>
+          <p:nvPr/>
+        </p:nvPicPr>
+        <p:blipFill>
+          <a:blip xmlns:r="http://schemas.openxmlformats.org/officeDocument/2006/relationships" xmlns:a="http://schemas.openxmlformats.org/drawingml/2006/main" r:embed="Reeec16a235914cfa"/>
+          <a:stretch xmlns:a="http://schemas.openxmlformats.org/drawingml/2006/main"/>
+        </p:blipFill>
+        <p:spPr>
+          <a:xfrm xmlns:a="http://schemas.openxmlformats.org/drawingml/2006/main">
+            <a:off x="2705100" y="3474720"/>
+            <a:ext cx="8877300" cy="1775460"/>
+          </a:xfrm>
+          <a:prstGeom xmlns:a="http://schemas.openxmlformats.org/drawingml/2006/main" prst="rect">
+            <a:avLst/>
+          </a:prstGeom>
+        </p:spPr>
+      </p:pic>
+      <p:sp>
+        <p:nvSpPr>
+          <p:cNvPr id="6" name="text-29">
             <a:extLst xmlns:a="http://schemas.openxmlformats.org/drawingml/2006/main">
               <a:ext uri="{FF2B5EF4-FFF2-40B4-BE49-F238E27FC236}">
-                <a16:creationId xmlns:a16="http://schemas.microsoft.com/office/drawing/2014/main" id="{F89BDF42-D2EC-4759-A351-30DB32F43372}"/>
+                <a16:creationId xmlns:a16="http://schemas.microsoft.com/office/drawing/2014/main" id="{787A1D84-1904-4252-BE66-6803FE8E8661}"/>
               </a:ext>
             </a:extLst>
           </p:cNvPr>
@@ -4941,8 +6743,8 @@
         </p:nvSpPr>
         <p:spPr>
           <a:xfrm xmlns:a="http://schemas.openxmlformats.org/drawingml/2006/main">
-            <a:off x="6553200" y="1552575"/>
-            <a:ext cx="5048250" cy="571500"/>
+            <a:off x="609600" y="5667375"/>
+            <a:ext cx="10972800" cy="495300"/>
           </a:xfrm>
           <a:prstGeom xmlns:a="http://schemas.openxmlformats.org/drawingml/2006/main" prst="rect">
             <a:avLst/>
@@ -4959,35 +6761,36 @@
           <a:lstStyle xmlns:a="http://schemas.openxmlformats.org/drawingml/2006/main"/>
           <a:p xmlns:a="http://schemas.openxmlformats.org/drawingml/2006/main">
             <a:pPr>
-              <a:defRPr sz="2400" b="1">
-                <a:solidFill>
-                  <a:srgbClr val="555D6B"/>
-                </a:solidFill>
-                <a:latin typeface="Malgun Gothic"/>
-                <a:ea typeface="Malgun Gothic"/>
-                <a:cs typeface="Malgun Gothic"/>
-              </a:defRPr>
-            </a:pPr>
-            <a:r>
-              <a:rPr sz="2400" b="1">
-                <a:solidFill>
-                  <a:srgbClr val="555D6B"/>
-                </a:solidFill>
-                <a:latin typeface="Malgun Gothic"/>
-                <a:ea typeface="Malgun Gothic"/>
-                <a:cs typeface="Malgun Gothic"/>
-              </a:rPr>
-              <a:t>현재 범위에 없는 부분</a:t>
-            </a:r>
-          </a:p>
-        </p:txBody>
-      </p:sp>
-      <p:sp>
-        <p:nvSpPr>
-          <p:cNvPr id="5" name="text-39">
+              <a:buNone/>
+              <a:defRPr sz="2175" b="1">
+                <a:solidFill>
+                  <a:srgbClr val="005CC9"/>
+                </a:solidFill>
+                <a:latin typeface="Malgun Gothic"/>
+                <a:ea typeface="Malgun Gothic"/>
+                <a:cs typeface="Malgun Gothic"/>
+              </a:defRPr>
+            </a:pPr>
+            <a:r>
+              <a:rPr sz="2175" b="1">
+                <a:solidFill>
+                  <a:srgbClr val="005CC9"/>
+                </a:solidFill>
+                <a:latin typeface="Malgun Gothic"/>
+                <a:ea typeface="Malgun Gothic"/>
+                <a:cs typeface="Malgun Gothic"/>
+              </a:rPr>
+              <a:t>:hover와 :focus-visible에 같은 강조색 적용</a:t>
+            </a:r>
+          </a:p>
+        </p:txBody>
+      </p:sp>
+      <p:sp>
+        <p:nvSpPr>
+          <p:cNvPr id="10" name="detail-117">
             <a:extLst xmlns:a="http://schemas.openxmlformats.org/drawingml/2006/main">
               <a:ext uri="{FF2B5EF4-FFF2-40B4-BE49-F238E27FC236}">
-                <a16:creationId xmlns:a16="http://schemas.microsoft.com/office/drawing/2014/main" id="{D8EDE086-E48F-4BFC-8FF4-12417B7C59DD}"/>
+                <a16:creationId xmlns:a16="http://schemas.microsoft.com/office/drawing/2014/main" id="{7FB879A0-9294-4979-A1A9-D8A743A0366A}"/>
               </a:ext>
             </a:extLst>
           </p:cNvPr>
@@ -4998,8 +6801,8 @@
         </p:nvSpPr>
         <p:spPr>
           <a:xfrm xmlns:a="http://schemas.openxmlformats.org/drawingml/2006/main">
-            <a:off x="6553200" y="2466975"/>
-            <a:ext cx="5029200" cy="2247900"/>
+            <a:off x="609600" y="6191250"/>
+            <a:ext cx="10972800" cy="428625"/>
           </a:xfrm>
           <a:prstGeom xmlns:a="http://schemas.openxmlformats.org/drawingml/2006/main" prst="rect">
             <a:avLst/>
@@ -5016,81 +6819,64 @@
           <a:lstStyle xmlns:a="http://schemas.openxmlformats.org/drawingml/2006/main"/>
           <a:p xmlns:a="http://schemas.openxmlformats.org/drawingml/2006/main">
             <a:pPr>
-              <a:defRPr sz="2175" b="0">
-                <a:solidFill>
-                  <a:srgbClr val="18191C"/>
-                </a:solidFill>
-                <a:latin typeface="Malgun Gothic"/>
-                <a:ea typeface="Malgun Gothic"/>
-                <a:cs typeface="Malgun Gothic"/>
-              </a:defRPr>
-            </a:pPr>
-            <a:r>
-              <a:rPr sz="2175" b="0">
-                <a:solidFill>
-                  <a:srgbClr val="18191C"/>
-                </a:solidFill>
-                <a:latin typeface="Malgun Gothic"/>
-                <a:ea typeface="Malgun Gothic"/>
-                <a:cs typeface="Malgun Gothic"/>
-              </a:rPr>
-              <a:t>로그인 인증과 문의 접수 처리</a:t>
-            </a:r>
-          </a:p>
-          <a:p xmlns:a="http://schemas.openxmlformats.org/drawingml/2006/main">
-            <a:pPr>
-              <a:defRPr sz="2175" b="0">
-                <a:solidFill>
-                  <a:srgbClr val="18191C"/>
-                </a:solidFill>
-                <a:latin typeface="Malgun Gothic"/>
-                <a:ea typeface="Malgun Gothic"/>
-                <a:cs typeface="Malgun Gothic"/>
-              </a:defRPr>
-            </a:pPr>
-            <a:r>
-              <a:rPr sz="2175" b="0">
-                <a:solidFill>
-                  <a:srgbClr val="18191C"/>
-                </a:solidFill>
-                <a:latin typeface="Malgun Gothic"/>
-                <a:ea typeface="Malgun Gothic"/>
-                <a:cs typeface="Malgun Gothic"/>
-              </a:rPr>
-              <a:t>메뉴 / 전체 서비스 보기 버튼 동작</a:t>
-            </a:r>
-          </a:p>
-          <a:p xmlns:a="http://schemas.openxmlformats.org/drawingml/2006/main">
-            <a:pPr>
-              <a:defRPr sz="2175" b="0">
-                <a:solidFill>
-                  <a:srgbClr val="18191C"/>
-                </a:solidFill>
-                <a:latin typeface="Malgun Gothic"/>
-                <a:ea typeface="Malgun Gothic"/>
-                <a:cs typeface="Malgun Gothic"/>
-              </a:defRPr>
-            </a:pPr>
-            <a:r>
-              <a:rPr sz="2175" b="0">
-                <a:solidFill>
-                  <a:srgbClr val="18191C"/>
-                </a:solidFill>
-                <a:latin typeface="Malgun Gothic"/>
-                <a:ea typeface="Malgun Gothic"/>
-                <a:cs typeface="Malgun Gothic"/>
-              </a:rPr>
-              <a:t>화면 크기별 전용 미디어쿼리</a:t>
-            </a:r>
-          </a:p>
-        </p:txBody>
-      </p:sp>
-      <p:sp>
-        <p:nvSpPr>
-          <p:cNvPr id="6" name="text-40">
+              <a:defRPr sz="1800" b="0">
+                <a:solidFill>
+                  <a:srgbClr val="555D6B"/>
+                </a:solidFill>
+                <a:latin typeface="Malgun Gothic"/>
+                <a:ea typeface="Malgun Gothic"/>
+                <a:cs typeface="Malgun Gothic"/>
+              </a:defRPr>
+            </a:pPr>
+            <a:r>
+              <a:rPr sz="1800" b="0">
+                <a:solidFill>
+                  <a:srgbClr val="555D6B"/>
+                </a:solidFill>
+                <a:latin typeface="Malgun Gothic"/>
+                <a:ea typeface="Malgun Gothic"/>
+                <a:cs typeface="Malgun Gothic"/>
+              </a:rPr>
+              <a:t>버튼 색은 0.2초 동안 전환 / 카드 그림자는 크기 변화 없이 강조</a:t>
+            </a:r>
+          </a:p>
+        </p:txBody>
+      </p:sp>
+    </p:spTree>
+    <p:extLst>
+      <p:ext uri="{BB962C8B-B14F-4D97-AF65-F5344CB8AC3E}">
+        <p14:creationId xmlns:p14="http://schemas.microsoft.com/office/powerpoint/2010/main" val="855842776"/>
+      </p:ext>
+    </p:extLst>
+  </p:cSld>
+</p:sld>
+</file>
+
+<file path=ppt/slides/slide9.xml><?xml version="1.0" encoding="utf-8"?>
+<p:sld xmlns:p="http://schemas.openxmlformats.org/presentationml/2006/main">
+  <p:cSld>
+    <p:bg>
+      <p:bgPr>
+        <a:solidFill xmlns:a="http://schemas.openxmlformats.org/drawingml/2006/main">
+          <a:srgbClr val="FFFFFF"/>
+        </a:solidFill>
+      </p:bgPr>
+    </p:bg>
+    <p:spTree>
+      <p:nvGrpSpPr>
+        <p:cNvPr id="1" name=""/>
+        <p:cNvGrpSpPr/>
+        <p:nvPr/>
+      </p:nvGrpSpPr>
+      <p:grpSpPr>
+        <a:xfrm xmlns:a="http://schemas.openxmlformats.org/drawingml/2006/main"/>
+      </p:grpSpPr>
+      <p:sp>
+        <p:nvSpPr>
+          <p:cNvPr id="7" name="text-30">
             <a:extLst xmlns:a="http://schemas.openxmlformats.org/drawingml/2006/main">
               <a:ext uri="{FF2B5EF4-FFF2-40B4-BE49-F238E27FC236}">
-                <a16:creationId xmlns:a16="http://schemas.microsoft.com/office/drawing/2014/main" id="{2BB10473-E0D4-46C0-A508-3971C629DA54}"/>
+                <a16:creationId xmlns:a16="http://schemas.microsoft.com/office/drawing/2014/main" id="{02184F8B-57B9-448A-B818-6BF5A6E8B3BB}"/>
               </a:ext>
             </a:extLst>
           </p:cNvPr>
@@ -5101,8 +6887,8 @@
         </p:nvSpPr>
         <p:spPr>
           <a:xfrm xmlns:a="http://schemas.openxmlformats.org/drawingml/2006/main">
-            <a:off x="609600" y="5429250"/>
-            <a:ext cx="2476500" cy="457200"/>
+            <a:off x="609600" y="438150"/>
+            <a:ext cx="10972800" cy="723900"/>
           </a:xfrm>
           <a:prstGeom xmlns:a="http://schemas.openxmlformats.org/drawingml/2006/main" prst="rect">
             <a:avLst/>
@@ -5119,35 +6905,58 @@
           <a:lstStyle xmlns:a="http://schemas.openxmlformats.org/drawingml/2006/main"/>
           <a:p xmlns:a="http://schemas.openxmlformats.org/drawingml/2006/main">
             <a:pPr>
-              <a:defRPr sz="2025" b="1">
-                <a:solidFill>
-                  <a:srgbClr val="005CC9"/>
-                </a:solidFill>
-                <a:latin typeface="Malgun Gothic"/>
-                <a:ea typeface="Malgun Gothic"/>
-                <a:cs typeface="Malgun Gothic"/>
-              </a:defRPr>
-            </a:pPr>
-            <a:r>
-              <a:rPr sz="2025" b="1">
-                <a:solidFill>
-                  <a:srgbClr val="005CC9"/>
-                </a:solidFill>
-                <a:latin typeface="Malgun Gothic"/>
-                <a:ea typeface="Malgun Gothic"/>
-                <a:cs typeface="Malgun Gothic"/>
-              </a:rPr>
-              <a:t>시연 순서</a:t>
-            </a:r>
-          </a:p>
-        </p:txBody>
-      </p:sp>
-      <p:sp>
-        <p:nvSpPr>
-          <p:cNvPr id="7" name="text-41">
+              <a:buNone/>
+              <a:defRPr sz="3450" b="1">
+                <a:solidFill>
+                  <a:srgbClr val="18191C"/>
+                </a:solidFill>
+                <a:latin typeface="Malgun Gothic"/>
+                <a:ea typeface="Malgun Gothic"/>
+                <a:cs typeface="Malgun Gothic"/>
+              </a:defRPr>
+            </a:pPr>
+            <a:r>
+              <a:rPr sz="3450" b="1">
+                <a:solidFill>
+                  <a:srgbClr val="18191C"/>
+                </a:solidFill>
+                <a:latin typeface="Malgun Gothic"/>
+                <a:ea typeface="Malgun Gothic"/>
+                <a:cs typeface="Malgun Gothic"/>
+              </a:rPr>
+              <a:t>팀 페이지와 외부 서비스 연결</a:t>
+            </a:r>
+          </a:p>
+        </p:txBody>
+      </p:sp>
+      <p:pic>
+        <p:nvPicPr>
+          <p:cNvPr id="11" name=""/>
+          <p:cNvPicPr>
+            <a:picLocks xmlns:a="http://schemas.openxmlformats.org/drawingml/2006/main" noChangeAspect="1"/>
+          </p:cNvPicPr>
+          <p:nvPr/>
+        </p:nvPicPr>
+        <p:blipFill>
+          <a:blip xmlns:r="http://schemas.openxmlformats.org/officeDocument/2006/relationships" xmlns:a="http://schemas.openxmlformats.org/drawingml/2006/main" r:embed="R560b9041ec7f415a"/>
+          <a:stretch xmlns:a="http://schemas.openxmlformats.org/drawingml/2006/main"/>
+        </p:blipFill>
+        <p:spPr>
+          <a:xfrm xmlns:a="http://schemas.openxmlformats.org/drawingml/2006/main">
+            <a:off x="609600" y="1460183"/>
+            <a:ext cx="10972800" cy="899160"/>
+          </a:xfrm>
+          <a:prstGeom xmlns:a="http://schemas.openxmlformats.org/drawingml/2006/main" prst="rect">
+            <a:avLst/>
+          </a:prstGeom>
+        </p:spPr>
+      </p:pic>
+      <p:sp>
+        <p:nvSpPr>
+          <p:cNvPr id="3" name="text-31">
             <a:extLst xmlns:a="http://schemas.openxmlformats.org/drawingml/2006/main">
               <a:ext uri="{FF2B5EF4-FFF2-40B4-BE49-F238E27FC236}">
-                <a16:creationId xmlns:a16="http://schemas.microsoft.com/office/drawing/2014/main" id="{5E56D58D-EE8D-48FC-A0EC-83EF5E65F885}"/>
+                <a16:creationId xmlns:a16="http://schemas.microsoft.com/office/drawing/2014/main" id="{B62C282B-AF93-4E00-9D8B-8CC750BA822D}"/>
               </a:ext>
             </a:extLst>
           </p:cNvPr>
@@ -5158,8 +6967,8 @@
         </p:nvSpPr>
         <p:spPr>
           <a:xfrm xmlns:a="http://schemas.openxmlformats.org/drawingml/2006/main">
-            <a:off x="609600" y="5981700"/>
-            <a:ext cx="10972800" cy="447675"/>
+            <a:off x="609600" y="2876550"/>
+            <a:ext cx="5048250" cy="552450"/>
           </a:xfrm>
           <a:prstGeom xmlns:a="http://schemas.openxmlformats.org/drawingml/2006/main" prst="rect">
             <a:avLst/>
@@ -5176,25 +6985,353 @@
           <a:lstStyle xmlns:a="http://schemas.openxmlformats.org/drawingml/2006/main"/>
           <a:p xmlns:a="http://schemas.openxmlformats.org/drawingml/2006/main">
             <a:pPr>
-              <a:defRPr sz="1950" b="0">
-                <a:solidFill>
-                  <a:srgbClr val="18191C"/>
-                </a:solidFill>
-                <a:latin typeface="Malgun Gothic"/>
-                <a:ea typeface="Malgun Gothic"/>
-                <a:cs typeface="Malgun Gothic"/>
-              </a:defRPr>
-            </a:pPr>
-            <a:r>
-              <a:rPr sz="1950" b="0">
-                <a:solidFill>
-                  <a:srgbClr val="18191C"/>
-                </a:solidFill>
-                <a:latin typeface="Malgun Gothic"/>
-                <a:ea typeface="Malgun Gothic"/>
-                <a:cs typeface="Malgun Gothic"/>
-              </a:rPr>
-              <a:t>전체 화면 확인  /  스크롤  /  버튼 선택 상태  /  페이지 이동</a:t>
+              <a:buNone/>
+              <a:defRPr sz="2325" b="1">
+                <a:solidFill>
+                  <a:srgbClr val="005CC9"/>
+                </a:solidFill>
+                <a:latin typeface="Malgun Gothic"/>
+                <a:ea typeface="Malgun Gothic"/>
+                <a:cs typeface="Malgun Gothic"/>
+              </a:defRPr>
+            </a:pPr>
+            <a:r>
+              <a:rPr sz="2325" b="1">
+                <a:solidFill>
+                  <a:srgbClr val="005CC9"/>
+                </a:solidFill>
+                <a:latin typeface="Malgun Gothic"/>
+                <a:ea typeface="Malgun Gothic"/>
+                <a:cs typeface="Malgun Gothic"/>
+              </a:rPr>
+              <a:t>프로젝트 내부 링크</a:t>
+            </a:r>
+          </a:p>
+        </p:txBody>
+      </p:sp>
+      <p:sp>
+        <p:nvSpPr>
+          <p:cNvPr id="4" name="text-32">
+            <a:extLst xmlns:a="http://schemas.openxmlformats.org/drawingml/2006/main">
+              <a:ext uri="{FF2B5EF4-FFF2-40B4-BE49-F238E27FC236}">
+                <a16:creationId xmlns:a16="http://schemas.microsoft.com/office/drawing/2014/main" id="{D00EBF54-1A0E-472F-A65F-98DAD40F1968}"/>
+              </a:ext>
+            </a:extLst>
+          </p:cNvPr>
+          <p:cNvSpPr>
+            <a:spLocks xmlns:a="http://schemas.openxmlformats.org/drawingml/2006/main" noGrp="1"/>
+          </p:cNvSpPr>
+          <p:nvPr/>
+        </p:nvSpPr>
+        <p:spPr>
+          <a:xfrm xmlns:a="http://schemas.openxmlformats.org/drawingml/2006/main">
+            <a:off x="609600" y="3733800"/>
+            <a:ext cx="5181600" cy="1971675"/>
+          </a:xfrm>
+          <a:prstGeom xmlns:a="http://schemas.openxmlformats.org/drawingml/2006/main" prst="rect">
+            <a:avLst/>
+          </a:prstGeom>
+          <a:noFill xmlns:a="http://schemas.openxmlformats.org/drawingml/2006/main"/>
+          <a:ln xmlns:a="http://schemas.openxmlformats.org/drawingml/2006/main" w="0">
+            <a:noFill/>
+          </a:ln>
+        </p:spPr>
+        <p:txBody>
+          <a:bodyPr xmlns:a="http://schemas.openxmlformats.org/drawingml/2006/main">
+            <a:noAutofit/>
+          </a:bodyPr>
+          <a:lstStyle xmlns:a="http://schemas.openxmlformats.org/drawingml/2006/main"/>
+          <a:p xmlns:a="http://schemas.openxmlformats.org/drawingml/2006/main">
+            <a:pPr>
+              <a:buNone/>
+              <a:defRPr sz="2025" b="0">
+                <a:solidFill>
+                  <a:srgbClr val="18191C"/>
+                </a:solidFill>
+                <a:latin typeface="Malgun Gothic"/>
+                <a:ea typeface="Malgun Gothic"/>
+                <a:cs typeface="Malgun Gothic"/>
+              </a:defRPr>
+            </a:pPr>
+            <a:r>
+              <a:rPr sz="2025" b="0">
+                <a:solidFill>
+                  <a:srgbClr val="18191C"/>
+                </a:solidFill>
+                <a:latin typeface="Malgun Gothic"/>
+                <a:ea typeface="Malgun Gothic"/>
+                <a:cs typeface="Malgun Gothic"/>
+              </a:rPr>
+              <a:t>로고는 메인 페이지로 이동</a:t>
+            </a:r>
+          </a:p>
+          <a:p xmlns:a="http://schemas.openxmlformats.org/drawingml/2006/main">
+            <a:pPr>
+              <a:buNone/>
+              <a:defRPr sz="2025" b="0">
+                <a:solidFill>
+                  <a:srgbClr val="18191C"/>
+                </a:solidFill>
+                <a:latin typeface="Malgun Gothic"/>
+                <a:ea typeface="Malgun Gothic"/>
+                <a:cs typeface="Malgun Gothic"/>
+              </a:defRPr>
+            </a:pPr>
+            <a:r>
+              <a:rPr sz="2025" b="0">
+                <a:solidFill>
+                  <a:srgbClr val="18191C"/>
+                </a:solidFill>
+                <a:latin typeface="Malgun Gothic"/>
+                <a:ea typeface="Malgun Gothic"/>
+                <a:cs typeface="Malgun Gothic"/>
+              </a:rPr>
+              <a:t>회원가입과 로그인은 로그인 페이지로 이동</a:t>
+            </a:r>
+          </a:p>
+          <a:p xmlns:a="http://schemas.openxmlformats.org/drawingml/2006/main">
+            <a:pPr>
+              <a:buNone/>
+              <a:defRPr sz="2025" b="0">
+                <a:solidFill>
+                  <a:srgbClr val="18191C"/>
+                </a:solidFill>
+                <a:latin typeface="Malgun Gothic"/>
+                <a:ea typeface="Malgun Gothic"/>
+                <a:cs typeface="Malgun Gothic"/>
+              </a:defRPr>
+            </a:pPr>
+            <a:r>
+              <a:rPr sz="2025" b="0">
+                <a:solidFill>
+                  <a:srgbClr val="18191C"/>
+                </a:solidFill>
+                <a:latin typeface="Malgun Gothic"/>
+                <a:ea typeface="Malgun Gothic"/>
+                <a:cs typeface="Malgun Gothic"/>
+              </a:rPr>
+              <a:t>공지사항, MY결제, 보안센터 연결</a:t>
+            </a:r>
+          </a:p>
+        </p:txBody>
+      </p:sp>
+      <p:sp>
+        <p:nvSpPr>
+          <p:cNvPr id="5" name="text-33">
+            <a:extLst xmlns:a="http://schemas.openxmlformats.org/drawingml/2006/main">
+              <a:ext uri="{FF2B5EF4-FFF2-40B4-BE49-F238E27FC236}">
+                <a16:creationId xmlns:a16="http://schemas.microsoft.com/office/drawing/2014/main" id="{3B497291-84DE-4563-8800-924CBE7608D5}"/>
+              </a:ext>
+            </a:extLst>
+          </p:cNvPr>
+          <p:cNvSpPr>
+            <a:spLocks xmlns:a="http://schemas.openxmlformats.org/drawingml/2006/main" noGrp="1"/>
+          </p:cNvSpPr>
+          <p:nvPr/>
+        </p:nvSpPr>
+        <p:spPr>
+          <a:xfrm xmlns:a="http://schemas.openxmlformats.org/drawingml/2006/main">
+            <a:off x="6543675" y="2876550"/>
+            <a:ext cx="5048250" cy="552450"/>
+          </a:xfrm>
+          <a:prstGeom xmlns:a="http://schemas.openxmlformats.org/drawingml/2006/main" prst="rect">
+            <a:avLst/>
+          </a:prstGeom>
+          <a:noFill xmlns:a="http://schemas.openxmlformats.org/drawingml/2006/main"/>
+          <a:ln xmlns:a="http://schemas.openxmlformats.org/drawingml/2006/main" w="0">
+            <a:noFill/>
+          </a:ln>
+        </p:spPr>
+        <p:txBody>
+          <a:bodyPr xmlns:a="http://schemas.openxmlformats.org/drawingml/2006/main">
+            <a:noAutofit/>
+          </a:bodyPr>
+          <a:lstStyle xmlns:a="http://schemas.openxmlformats.org/drawingml/2006/main"/>
+          <a:p xmlns:a="http://schemas.openxmlformats.org/drawingml/2006/main">
+            <a:pPr>
+              <a:buNone/>
+              <a:defRPr sz="2325" b="1">
+                <a:solidFill>
+                  <a:srgbClr val="005CC9"/>
+                </a:solidFill>
+                <a:latin typeface="Malgun Gothic"/>
+                <a:ea typeface="Malgun Gothic"/>
+                <a:cs typeface="Malgun Gothic"/>
+              </a:defRPr>
+            </a:pPr>
+            <a:r>
+              <a:rPr sz="2325" b="1">
+                <a:solidFill>
+                  <a:srgbClr val="005CC9"/>
+                </a:solidFill>
+                <a:latin typeface="Malgun Gothic"/>
+                <a:ea typeface="Malgun Gothic"/>
+                <a:cs typeface="Malgun Gothic"/>
+              </a:rPr>
+              <a:t>외부 서비스 링크</a:t>
+            </a:r>
+          </a:p>
+        </p:txBody>
+      </p:sp>
+      <p:sp>
+        <p:nvSpPr>
+          <p:cNvPr id="6" name="text-34">
+            <a:extLst xmlns:a="http://schemas.openxmlformats.org/drawingml/2006/main">
+              <a:ext uri="{FF2B5EF4-FFF2-40B4-BE49-F238E27FC236}">
+                <a16:creationId xmlns:a16="http://schemas.microsoft.com/office/drawing/2014/main" id="{C74F8426-C2F5-460D-8CFA-18790077F6E7}"/>
+              </a:ext>
+            </a:extLst>
+          </p:cNvPr>
+          <p:cNvSpPr>
+            <a:spLocks xmlns:a="http://schemas.openxmlformats.org/drawingml/2006/main" noGrp="1"/>
+          </p:cNvSpPr>
+          <p:nvPr/>
+        </p:nvSpPr>
+        <p:spPr>
+          <a:xfrm xmlns:a="http://schemas.openxmlformats.org/drawingml/2006/main">
+            <a:off x="6543675" y="3733800"/>
+            <a:ext cx="5048250" cy="1971675"/>
+          </a:xfrm>
+          <a:prstGeom xmlns:a="http://schemas.openxmlformats.org/drawingml/2006/main" prst="rect">
+            <a:avLst/>
+          </a:prstGeom>
+          <a:noFill xmlns:a="http://schemas.openxmlformats.org/drawingml/2006/main"/>
+          <a:ln xmlns:a="http://schemas.openxmlformats.org/drawingml/2006/main" w="0">
+            <a:noFill/>
+          </a:ln>
+        </p:spPr>
+        <p:txBody>
+          <a:bodyPr xmlns:a="http://schemas.openxmlformats.org/drawingml/2006/main">
+            <a:noAutofit/>
+          </a:bodyPr>
+          <a:lstStyle xmlns:a="http://schemas.openxmlformats.org/drawingml/2006/main"/>
+          <a:p xmlns:a="http://schemas.openxmlformats.org/drawingml/2006/main">
+            <a:pPr>
+              <a:buNone/>
+              <a:defRPr sz="2025" b="0">
+                <a:solidFill>
+                  <a:srgbClr val="18191C"/>
+                </a:solidFill>
+                <a:latin typeface="Malgun Gothic"/>
+                <a:ea typeface="Malgun Gothic"/>
+                <a:cs typeface="Malgun Gothic"/>
+              </a:defRPr>
+            </a:pPr>
+            <a:r>
+              <a:rPr sz="2025" b="0">
+                <a:solidFill>
+                  <a:srgbClr val="18191C"/>
+                </a:solidFill>
+                <a:latin typeface="Malgun Gothic"/>
+                <a:ea typeface="Malgun Gothic"/>
+                <a:cs typeface="Malgun Gothic"/>
+              </a:rPr>
+              <a:t>게임 카드는 각 문의 페이지로 이동</a:t>
+            </a:r>
+          </a:p>
+          <a:p xmlns:a="http://schemas.openxmlformats.org/drawingml/2006/main">
+            <a:pPr>
+              <a:buNone/>
+              <a:defRPr sz="2025" b="0">
+                <a:solidFill>
+                  <a:srgbClr val="18191C"/>
+                </a:solidFill>
+                <a:latin typeface="Malgun Gothic"/>
+                <a:ea typeface="Malgun Gothic"/>
+                <a:cs typeface="Malgun Gothic"/>
+              </a:defRPr>
+            </a:pPr>
+            <a:r>
+              <a:rPr sz="2025" b="0">
+                <a:solidFill>
+                  <a:srgbClr val="18191C"/>
+                </a:solidFill>
+                <a:latin typeface="Malgun Gothic"/>
+                <a:ea typeface="Malgun Gothic"/>
+                <a:cs typeface="Malgun Gothic"/>
+              </a:rPr>
+              <a:t>이벤트와 내정보는 넥슨 서비스 연결</a:t>
+            </a:r>
+          </a:p>
+          <a:p xmlns:a="http://schemas.openxmlformats.org/drawingml/2006/main">
+            <a:pPr>
+              <a:buNone/>
+              <a:defRPr sz="2025" b="0">
+                <a:solidFill>
+                  <a:srgbClr val="18191C"/>
+                </a:solidFill>
+                <a:latin typeface="Malgun Gothic"/>
+                <a:ea typeface="Malgun Gothic"/>
+                <a:cs typeface="Malgun Gothic"/>
+              </a:defRPr>
+            </a:pPr>
+            <a:r>
+              <a:rPr sz="2025" b="0">
+                <a:solidFill>
+                  <a:srgbClr val="18191C"/>
+                </a:solidFill>
+                <a:latin typeface="Malgun Gothic"/>
+                <a:ea typeface="Malgun Gothic"/>
+                <a:cs typeface="Malgun Gothic"/>
+              </a:rPr>
+              <a:t>문의방법, 다운로드, 신고하기 연결</a:t>
+            </a:r>
+          </a:p>
+        </p:txBody>
+      </p:sp>
+      <p:sp>
+        <p:nvSpPr>
+          <p:cNvPr id="9" name="detail-118">
+            <a:extLst xmlns:a="http://schemas.openxmlformats.org/drawingml/2006/main">
+              <a:ext uri="{FF2B5EF4-FFF2-40B4-BE49-F238E27FC236}">
+                <a16:creationId xmlns:a16="http://schemas.microsoft.com/office/drawing/2014/main" id="{36503D8C-85F1-43A8-A2C5-F11229FB652E}"/>
+              </a:ext>
+            </a:extLst>
+          </p:cNvPr>
+          <p:cNvSpPr>
+            <a:spLocks xmlns:a="http://schemas.openxmlformats.org/drawingml/2006/main" noGrp="1"/>
+          </p:cNvSpPr>
+          <p:nvPr/>
+        </p:nvSpPr>
+        <p:spPr>
+          <a:xfrm xmlns:a="http://schemas.openxmlformats.org/drawingml/2006/main">
+            <a:off x="609600" y="5753100"/>
+            <a:ext cx="10972800" cy="733425"/>
+          </a:xfrm>
+          <a:prstGeom xmlns:a="http://schemas.openxmlformats.org/drawingml/2006/main" prst="rect">
+            <a:avLst/>
+          </a:prstGeom>
+          <a:noFill xmlns:a="http://schemas.openxmlformats.org/drawingml/2006/main"/>
+          <a:ln xmlns:a="http://schemas.openxmlformats.org/drawingml/2006/main" w="0">
+            <a:noFill/>
+          </a:ln>
+        </p:spPr>
+        <p:txBody>
+          <a:bodyPr xmlns:a="http://schemas.openxmlformats.org/drawingml/2006/main">
+            <a:noAutofit/>
+          </a:bodyPr>
+          <a:lstStyle xmlns:a="http://schemas.openxmlformats.org/drawingml/2006/main"/>
+          <a:p xmlns:a="http://schemas.openxmlformats.org/drawingml/2006/main">
+            <a:pPr>
+              <a:defRPr sz="1875" b="0">
+                <a:solidFill>
+                  <a:srgbClr val="005CC9"/>
+                </a:solidFill>
+                <a:latin typeface="Malgun Gothic"/>
+                <a:ea typeface="Malgun Gothic"/>
+                <a:cs typeface="Malgun Gothic"/>
+              </a:defRPr>
+            </a:pPr>
+            <a:r>
+              <a:rPr sz="1875" b="0">
+                <a:solidFill>
+                  <a:srgbClr val="005CC9"/>
+                </a:solidFill>
+                <a:latin typeface="Malgun Gothic"/>
+                <a:ea typeface="Malgun Gothic"/>
+                <a:cs typeface="Malgun Gothic"/>
+              </a:rPr>
+              <a:t>현재 메뉴는 aria-current="page"로 지정하고, 속성 선택자로 밑줄과 글자색 적용</a:t>
             </a:r>
           </a:p>
         </p:txBody>
@@ -5202,7 +7339,7 @@
     </p:spTree>
     <p:extLst>
       <p:ext uri="{BB962C8B-B14F-4D97-AF65-F5344CB8AC3E}">
-        <p14:creationId xmlns:p14="http://schemas.microsoft.com/office/powerpoint/2010/main" val="1620894584"/>
+        <p14:creationId xmlns:p14="http://schemas.microsoft.com/office/powerpoint/2010/main" val="1868541726"/>
       </p:ext>
     </p:extLst>
   </p:cSld>
